--- a/deliveries/week10/PresentationWeek10.pptx
+++ b/deliveries/week10/PresentationWeek10.pptx
@@ -4,6 +4,9 @@
   <p:sldMasterIdLst>
     <p:sldMasterId id="2147483648" r:id="rId1"/>
   </p:sldMasterIdLst>
+  <p:notesMasterIdLst>
+    <p:notesMasterId r:id="rId14"/>
+  </p:notesMasterIdLst>
   <p:sldIdLst>
     <p:sldId id="256" r:id="rId2"/>
     <p:sldId id="257" r:id="rId3"/>
@@ -18,9 +21,6 @@
     <p:sldId id="266" r:id="rId12"/>
     <p:sldId id="267" r:id="rId13"/>
   </p:sldIdLst>
-  <p:notesMasterIdLst>
-    <p:notesMasterId r:id="rId14"/>
-  </p:notesMasterIdLst>
   <p:sldSz cx="12192000" cy="6858000"/>
   <p:notesSz cx="6858000" cy="12192000"/>
   <p:defaultTextStyle>
@@ -118,37 +118,37 @@
   <p:extLst>
     <p:ext uri="{521415D9-36F7-43E2-AB2F-B90AF26B5E84}">
       <p14:sectionLst xmlns:p14="http://schemas.microsoft.com/office/powerpoint/2010/main">
-        <p14:section name="Inicio" id="{f5cd0c75-1f47-7196-5936-e040e8b10d92}">
+        <p14:section name="Inicio" id="{F5CD0C75-1F47-7196-5936-E040E8B10D92}">
           <p14:sldIdLst>
             <p14:sldId id="256"/>
           </p14:sldIdLst>
         </p14:section>
-        <p14:section name="Problema y producto" id="{da380113-89a8-fe0a-bddf-878f47ce72ec}">
+        <p14:section name="Problema y producto" id="{DA380113-89A8-FE0A-BDDF-878F47CE72EC}">
           <p14:sldIdLst>
             <p14:sldId id="257"/>
             <p14:sldId id="258"/>
           </p14:sldIdLst>
         </p14:section>
-        <p14:section name="Datos y arquitectura" id="{c2c771df-3e86-ff30-786b-1ed66f46b9ae}">
+        <p14:section name="Datos y arquitectura" id="{C2C771DF-3E86-FF30-786B-1ED66F46B9AE}">
           <p14:sldIdLst>
             <p14:sldId id="259"/>
             <p14:sldId id="260"/>
           </p14:sldIdLst>
         </p14:section>
-        <p14:section name="Componentes y demo" id="{605906b0-4203-0707-b341-bc4af8959b07}">
+        <p14:section name="Componentes y demo" id="{605906B0-4203-0707-B341-BC4AF8959B07}">
           <p14:sldIdLst>
             <p14:sldId id="261"/>
             <p14:sldId id="262"/>
             <p14:sldId id="263"/>
           </p14:sldIdLst>
         </p14:section>
-        <p14:section name="Resultados" id="{be3aaa20-9146-9959-642e-db24b66652a1}">
+        <p14:section name="Resultados" id="{BE3AAA20-9146-9959-642E-DB24B66652A1}">
           <p14:sldIdLst>
             <p14:sldId id="264"/>
             <p14:sldId id="265"/>
           </p14:sldIdLst>
         </p14:section>
-        <p14:section name="Cierre" id="{2d7a2afb-a156-2ba3-82dd-36a0b2cb567f}">
+        <p14:section name="Cierre" id="{2D7A2AFB-A156-2BA3-82DD-36A0B2CB567F}">
           <p14:sldIdLst>
             <p14:sldId id="266"/>
             <p14:sldId id="267"/>
@@ -163,10 +163,80 @@
 </p:presentation>
 </file>
 
+<file path=ppt/changesInfos/changesInfo1.xml><?xml version="1.0" encoding="utf-8"?>
+<pc:chgInfo xmlns:a="http://schemas.openxmlformats.org/drawingml/2006/main" xmlns:r="http://schemas.openxmlformats.org/officeDocument/2006/relationships" xmlns:ac="http://schemas.microsoft.com/office/drawing/2013/main/command" xmlns:pc="http://schemas.microsoft.com/office/powerpoint/2013/main/command">
+  <pc:docChgLst>
+    <pc:chgData name="Adrian Urbina" userId="40c2b7f722f83dfd" providerId="LiveId" clId="{83111F7C-D39F-4B6A-B510-E020300DEA3E}"/>
+    <pc:docChg chg="modSld">
+      <pc:chgData name="Adrian Urbina" userId="40c2b7f722f83dfd" providerId="LiveId" clId="{83111F7C-D39F-4B6A-B510-E020300DEA3E}" dt="2026-10-25T18:16:14.034" v="5" actId="20577"/>
+      <pc:docMkLst>
+        <pc:docMk/>
+      </pc:docMkLst>
+      <pc:sldChg chg="modSp mod">
+        <pc:chgData name="Adrian Urbina" userId="40c2b7f722f83dfd" providerId="LiveId" clId="{83111F7C-D39F-4B6A-B510-E020300DEA3E}" dt="2026-10-25T18:16:03.824" v="3" actId="20577"/>
+        <pc:sldMkLst>
+          <pc:docMk/>
+          <pc:sldMk cId="0" sldId="256"/>
+        </pc:sldMkLst>
+        <pc:spChg chg="mod">
+          <ac:chgData name="Adrian Urbina" userId="40c2b7f722f83dfd" providerId="LiveId" clId="{83111F7C-D39F-4B6A-B510-E020300DEA3E}" dt="2026-10-25T18:16:00.471" v="0" actId="20577"/>
+          <ac:spMkLst>
+            <pc:docMk/>
+            <pc:sldMk cId="0" sldId="256"/>
+            <ac:spMk id="8" creationId="{00000000-0000-0000-0000-000000000000}"/>
+          </ac:spMkLst>
+        </pc:spChg>
+        <pc:spChg chg="mod">
+          <ac:chgData name="Adrian Urbina" userId="40c2b7f722f83dfd" providerId="LiveId" clId="{83111F7C-D39F-4B6A-B510-E020300DEA3E}" dt="2026-10-25T18:16:01.443" v="1" actId="20577"/>
+          <ac:spMkLst>
+            <pc:docMk/>
+            <pc:sldMk cId="0" sldId="256"/>
+            <ac:spMk id="9" creationId="{00000000-0000-0000-0000-000000000000}"/>
+          </ac:spMkLst>
+        </pc:spChg>
+        <pc:spChg chg="mod">
+          <ac:chgData name="Adrian Urbina" userId="40c2b7f722f83dfd" providerId="LiveId" clId="{83111F7C-D39F-4B6A-B510-E020300DEA3E}" dt="2026-10-25T18:16:03.824" v="3" actId="20577"/>
+          <ac:spMkLst>
+            <pc:docMk/>
+            <pc:sldMk cId="0" sldId="256"/>
+            <ac:spMk id="10" creationId="{00000000-0000-0000-0000-000000000000}"/>
+          </ac:spMkLst>
+        </pc:spChg>
+        <pc:spChg chg="mod">
+          <ac:chgData name="Adrian Urbina" userId="40c2b7f722f83dfd" providerId="LiveId" clId="{83111F7C-D39F-4B6A-B510-E020300DEA3E}" dt="2026-10-25T18:16:02.237" v="2" actId="20577"/>
+          <ac:spMkLst>
+            <pc:docMk/>
+            <pc:sldMk cId="0" sldId="256"/>
+            <ac:spMk id="11" creationId="{00000000-0000-0000-0000-000000000000}"/>
+          </ac:spMkLst>
+        </pc:spChg>
+      </pc:sldChg>
+      <pc:sldChg chg="modSp mod">
+        <pc:chgData name="Adrian Urbina" userId="40c2b7f722f83dfd" providerId="LiveId" clId="{83111F7C-D39F-4B6A-B510-E020300DEA3E}" dt="2026-10-25T18:16:14.034" v="5" actId="20577"/>
+        <pc:sldMkLst>
+          <pc:docMk/>
+          <pc:sldMk cId="0" sldId="267"/>
+        </pc:sldMkLst>
+        <pc:spChg chg="mod">
+          <ac:chgData name="Adrian Urbina" userId="40c2b7f722f83dfd" providerId="LiveId" clId="{83111F7C-D39F-4B6A-B510-E020300DEA3E}" dt="2026-10-25T18:16:14.034" v="5" actId="20577"/>
+          <ac:spMkLst>
+            <pc:docMk/>
+            <pc:sldMk cId="0" sldId="267"/>
+            <ac:spMk id="2" creationId="{00000000-0000-0000-0000-000000000000}"/>
+          </ac:spMkLst>
+        </pc:spChg>
+      </pc:sldChg>
+    </pc:docChg>
+  </pc:docChgLst>
+</pc:chgInfo>
+</file>
+
 <file path=ppt/charts/chart1.xml><?xml version="1.0" encoding="utf-8"?>
-<c:chartSpace xmlns:c="http://schemas.openxmlformats.org/drawingml/2006/chart" xmlns:a="http://schemas.openxmlformats.org/drawingml/2006/main" xmlns:r="http://schemas.openxmlformats.org/officeDocument/2006/relationships">
+<c:chartSpace xmlns:c="http://schemas.openxmlformats.org/drawingml/2006/chart" xmlns:a="http://schemas.openxmlformats.org/drawingml/2006/main" xmlns:r="http://schemas.openxmlformats.org/officeDocument/2006/relationships" xmlns:c16r2="http://schemas.microsoft.com/office/drawing/2015/06/chart">
   <c:date1904 val="0"/>
+  <c:lang val="es-ES"/>
   <c:roundedCorners val="1"/>
+  <c:style val="2"/>
   <c:chart>
     <c:title>
       <c:tx>
@@ -194,7 +264,6 @@
           </a:p>
         </c:rich>
       </c:tx>
-      <c:layout/>
       <c:overlay val="0"/>
     </c:title>
     <c:autoTitleDeleted val="0"/>
@@ -225,51 +294,25 @@
             <a:effectLst/>
           </c:spPr>
           <c:invertIfNegative val="0"/>
-          <c:dLbls>
-            <c:numFmt formatCode="&quot;S/ &quot;#,##0" sourceLinked="0"/>
-            <c:txPr>
-              <a:bodyPr/>
-              <a:lstStyle/>
-              <a:p>
-                <a:pPr>
-                  <a:defRPr b="1" i="0" strike="noStrike" sz="1400" u="none">
-                    <a:solidFill>
-                      <a:srgbClr val="050F16"/>
-                    </a:solidFill>
-                    <a:latin typeface="+mn-lt"/>
-                  </a:defRPr>
-                </a:pPr>
-              </a:p>
-            </c:txPr>
-            <c:showLegendKey val="0"/>
-            <c:showVal val="1"/>
-            <c:showCatName val="0"/>
-            <c:showSerName val="0"/>
-            <c:showPercent val="0"/>
-            <c:showBubbleSize val="0"/>
-            <c:showLeaderLines val="0"/>
-          </c:dLbls>
           <c:dPt>
             <c:idx val="0"/>
             <c:invertIfNegative val="0"/>
             <c:bubble3D val="0"/>
-            <c:spPr>
-              <a:solidFill>
-                <a:srgbClr val="BDBBB5"/>
-              </a:solidFill>
-              <a:effectLst/>
-            </c:spPr>
+            <c:extLst>
+              <c:ext xmlns:c16="http://schemas.microsoft.com/office/drawing/2014/chart" uri="{C3380CC4-5D6E-409C-BE32-E72D297353CC}">
+                <c16:uniqueId val="{00000001-DA65-46C9-A9DE-46A4F3DF7315}"/>
+              </c:ext>
+            </c:extLst>
           </c:dPt>
           <c:dPt>
             <c:idx val="1"/>
             <c:invertIfNegative val="0"/>
             <c:bubble3D val="0"/>
-            <c:spPr>
-              <a:solidFill>
-                <a:srgbClr val="BDBBB5"/>
-              </a:solidFill>
-              <a:effectLst/>
-            </c:spPr>
+            <c:extLst>
+              <c:ext xmlns:c16="http://schemas.microsoft.com/office/drawing/2014/chart" uri="{C3380CC4-5D6E-409C-BE32-E72D297353CC}">
+                <c16:uniqueId val="{00000003-DA65-46C9-A9DE-46A4F3DF7315}"/>
+              </c:ext>
+            </c:extLst>
           </c:dPt>
           <c:dPt>
             <c:idx val="2"/>
@@ -281,6 +324,11 @@
               </a:solidFill>
               <a:effectLst/>
             </c:spPr>
+            <c:extLst>
+              <c:ext xmlns:c16="http://schemas.microsoft.com/office/drawing/2014/chart" uri="{C3380CC4-5D6E-409C-BE32-E72D297353CC}">
+                <c16:uniqueId val="{00000005-DA65-46C9-A9DE-46A4F3DF7315}"/>
+              </c:ext>
+            </c:extLst>
           </c:dPt>
           <c:dPt>
             <c:idx val="3"/>
@@ -292,28 +340,68 @@
               </a:solidFill>
               <a:effectLst/>
             </c:spPr>
+            <c:extLst>
+              <c:ext xmlns:c16="http://schemas.microsoft.com/office/drawing/2014/chart" uri="{C3380CC4-5D6E-409C-BE32-E72D297353CC}">
+                <c16:uniqueId val="{00000007-DA65-46C9-A9DE-46A4F3DF7315}"/>
+              </c:ext>
+            </c:extLst>
           </c:dPt>
+          <c:dLbls>
+            <c:numFmt formatCode="&quot;S/ &quot;#,##0" sourceLinked="0"/>
+            <c:spPr>
+              <a:noFill/>
+              <a:ln>
+                <a:noFill/>
+              </a:ln>
+              <a:effectLst/>
+            </c:spPr>
+            <c:txPr>
+              <a:bodyPr/>
+              <a:lstStyle/>
+              <a:p>
+                <a:pPr>
+                  <a:defRPr sz="1400" b="1" i="0" u="none" strike="noStrike">
+                    <a:solidFill>
+                      <a:srgbClr val="050F16"/>
+                    </a:solidFill>
+                    <a:latin typeface="+mn-lt"/>
+                  </a:defRPr>
+                </a:pPr>
+                <a:endParaRPr lang="es-PE"/>
+              </a:p>
+            </c:txPr>
+            <c:showLegendKey val="0"/>
+            <c:showVal val="1"/>
+            <c:showCatName val="0"/>
+            <c:showSerName val="0"/>
+            <c:showPercent val="0"/>
+            <c:showBubbleSize val="0"/>
+            <c:showLeaderLines val="0"/>
+            <c:extLst>
+              <c:ext xmlns:c15="http://schemas.microsoft.com/office/drawing/2012/chart" uri="{CE6537A1-D6FC-4f65-9D91-7224C49458BB}">
+                <c15:showLeaderLines val="0"/>
+              </c:ext>
+            </c:extLst>
+          </c:dLbls>
           <c:cat>
-            <c:multiLvlStrRef>
+            <c:strRef>
               <c:f>Sheet1!$A$2:$A$5</c:f>
-              <c:multiLvlStrCache>
+              <c:strCache>
                 <c:ptCount val="4"/>
-                <c:lvl>
-                  <c:pt idx="0">
-                    <c:v>Mediana global</c:v>
-                  </c:pt>
-                  <c:pt idx="1">
-                    <c:v>Mediana del distrito</c:v>
-                  </c:pt>
-                  <c:pt idx="2">
-                    <c:v>DepaRent · septiembre</c:v>
-                  </c:pt>
-                  <c:pt idx="3">
-                    <c:v>DepaRent · octubre</c:v>
-                  </c:pt>
-                </c:lvl>
-              </c:multiLvlStrCache>
-            </c:multiLvlStrRef>
+                <c:pt idx="0">
+                  <c:v>Mediana global</c:v>
+                </c:pt>
+                <c:pt idx="1">
+                  <c:v>Mediana del distrito</c:v>
+                </c:pt>
+                <c:pt idx="2">
+                  <c:v>DepaRent · septiembre</c:v>
+                </c:pt>
+                <c:pt idx="3">
+                  <c:v>DepaRent · octubre</c:v>
+                </c:pt>
+              </c:strCache>
+            </c:strRef>
           </c:cat>
           <c:val>
             <c:numRef>
@@ -336,36 +424,23 @@
               </c:numCache>
             </c:numRef>
           </c:val>
+          <c:extLst>
+            <c:ext xmlns:c16="http://schemas.microsoft.com/office/drawing/2014/chart" uri="{C3380CC4-5D6E-409C-BE32-E72D297353CC}">
+              <c16:uniqueId val="{00000008-DA65-46C9-A9DE-46A4F3DF7315}"/>
+            </c:ext>
+          </c:extLst>
         </c:ser>
         <c:dLbls>
-          <c:numFmt formatCode="&quot;S/ &quot;#,##0" sourceLinked="0"/>
-          <c:txPr>
-            <a:bodyPr/>
-            <a:lstStyle/>
-            <a:p>
-              <a:pPr>
-                <a:defRPr b="1" i="0" strike="noStrike" sz="1400" u="none">
-                  <a:solidFill>
-                    <a:srgbClr val="050F16"/>
-                  </a:solidFill>
-                  <a:latin typeface="+mn-lt"/>
-                </a:defRPr>
-              </a:pPr>
-            </a:p>
-          </c:txPr>
           <c:showLegendKey val="0"/>
           <c:showVal val="1"/>
           <c:showCatName val="0"/>
           <c:showSerName val="0"/>
           <c:showPercent val="0"/>
           <c:showBubbleSize val="0"/>
-          <c:showLeaderLines val="0"/>
         </c:dLbls>
         <c:gapWidth val="60"/>
-        <c:overlap val="0"/>
         <c:axId val="2094734554"/>
         <c:axId val="2094734552"/>
-        <c:axId val="2094734556"/>
       </c:barChart>
       <c:catAx>
         <c:axId val="2094734554"/>
@@ -397,13 +472,14 @@
                 <a:latin typeface="+mn-lt"/>
               </a:defRPr>
             </a:pPr>
-            <a:endParaRPr lang="en-US"/>
+            <a:endParaRPr lang="es-PE"/>
           </a:p>
         </c:txPr>
         <c:crossAx val="2094734552"/>
         <c:crosses val="autoZero"/>
         <c:auto val="1"/>
         <c:lblAlgn val="ctr"/>
+        <c:lblOffset val="100"/>
         <c:noMultiLvlLbl val="1"/>
       </c:catAx>
       <c:valAx>
@@ -419,30 +495,6 @@
         <c:majorTickMark val="out"/>
         <c:minorTickMark val="none"/>
         <c:tickLblPos val="nextTo"/>
-        <c:spPr>
-          <a:ln w="12700" cap="flat">
-            <a:solidFill>
-              <a:srgbClr val="888888"/>
-            </a:solidFill>
-            <a:prstDash val="solid"/>
-            <a:round/>
-          </a:ln>
-        </c:spPr>
-        <c:txPr>
-          <a:bodyPr/>
-          <a:lstStyle/>
-          <a:p>
-            <a:pPr>
-              <a:defRPr sz="1200" b="0" i="0" u="none" strike="noStrike">
-                <a:solidFill>
-                  <a:srgbClr val="000000"/>
-                </a:solidFill>
-                <a:latin typeface="Arial"/>
-              </a:defRPr>
-            </a:pPr>
-            <a:endParaRPr lang="en-US"/>
-          </a:p>
-        </c:txPr>
         <c:crossAx val="2094734554"/>
         <c:crosses val="autoZero"/>
         <c:crossBetween val="between"/>
@@ -457,6 +509,7 @@
     </c:plotArea>
     <c:plotVisOnly val="1"/>
     <c:dispBlanksAs val="span"/>
+    <c:showDLblsOverMax val="1"/>
   </c:chart>
   <c:spPr>
     <a:noFill/>
@@ -493,234 +546,10 @@
           <a:chExt cx="0" cy="0"/>
         </a:xfrm>
       </p:grpSpPr>
-      <p:sp>
-        <p:nvSpPr>
-          <p:cNvPr id="2" name="Header Placeholder 1"/>
-          <p:cNvSpPr>
-            <a:spLocks noGrp="1"/>
-          </p:cNvSpPr>
-          <p:nvPr>
-            <p:ph type="hdr" sz="quarter"/>
-          </p:nvPr>
-        </p:nvSpPr>
-        <p:spPr>
-          <a:xfrm>
-            <a:off x="0" y="0"/>
-            <a:ext cx="2971800" cy="458788"/>
-          </a:xfrm>
-          <a:prstGeom prst="rect">
-            <a:avLst/>
-          </a:prstGeom>
-        </p:spPr>
-        <p:txBody>
-          <a:bodyPr vert="horz" lIns="91440" tIns="45720" rIns="91440" bIns="45720" rtlCol="0"/>
-          <a:lstStyle>
-            <a:lvl1pPr algn="l">
-              <a:defRPr sz="1200"/>
-            </a:lvl1pPr>
-          </a:lstStyle>
-          <a:p>
-            <a:endParaRPr lang="en-US"/>
-          </a:p>
-        </p:txBody>
-      </p:sp>
-      <p:sp>
-        <p:nvSpPr>
-          <p:cNvPr id="3" name="Date Placeholder 2"/>
-          <p:cNvSpPr>
-            <a:spLocks noGrp="1"/>
-          </p:cNvSpPr>
-          <p:nvPr>
-            <p:ph type="dt" idx="1"/>
-          </p:nvPr>
-        </p:nvSpPr>
-        <p:spPr>
-          <a:xfrm>
-            <a:off x="3884613" y="0"/>
-            <a:ext cx="2971800" cy="458788"/>
-          </a:xfrm>
-          <a:prstGeom prst="rect">
-            <a:avLst/>
-          </a:prstGeom>
-        </p:spPr>
-        <p:txBody>
-          <a:bodyPr vert="horz" lIns="91440" tIns="45720" rIns="91440" bIns="45720" rtlCol="0"/>
-          <a:lstStyle>
-            <a:lvl1pPr algn="r">
-              <a:defRPr sz="1200"/>
-            </a:lvl1pPr>
-          </a:lstStyle>
-          <a:p>
-            <a:fld id="{5282F153-3F37-0F45-9E97-73ACFA13230C}" type="datetimeFigureOut">
-              <a:rPr lang="en-US"/>
-              <a:t>7/23/19</a:t>
-            </a:fld>
-            <a:endParaRPr lang="en-US"/>
-          </a:p>
-        </p:txBody>
-      </p:sp>
-      <p:sp>
-        <p:nvSpPr>
-          <p:cNvPr id="4" name="Slide Image Placeholder 3"/>
-          <p:cNvSpPr>
-            <a:spLocks noGrp="1" noRot="1" noChangeAspect="1"/>
-          </p:cNvSpPr>
-          <p:nvPr>
-            <p:ph type="sldImg" idx="2"/>
-          </p:nvPr>
-        </p:nvSpPr>
-        <p:spPr>
-          <a:xfrm>
-            <a:off x="685800" y="1143000"/>
-            <a:ext cx="5486400" cy="3086100"/>
-          </a:xfrm>
-          <a:prstGeom prst="rect">
-            <a:avLst/>
-          </a:prstGeom>
-          <a:noFill/>
-          <a:ln w="12700">
-            <a:solidFill>
-              <a:prstClr val="black"/>
-            </a:solidFill>
-          </a:ln>
-        </p:spPr>
-        <p:txBody>
-          <a:bodyPr vert="horz" lIns="91440" tIns="45720" rIns="91440" bIns="45720" rtlCol="0" anchor="ctr"/>
-          <a:lstStyle/>
-          <a:p>
-            <a:endParaRPr lang="en-US"/>
-          </a:p>
-        </p:txBody>
-      </p:sp>
-      <p:sp>
-        <p:nvSpPr>
-          <p:cNvPr id="5" name="Notes Placeholder 4"/>
-          <p:cNvSpPr>
-            <a:spLocks noGrp="1"/>
-          </p:cNvSpPr>
-          <p:nvPr>
-            <p:ph type="body" sz="quarter" idx="3"/>
-          </p:nvPr>
-        </p:nvSpPr>
-        <p:spPr>
-          <a:xfrm>
-            <a:off x="685800" y="4400550"/>
-            <a:ext cx="5486400" cy="3600450"/>
-          </a:xfrm>
-          <a:prstGeom prst="rect">
-            <a:avLst/>
-          </a:prstGeom>
-        </p:spPr>
-        <p:txBody>
-          <a:bodyPr vert="horz" lIns="91440" tIns="45720" rIns="91440" bIns="45720" rtlCol="0"/>
-          <a:lstStyle/>
-          <a:p>
-            <a:pPr lvl="0"/>
-            <a:r>
-              <a:rPr lang="en-US"/>
-              <a:t>Click to edit Master text styles</a:t>
-            </a:r>
-          </a:p>
-          <a:p>
-            <a:pPr lvl="1"/>
-            <a:r>
-              <a:rPr lang="en-US"/>
-              <a:t>Second level</a:t>
-            </a:r>
-          </a:p>
-          <a:p>
-            <a:pPr lvl="2"/>
-            <a:r>
-              <a:rPr lang="en-US"/>
-              <a:t>Third level</a:t>
-            </a:r>
-          </a:p>
-          <a:p>
-            <a:pPr lvl="3"/>
-            <a:r>
-              <a:rPr lang="en-US"/>
-              <a:t>Fourth level</a:t>
-            </a:r>
-          </a:p>
-          <a:p>
-            <a:pPr lvl="4"/>
-            <a:r>
-              <a:rPr lang="en-US"/>
-              <a:t>Fifth level</a:t>
-            </a:r>
-          </a:p>
-        </p:txBody>
-      </p:sp>
-      <p:sp>
-        <p:nvSpPr>
-          <p:cNvPr id="6" name="Footer Placeholder 5"/>
-          <p:cNvSpPr>
-            <a:spLocks noGrp="1"/>
-          </p:cNvSpPr>
-          <p:nvPr>
-            <p:ph type="ftr" sz="quarter" idx="4"/>
-          </p:nvPr>
-        </p:nvSpPr>
-        <p:spPr>
-          <a:xfrm>
-            <a:off x="0" y="8685213"/>
-            <a:ext cx="2971800" cy="458787"/>
-          </a:xfrm>
-          <a:prstGeom prst="rect">
-            <a:avLst/>
-          </a:prstGeom>
-        </p:spPr>
-        <p:txBody>
-          <a:bodyPr vert="horz" lIns="91440" tIns="45720" rIns="91440" bIns="45720" rtlCol="0" anchor="b"/>
-          <a:lstStyle>
-            <a:lvl1pPr algn="l">
-              <a:defRPr sz="1200"/>
-            </a:lvl1pPr>
-          </a:lstStyle>
-          <a:p>
-            <a:endParaRPr lang="en-US"/>
-          </a:p>
-        </p:txBody>
-      </p:sp>
-      <p:sp>
-        <p:nvSpPr>
-          <p:cNvPr id="7" name="Slide Number Placeholder 6"/>
-          <p:cNvSpPr>
-            <a:spLocks noGrp="1"/>
-          </p:cNvSpPr>
-          <p:nvPr>
-            <p:ph type="sldNum" sz="quarter" idx="5"/>
-          </p:nvPr>
-        </p:nvSpPr>
-        <p:spPr>
-          <a:xfrm>
-            <a:off x="3884613" y="8685213"/>
-            <a:ext cx="2971800" cy="458787"/>
-          </a:xfrm>
-          <a:prstGeom prst="rect">
-            <a:avLst/>
-          </a:prstGeom>
-        </p:spPr>
-        <p:txBody>
-          <a:bodyPr vert="horz" lIns="91440" tIns="45720" rIns="91440" bIns="45720" rtlCol="0" anchor="b"/>
-          <a:lstStyle>
-            <a:lvl1pPr algn="r">
-              <a:defRPr sz="1200"/>
-            </a:lvl1pPr>
-          </a:lstStyle>
-          <a:p>
-            <a:fld id="{CE5E9CC1-C706-0F49-92D6-E571CC5EEA8F}" type="slidenum">
-              <a:rPr lang="en-US"/>
-              <a:t>‹#›</a:t>
-            </a:fld>
-            <a:endParaRPr lang="en-US"/>
-          </a:p>
-        </p:txBody>
-      </p:sp>
     </p:spTree>
     <p:extLst>
       <p:ext uri="{BB962C8B-B14F-4D97-AF65-F5344CB8AC3E}">
-        <p14:creationId xmlns:p14="http://schemas.microsoft.com/office/powerpoint/2010/main" val="1024086991"/>
+        <p14:creationId xmlns:p14="http://schemas.microsoft.com/office/powerpoint/2010/main" val="924630557"/>
       </p:ext>
     </p:extLst>
   </p:cSld>
@@ -865,10 +694,33 @@
           <a:lstStyle/>
           <a:p>
             <a:r>
-              <a:rPr lang="en-US" dirty="0"/>
-              <a:t>DepaRent es nuestro producto de datos para el curso DS3022. Responde una pregunta concreta: ¿a cuánto alquilo mi departamento? A la derecha está el estimador de la página de inicio, que llena el cartel de 'Se alquila' con el precio del modelo. Todo lo que mostramos hoy está publicado en deparent.onrender.com.</a:t>
-            </a:r>
-            <a:endParaRPr lang="en-US" dirty="0"/>
+              <a:rPr lang="es-PE" dirty="0"/>
+              <a:t>[BREYSI · diapos 1 a 3 · unos 5 min en total · esta diapo: 1 min]</a:t>
+            </a:r>
+          </a:p>
+          <a:p>
+            <a:r>
+              <a:rPr lang="es-PE" dirty="0"/>
+              <a:t>Buenos días. Somos Breysi, Luciana, Adrián y Armando, y les presentamos DepaRent, nuestro producto de datos para el curso DS3022 de Desarrollo de Producto de Datos.</a:t>
+            </a:r>
+          </a:p>
+          <a:p>
+            <a:r>
+              <a:rPr lang="es-PE" dirty="0"/>
+              <a:t>DepaRent responde una pregunta muy concreta que se hace cualquiera que tiene un departamento en Lima: ¿a cuánto lo alquilo? El cartel de "Se alquila" que ven en la portada representa justamente eso: en la página de inicio de la app el cartel se llena con el precio que estima nuestro modelo.</a:t>
+            </a:r>
+          </a:p>
+          <a:p>
+            <a:r>
+              <a:rPr lang="es-PE" dirty="0"/>
+              <a:t>Hoy les mostramos el prototipo funcional de la Semana 10. No es una maqueta: todo lo que vamos a enseñar está publicado y se puede usar ahora en deparent.onrender.com.</a:t>
+            </a:r>
+          </a:p>
+          <a:p>
+            <a:r>
+              <a:rPr lang="es-PE" dirty="0"/>
+              <a:t>Les cuento primero el problema y cómo lo resolvemos; luego Luciana explica los datos y cómo está construido; Adrián hace la demo y muestra los resultados; y Armando cierra con el ejercicio del profesor, las limitaciones y lo que sigue.</a:t>
+            </a:r>
           </a:p>
         </p:txBody>
       </p:sp>
@@ -953,10 +805,45 @@
           <a:lstStyle/>
           <a:p>
             <a:r>
-              <a:rPr lang="en-US" dirty="0"/>
-              <a:t>Este es el ejercicio que nos pidió el profesor. Elegimos Lince, que tiene 25 anuncios de prueba, por encima del mínimo de 20. Filtramos esos anuncios, contamos los casos y promediamos el error absoluto: 284.90 soles, exactamente lo que muestra la aplicación. No reentrenamos el modelo. Ojo con la lectura: es el promedio de esos 25 anuncios de septiembre, no una garantía para cualquier depa de Lince.</a:t>
-            </a:r>
-            <a:endParaRPr lang="en-US" dirty="0"/>
+              <a:rPr lang="es-PE" dirty="0"/>
+              <a:t>[ARMANDO · diapos 10 a 12 · unos 5 min en total · esta diapo: 2 min]</a:t>
+            </a:r>
+          </a:p>
+          <a:p>
+            <a:r>
+              <a:rPr lang="es-PE" dirty="0"/>
+              <a:t>Gracias, Adrián. El profesor nos pidió elegir un distrito con al menos 20 anuncios de prueba, calcular su error con el archivo EJERCICIO_FINAL.py y compararlo con la app.</a:t>
+            </a:r>
+          </a:p>
+          <a:p>
+            <a:r>
+              <a:rPr lang="es-PE" dirty="0"/>
+              <a:t>Elegimos Lince. Tiene 25 anuncios en el conjunto de prueba, por encima del mínimo de 20.</a:t>
+            </a:r>
+          </a:p>
+          <a:p>
+            <a:r>
+              <a:rPr lang="es-PE" dirty="0"/>
+              <a:t>Los pasos fueron: primero filtramos los anuncios de prueba de Lince; después contamos los casos, que son 25; para cada uno calculamos el error absoluto, la diferencia entre el precio real y el que estima el modelo; y al final los promediamos. Eso es el MAE.</a:t>
+            </a:r>
+          </a:p>
+          <a:p>
+            <a:r>
+              <a:rPr lang="es-PE" dirty="0"/>
+              <a:t>Resultado: 284.90 soles, exactamente lo mismo que muestra la aplicación, también con 25 casos. Eso nos confirma que el filtro y el redondeo de la app son correctos. No reentrenamos el modelo.</a:t>
+            </a:r>
+          </a:p>
+          <a:p>
+            <a:r>
+              <a:rPr lang="es-PE" dirty="0"/>
+              <a:t>En Lince el modelo se equivoca la mitad que en todo el conjunto de prueba, 285 frente a 553. Los errores individuales tienen una mediana de unos 200 soles y van de 10 a 895.</a:t>
+            </a:r>
+          </a:p>
+          <a:p>
+            <a:r>
+              <a:rPr lang="es-PE" dirty="0"/>
+              <a:t>Ojo con la lectura: es el promedio de esos 25 anuncios de septiembre. No garantiza el error para otra vivienda ni para meses posteriores.</a:t>
+            </a:r>
           </a:p>
         </p:txBody>
       </p:sp>
@@ -1041,10 +928,51 @@
           <a:lstStyle/>
           <a:p>
             <a:r>
-              <a:rPr lang="en-US" dirty="0"/>
-              <a:t>Somos honestos con los límites: son precios pedidos, no contratos; el rango es el mismo para todos los precios; algunos distritos tienen pocos datos; y desde hoy los portales bloquean la descarga desde GitHub, así que la app sigue con el mercado del 23 de octubre. Del lado técnico resolvimos los duplicados entre portales, una validación de octubre sin trampa, la persistencia en un plan gratuito y la reproducibilidad de los modelos.</a:t>
-            </a:r>
-            <a:endParaRPr lang="en-US" dirty="0"/>
+              <a:rPr lang="es-PE" dirty="0"/>
+              <a:t>[ARMANDO · 1 min 30 s]</a:t>
+            </a:r>
+          </a:p>
+          <a:p>
+            <a:r>
+              <a:rPr lang="es-PE" dirty="0"/>
+              <a:t>Queremos ser honestos con los límites.</a:t>
+            </a:r>
+          </a:p>
+          <a:p>
+            <a:r>
+              <a:rPr lang="es-PE" dirty="0"/>
+              <a:t>Primero, usamos precios de oferta, lo que se pide en el portal, no el precio con el que se cierra el contrato.</a:t>
+            </a:r>
+          </a:p>
+          <a:p>
+            <a:r>
+              <a:rPr lang="es-PE" dirty="0"/>
+              <a:t>Segundo, el rango es global, más o menos 1,357 soles para todos. Para un depa de 1,200 soles es demasiado ancho.</a:t>
+            </a:r>
+          </a:p>
+          <a:p>
+            <a:r>
+              <a:rPr lang="es-PE" dirty="0"/>
+              <a:t>Tercero, en distritos con menos de 20 anuncios de prueba el error es inestable, y la app lo avisa.</a:t>
+            </a:r>
+          </a:p>
+          <a:p>
+            <a:r>
+              <a:rPr lang="es-PE" dirty="0"/>
+              <a:t>Cuarto, los paraderos de la ATU son de 2021 y el BCRP no cubre todos los distritos.</a:t>
+            </a:r>
+          </a:p>
+          <a:p>
+            <a:r>
+              <a:rPr lang="es-PE" dirty="0"/>
+              <a:t>Y quinto: desde el 25 de octubre los portales bloquean, con un error 403, la descarga diaria desde la nube de GitHub. Por eso la app sigue mostrando el mercado del 23 de octubre.</a:t>
+            </a:r>
+          </a:p>
+          <a:p>
+            <a:r>
+              <a:rPr lang="es-PE" dirty="0"/>
+              <a:t>A la derecha, los desafíos que sí resolvimos. Un mismo inmueble aparece en varios portales: armamos 3,013 grupos para que un depa nunca esté a la vez en entrenamiento y en prueba. Para validar octubre sin trampa excluimos los 2,464 anuncios que ya estaban en septiembre. Logramos datos persistentes en un plan gratuito con Postgres en Neon. Y los modelos son reproducibles: versiones fijas y hashes verificados al cargar.</a:t>
+            </a:r>
           </a:p>
         </p:txBody>
       </p:sp>
@@ -1129,10 +1057,33 @@
           <a:lstStyle/>
           <a:p>
             <a:r>
-              <a:rPr lang="en-US" dirty="0"/>
-              <a:t>Para la semana 12: el informe de evaluación, dos casos de estudio, un rango que dependa del precio, mantener el mercado al día con la tarea local, pruebas con usuarios reales y el plan de las tres últimas semanas. Los invitamos a probarlo en deparent.onrender.com. Gracias.</a:t>
-            </a:r>
-            <a:endParaRPr lang="en-US" dirty="0"/>
+              <a:rPr lang="es-PE" dirty="0"/>
+              <a:t>[ARMANDO · 1 min 30 s]</a:t>
+            </a:r>
+          </a:p>
+          <a:p>
+            <a:r>
+              <a:rPr lang="es-PE" dirty="0"/>
+              <a:t>Para cerrar, esto es lo que viene.</a:t>
+            </a:r>
+          </a:p>
+          <a:p>
+            <a:r>
+              <a:rPr lang="es-PE" dirty="0"/>
+              <a:t>Primero, el informe de evaluación, con las líneas base y el error por distrito. Segundo, dos casos de estudio: un propietario y un inquilino usando el producto de verdad. Tercero, un rango que dependa del precio del depa, para que sea útil también en los departamentos baratos y en los caros. Cuarto, mantener el mercado al día con una tarea programada local, que no tiene el bloqueo de la nube. Quinto, pruebas de uso con 3 a 5 personas. Y sexto, el plan de tareas para las tres últimas semanas.</a:t>
+            </a:r>
+          </a:p>
+          <a:p>
+            <a:r>
+              <a:rPr lang="es-PE" dirty="0"/>
+              <a:t>En resumen: DepaRent ya funciona de punta a punta, con datos reales, y baja a la mitad el error de la regla que usa la gente hoy.</a:t>
+            </a:r>
+          </a:p>
+          <a:p>
+            <a:r>
+              <a:rPr lang="es-PE" dirty="0"/>
+              <a:t>Los invitamos a probarlo en deparent.onrender.com. Muchas gracias, quedamos atentos a sus preguntas.</a:t>
+            </a:r>
           </a:p>
         </p:txBody>
       </p:sp>
@@ -1217,10 +1168,39 @@
           <a:lstStyle/>
           <a:p>
             <a:r>
-              <a:rPr lang="en-US" dirty="0"/>
-              <a:t>Hay dos personas con el mismo problema. El propietario necesita un precio: si se pasa, el depa se queda vacío; si se queda corto, pierde renta todos los meses. El inquilino necesita saber si lo que le piden es razonable. La forma habitual de decidir es mirar la mediana del distrito, y eso se equivoca en casi mil soles en promedio. Nuestro modelo baja ese error a 553.</a:t>
-            </a:r>
-            <a:endParaRPr lang="en-US" dirty="0"/>
+              <a:rPr lang="es-PE" dirty="0"/>
+              <a:t>[BREYSI · 2 min]</a:t>
+            </a:r>
+          </a:p>
+          <a:p>
+            <a:r>
+              <a:rPr lang="es-PE" dirty="0"/>
+              <a:t>Este problema tiene dos lados.</a:t>
+            </a:r>
+          </a:p>
+          <a:p>
+            <a:r>
+              <a:rPr lang="es-PE" dirty="0"/>
+              <a:t>Primero, el propietario. Si pide de más, el departamento se queda vacío semanas o meses, y cada mes vacío es un mes sin renta. Si pide de menos, lo alquila rápido, pero pierde dinero todos los meses que dure el contrato. Necesita un número razonable y saber cuánto se puede mover.</a:t>
+            </a:r>
+          </a:p>
+          <a:p>
+            <a:r>
+              <a:rPr lang="es-PE" dirty="0"/>
+              <a:t>Segundo, el inquilino. Ve un anuncio que pide, por ejemplo, 2,000 soles y no tiene cómo saber si es justo frente a departamentos parecidos de la misma zona.</a:t>
+            </a:r>
+          </a:p>
+          <a:p>
+            <a:r>
+              <a:rPr lang="es-PE" dirty="0"/>
+              <a:t>¿Qué hace hoy la gente? Mira cuánto piden en promedio en el distrito, o la mediana. Nosotros medimos qué tan bien funciona esa regla: fijar el precio con la mediana del distrito se equivoca en promedio 993 soles al mes por departamento. Es casi mil soles de error, en un mercado donde muchos depas cuestan entre 1,500 y 4,000.</a:t>
+            </a:r>
+          </a:p>
+          <a:p>
+            <a:r>
+              <a:rPr lang="es-PE" dirty="0"/>
+              <a:t>DepaRent baja ese error a 553 soles, casi la mitad, porque no solo mira el distrito: mira el área, los dormitorios, los baños, las amenidades, la ubicación exacta y la cercanía al transporte.</a:t>
+            </a:r>
           </a:p>
         </p:txBody>
       </p:sp>
@@ -1305,10 +1285,39 @@
           <a:lstStyle/>
           <a:p>
             <a:r>
-              <a:rPr lang="en-US" dirty="0"/>
-              <a:t>El producto tiene dos recorridos que comparten el mismo análisis. El propietario describe su departamento, recibe el análisis, publica y recibe mensajes. El inquilino filtra el mercado, ve si cada precio está por debajo o por encima de lo que estima el modelo, abre la ficha y escribe al dueño.</a:t>
-            </a:r>
-            <a:endParaRPr lang="en-US" dirty="0"/>
+              <a:rPr lang="es-PE" dirty="0"/>
+              <a:t>[BREYSI · 2 min]</a:t>
+            </a:r>
+          </a:p>
+          <a:p>
+            <a:r>
+              <a:rPr lang="es-PE" dirty="0"/>
+              <a:t>El producto tiene dos recorridos, uno para cada usuario, pero los dos usan el mismo análisis por detrás.</a:t>
+            </a:r>
+          </a:p>
+          <a:p>
+            <a:r>
+              <a:rPr lang="es-PE" dirty="0"/>
+              <a:t>El propietario, arriba: primero describe su departamento, con área, dormitorios, amenidades y la ubicación, que marca con un clic en el mapa. Después recibe el análisis: el precio esperado, un rango de cuánto puede variar, los departamentos con los que compite y la tendencia del distrito. Luego elige uno de tres precios de publicación y publica. Y al final le llegan a su cuenta los mensajes de los interesados.</a:t>
+            </a:r>
+          </a:p>
+          <a:p>
+            <a:r>
+              <a:rPr lang="es-PE" dirty="0"/>
+              <a:t>El inquilino, abajo: filtra el mercado por distrito, presupuesto, tamaño y cercanía a paraderos. Para cada anuncio ve si el precio está por debajo, en línea o por encima de lo que estima el modelo. Abre la ficha, donde ve anuncios parecidos y el transporte cercano. Y si le interesa, escribe al dueño, o va al anuncio original del portal.</a:t>
+            </a:r>
+          </a:p>
+          <a:p>
+            <a:r>
+              <a:rPr lang="es-PE" dirty="0"/>
+              <a:t>Lo importante es que el mismo modelo sirve a los dos lados: al propietario para fijar el precio y al inquilino para juzgarlo.</a:t>
+            </a:r>
+          </a:p>
+          <a:p>
+            <a:r>
+              <a:rPr lang="es-PE" dirty="0"/>
+              <a:t>Ahora Luciana les cuenta con qué datos trabajamos.</a:t>
+            </a:r>
           </a:p>
         </p:txBody>
       </p:sp>
@@ -1393,10 +1402,51 @@
           <a:lstStyle/>
           <a:p>
             <a:r>
-              <a:rPr lang="en-US" dirty="0"/>
-              <a:t>Trabajamos con datos reales. 3,128 anuncios de septiembre entrenan los modelos; 3,055 anuncios únicos de octubre son el mercado que ve la app. Los paraderos de la ATU dan la accesibilidad y 13 series del BCRP la tendencia. Las direcciones y contactos de los anuncios no se guardan en el repositorio.</a:t>
-            </a:r>
-            <a:endParaRPr lang="en-US" dirty="0"/>
+              <a:rPr lang="es-PE" dirty="0"/>
+              <a:t>[LUCIANA · diapos 4 a 6 · unos 5 min en total · esta diapo: 1 min 30 s]</a:t>
+            </a:r>
+          </a:p>
+          <a:p>
+            <a:r>
+              <a:rPr lang="es-PE" dirty="0"/>
+              <a:t>Gracias, Breysi. Todo el producto se basa en datos reales de Lima, de cuatro fuentes.</a:t>
+            </a:r>
+          </a:p>
+          <a:p>
+            <a:r>
+              <a:rPr lang="es-PE" dirty="0"/>
+              <a:t>La primera son 3,128 anuncios de alquiler de Adondevivir y Urbania, capturados el 14 de septiembre de 2026. Con estos entrenamos los modelos.</a:t>
+            </a:r>
+          </a:p>
+          <a:p>
+            <a:r>
+              <a:rPr lang="es-PE" dirty="0"/>
+              <a:t>La segunda es una captura nueva del 23 de octubre: 3,055 anuncios únicos, ya sin duplicados entre portales. Ese es el mercado que ve el inquilino en la app, y además nos sirvió para validar el modelo con datos que nunca vio.</a:t>
+            </a:r>
+          </a:p>
+          <a:p>
+            <a:r>
+              <a:rPr lang="es-PE" dirty="0"/>
+              <a:t>La tercera son 3,233 paraderos de la ATU, del inventario de mayo de 2021. Con ellos medimos la accesibilidad de cada departamento.</a:t>
+            </a:r>
+          </a:p>
+          <a:p>
+            <a:r>
+              <a:rPr lang="es-PE" dirty="0"/>
+              <a:t>La cuarta son 13 series trimestrales del BCRP con el precio por metro cuadrado por distrito, que alimentan la tendencia.</a:t>
+            </a:r>
+          </a:p>
+          <a:p>
+            <a:r>
+              <a:rPr lang="es-PE" dirty="0"/>
+              <a:t>Abajo ven el flujo: descargamos de los portales, el script preprocesar.py aplica las mismas reglas de limpieza que definimos en la Semana 7, genera data/mercado.csv y eso es lo que lee la app.</a:t>
+            </a:r>
+          </a:p>
+          <a:p>
+            <a:r>
+              <a:rPr lang="es-PE" dirty="0"/>
+              <a:t>Un punto de privacidad: al repositorio no llegan direcciones ni contactos de los anuncios. La ficha solo enlaza al anuncio original.</a:t>
+            </a:r>
           </a:p>
         </p:txBody>
       </p:sp>
@@ -1481,10 +1531,51 @@
           <a:lstStyle/>
           <a:p>
             <a:r>
-              <a:rPr lang="en-US" dirty="0"/>
-              <a:t>Es un solo servicio en Render: la API en FastAPI sirve también el frontend, que es HTML, CSS y JavaScript con un mapa Leaflet. La API llama a los seis componentes, a la búsqueda y a las cuentas. Las cuentas se guardan en Postgres en Neon, que es gratuito y no se borra con cada despliegue. El mercado se actualiza con una tarea diaria de GitHub Actions.</a:t>
-            </a:r>
-            <a:endParaRPr lang="en-US" dirty="0"/>
+              <a:rPr lang="es-PE" dirty="0"/>
+              <a:t>[LUCIANA · 2 min]</a:t>
+            </a:r>
+          </a:p>
+          <a:p>
+            <a:r>
+              <a:rPr lang="es-PE" dirty="0"/>
+              <a:t>Así está construido el prototipo. Es un solo servicio en Render, lo que lo hace simple de desplegar y mantener.</a:t>
+            </a:r>
+          </a:p>
+          <a:p>
+            <a:r>
+              <a:rPr lang="es-PE" dirty="0"/>
+              <a:t>A la izquierda está el navegador: el frontend es HTML, CSS y JavaScript en módulos, con un mapa Leaflet para marcar la ubicación y ver los paraderos.</a:t>
+            </a:r>
+          </a:p>
+          <a:p>
+            <a:r>
+              <a:rPr lang="es-PE" dirty="0"/>
+              <a:t>Al centro está la API, hecha en FastAPI, en code/api.py. Expone endpoints JSON y también sirve el frontend, así que no necesitamos un segundo servidor.</a:t>
+            </a:r>
+          </a:p>
+          <a:p>
+            <a:r>
+              <a:rPr lang="es-PE" dirty="0"/>
+              <a:t>La API llama a tres bloques: los seis componentes analíticos, que están en code; busqueda.py, que junta el mercado con los departamentos publicados en DepaRent; y cuentas.py, que maneja usuarios, departamentos e interesados.</a:t>
+            </a:r>
+          </a:p>
+          <a:p>
+            <a:r>
+              <a:rPr lang="es-PE" dirty="0"/>
+              <a:t>Los modelos se guardan como archivos joblib, y al cargarlos verificamos su hash para estar seguros de que es exactamente el modelo que evaluamos.</a:t>
+            </a:r>
+          </a:p>
+          <a:p>
+            <a:r>
+              <a:rPr lang="es-PE" dirty="0"/>
+              <a:t>Las cuentas se guardan en Postgres en Neon, que es gratuito y, a diferencia del disco de Render, no se borra en cada despliegue. En local usamos SQLite.</a:t>
+            </a:r>
+          </a:p>
+          <a:p>
+            <a:r>
+              <a:rPr lang="es-PE" dirty="0"/>
+              <a:t>Y la flecha de abajo: cada día una tarea de GitHub Actions descarga el mercado, hace commit en main y Render vuelve a desplegar solo. Armando les contará al final un problema que apareció con esto.</a:t>
+            </a:r>
           </a:p>
         </p:txBody>
       </p:sp>
@@ -1569,10 +1660,51 @@
           <a:lstStyle/>
           <a:p>
             <a:r>
-              <a:rPr lang="en-US" dirty="0"/>
-              <a:t>Estos son los seis componentes. El central es el tercero, el precio esperado con HistGradientBoosting y un rango calibrado. Alrededor: el perfil competitivo con K-Means y los comparables, la accesibilidad con los paraderos de la ATU, la tendencia con SARIMA, las reglas que proponen tres precios de publicación y el simulador que estima cuánto suma una mejora.</a:t>
-            </a:r>
-            <a:endParaRPr lang="en-US" dirty="0"/>
+              <a:rPr lang="es-PE" dirty="0"/>
+              <a:t>[LUCIANA · 1 min 30 s]</a:t>
+            </a:r>
+          </a:p>
+          <a:p>
+            <a:r>
+              <a:rPr lang="es-PE" dirty="0"/>
+              <a:t>Estos son los seis componentes analíticos. El corazón es el número 3, el precio esperado: un modelo HistGradientBoosting con un rango calibrado al 90 %, es decir, un rango que debería contener el precio real 9 de cada 10 veces. Responde cuánto pedir y cuánto puede equivocarse.</a:t>
+            </a:r>
+          </a:p>
+          <a:p>
+            <a:r>
+              <a:rPr lang="es-PE" dirty="0"/>
+              <a:t>Alrededor de él: el componente 1, el perfil competitivo, agrupa los departamentos con K-Means en 4 perfiles, sin usar el precio, y busca los 8 departamentos más parecidos para mostrar con quién compite.</a:t>
+            </a:r>
+          </a:p>
+          <a:p>
+            <a:r>
+              <a:rPr lang="es-PE" dirty="0"/>
+              <a:t>El 2, la accesibilidad, calcula la distancia al paradero de la ATU más cercano con un cKDTree en metros.</a:t>
+            </a:r>
+          </a:p>
+          <a:p>
+            <a:r>
+              <a:rPr lang="es-PE" dirty="0"/>
+              <a:t>El 4, la tendencia distrital, usa un modelo SARIMA sobre las series del BCRP para decir si el distrito sube o se mantiene.</a:t>
+            </a:r>
+          </a:p>
+          <a:p>
+            <a:r>
+              <a:rPr lang="es-PE" dirty="0"/>
+              <a:t>El 5 combina los modelos 1, 3 y 4 con reglas para proponer tres precios: competitivo, equilibrado o renta superior.</a:t>
+            </a:r>
+          </a:p>
+          <a:p>
+            <a:r>
+              <a:rPr lang="es-PE" dirty="0"/>
+              <a:t>Y el 6 es un simulador: usa el modelo de precio para responder qué pasaría si, por ejemplo, el depa tuviera ascensor o más área.</a:t>
+            </a:r>
+          </a:p>
+          <a:p>
+            <a:r>
+              <a:rPr lang="es-PE" dirty="0"/>
+              <a:t>Ahora Adrián les muestra todo esto funcionando.</a:t>
+            </a:r>
           </a:p>
         </p:txBody>
       </p:sp>
@@ -1657,10 +1789,51 @@
           <a:lstStyle/>
           <a:p>
             <a:r>
-              <a:rPr lang="en-US" dirty="0"/>
-              <a:t>Recorrido del propietario. Agrega su departamento: características y la ubicación, que ahora se marca con un clic en el mapa. Recibe el análisis: en este caso de Miraflores el precio esperado es 3,656 soles, con su rango y tres precios de publicación. Elige la renta superior, 3,840, y desde ese momento aparece en la búsqueda.</a:t>
-            </a:r>
-            <a:endParaRPr lang="en-US" dirty="0"/>
+              <a:rPr lang="es-PE" dirty="0"/>
+              <a:t>[ADRIÁN · diapos 7 a 9 · unos 6 a 7 min en total · esta diapo: 2 min 30 s · DEMO EN VIVO]</a:t>
+            </a:r>
+          </a:p>
+          <a:p>
+            <a:r>
+              <a:rPr lang="es-PE" dirty="0"/>
+              <a:t>Gracias, Luciana. Vamos a verlo en la app publicada.</a:t>
+            </a:r>
+          </a:p>
+          <a:p>
+            <a:r>
+              <a:rPr lang="es-PE" dirty="0"/>
+              <a:t>(Abrir deparent.onrender.com, ya cargada antes de empezar. Si falla el internet, usar las capturas de esta diapo.)</a:t>
+            </a:r>
+          </a:p>
+          <a:p>
+            <a:r>
+              <a:rPr lang="es-PE" dirty="0"/>
+              <a:t>Este es el recorrido del propietario. Entro con mi cuenta y agrego un departamento: un depa en Miraflores. Lleno las características: área, dormitorios, baños, estacionamiento y amenidades. La ubicación la marco con un clic en el mapa.</a:t>
+            </a:r>
+          </a:p>
+          <a:p>
+            <a:r>
+              <a:rPr lang="es-PE" dirty="0"/>
+              <a:t>Al enviar recibo el análisis. En el ejemplo de la diapo el precio esperado es 3,656 soles. Debajo está el rango: no les decimos solo un número, les decimos cuánto puede variar. También aparecen los comparables, la distancia al paradero y la tendencia del distrito.</a:t>
+            </a:r>
+          </a:p>
+          <a:p>
+            <a:r>
+              <a:rPr lang="es-PE" dirty="0"/>
+              <a:t>Luego los tres precios de publicación. Aquí elegimos la renta superior, 3,840 soles, porque el depa tiene buenas características para su zona.</a:t>
+            </a:r>
+          </a:p>
+          <a:p>
+            <a:r>
+              <a:rPr lang="es-PE" dirty="0"/>
+              <a:t>Al publicar, el departamento ya aparece en la búsqueda que ven los inquilinos.</a:t>
+            </a:r>
+          </a:p>
+          <a:p>
+            <a:r>
+              <a:rPr lang="es-PE" dirty="0"/>
+              <a:t>Todo esto funciona en la versión publicada: con cuenta propia y con los datos guardados en la base de datos, no en la memoria del servidor.</a:t>
+            </a:r>
           </a:p>
         </p:txBody>
       </p:sp>
@@ -1745,10 +1918,39 @@
           <a:lstStyle/>
           <a:p>
             <a:r>
-              <a:rPr lang="en-US" dirty="0"/>
-              <a:t>Recorrido del inquilino, que no necesita cuenta. Filtra el mercado y ve cuántos anuncios piden menos de lo que estima el modelo. Abre una ficha: este depa de Lince pide 1,200 y el modelo estima 1,586, un 24 % por debajo. Si el departamento está publicado en DepaRent, le escribe al propietario y el mensaje le llega a su cuenta.</a:t>
-            </a:r>
-            <a:endParaRPr lang="en-US" dirty="0"/>
+              <a:rPr lang="es-PE" dirty="0"/>
+              <a:t>[ADRIÁN · 2 min 30 s · DEMO EN VIVO]</a:t>
+            </a:r>
+          </a:p>
+          <a:p>
+            <a:r>
+              <a:rPr lang="es-PE" dirty="0"/>
+              <a:t>Ahora me pongo en el lugar del inquilino, que no necesita cuenta.</a:t>
+            </a:r>
+          </a:p>
+          <a:p>
+            <a:r>
+              <a:rPr lang="es-PE" dirty="0"/>
+              <a:t>Voy a la búsqueda. Hay 3,056 departamentos: los 3,055 del mercado más los publicados en DepaRent. De ellos, 895 piden menos de lo que estima el modelo. Puedo filtrar por distrito, presupuesto, tamaño y cercanía a un paradero.</a:t>
+            </a:r>
+          </a:p>
+          <a:p>
+            <a:r>
+              <a:rPr lang="es-PE" dirty="0"/>
+              <a:t>Abro una ficha. Este depa de Lince pide 1,200 soles y el modelo estima 1,586: está 24.3 % por debajo. Para el inquilino es una señal de oportunidad, o de que conviene revisar bien el anuncio. En la ficha también ve los anuncios parecidos y el transporte cercano.</a:t>
+            </a:r>
+          </a:p>
+          <a:p>
+            <a:r>
+              <a:rPr lang="es-PE" dirty="0"/>
+              <a:t>Si el departamento está publicado en DepaRent, le escribe al propietario desde la ficha. (Mostrar el mensaje.) El mensaje le llega al propietario a su pestaña Interesados. Si es un anuncio del mercado, lo llevamos al anuncio original del portal.</a:t>
+            </a:r>
+          </a:p>
+          <a:p>
+            <a:r>
+              <a:rPr lang="es-PE" dirty="0"/>
+              <a:t>Así el inquilino puede buscar, comparar y escribir sin crear una cuenta.</a:t>
+            </a:r>
           </a:p>
         </p:txBody>
       </p:sp>
@@ -1833,10 +2035,33 @@
           <a:lstStyle/>
           <a:p>
             <a:r>
-              <a:rPr lang="en-US" dirty="0"/>
-              <a:t>Comparamos el modelo con dos líneas base. Usar la mediana de todo Lima se equivoca en 1,216 soles; la del distrito, en 993. Nuestro modelo baja a 553 en la prueba de septiembre, con R² de 0.76. Lo más importante: lo probamos con 1,712 anuncios nuevos de octubre sin reentrenar y el error fue 512. El modelo no se degradó con el paso del mes.</a:t>
-            </a:r>
-            <a:endParaRPr lang="en-US" dirty="0"/>
+              <a:rPr lang="es-PE" dirty="0"/>
+              <a:t>[ADRIÁN · 1 min 30 s]</a:t>
+            </a:r>
+          </a:p>
+          <a:p>
+            <a:r>
+              <a:rPr lang="es-PE" dirty="0"/>
+              <a:t>¿Qué tan bien funciona el modelo? Lo comparamos con dos líneas base. La mediana de todo Lima se equivoca en 1,216 soles en promedio; la mediana del distrito, en 993. Nuestro modelo baja a 553 soles en la prueba de septiembre, con 629 anuncios, y explica el 76 % de la variación del precio, eso es el R² de 0.76. Y lo logramos sin ajustar hiperparámetros.</a:t>
+            </a:r>
+          </a:p>
+          <a:p>
+            <a:r>
+              <a:rPr lang="es-PE" dirty="0"/>
+              <a:t>Segundo número: el rango al 90 %. En la prueba, el 92 % de los precios reales cayó dentro del rango, así que el rango cumple lo que promete.</a:t>
+            </a:r>
+          </a:p>
+          <a:p>
+            <a:r>
+              <a:rPr lang="es-PE" dirty="0"/>
+              <a:t>Tercer número, el más importante: probamos el mismo modelo, congelado y sin reentrenar, con 1,712 anuncios nuevos de octubre que nunca había visto. El error fue 512 soles. O sea, el modelo no se degradó con el paso del mes; incluso le fue un poco mejor.</a:t>
+            </a:r>
+          </a:p>
+          <a:p>
+            <a:r>
+              <a:rPr lang="es-PE" dirty="0"/>
+              <a:t>Armando les explica ahora el ejercicio que nos pidió el profesor.</a:t>
+            </a:r>
           </a:p>
         </p:txBody>
       </p:sp>
@@ -1914,6 +2139,7 @@
         <a:solidFill>
           <a:schemeClr val="accent1"/>
         </a:solidFill>
+        <a:effectLst/>
       </p:bgPr>
     </p:bg>
     <p:spTree>
@@ -1946,6 +2172,7 @@
         <a:solidFill>
           <a:schemeClr val="bg1"/>
         </a:solidFill>
+        <a:effectLst/>
       </p:bgPr>
     </p:bg>
     <p:spTree>
@@ -1965,9 +2192,11 @@
       <p:sp>
         <p:nvSpPr>
           <p:cNvPr id="2" name="Text 0"/>
-          <p:cNvSpPr/>
+          <p:cNvSpPr>
+            <a:spLocks noGrp="1"/>
+          </p:cNvSpPr>
           <p:nvPr>
-            <p:ph idx="100" type="title" hasCustomPrompt="1"/>
+            <p:ph type="title" idx="100" hasCustomPrompt="1"/>
           </p:nvPr>
         </p:nvSpPr>
         <p:spPr>
@@ -1984,7 +2213,7 @@
         <p:txBody>
           <a:bodyPr wrap="square" rtlCol="0"/>
           <a:lstStyle>
-            <a:lvl1pPr algn="l" indent="0" marL="0">
+            <a:lvl1pPr marL="0" indent="0" algn="l">
               <a:buNone/>
               <a:defRPr lang="en-US" sz="3200" dirty="0">
                 <a:solidFill>
@@ -1994,7 +2223,7 @@
             </a:lvl1pPr>
           </a:lstStyle>
           <a:p>
-            <a:pPr algn="l" indent="0" marL="0">
+            <a:pPr marL="0" indent="0" algn="l">
               <a:buNone/>
             </a:pPr>
             <a:endParaRPr lang="en-US" sz="3200" dirty="0"/>
@@ -2022,7 +2251,7 @@
           <a:bodyPr wrap="square" lIns="0" tIns="0" rIns="0" bIns="0" rtlCol="0" anchor="ctr"/>
           <a:lstStyle/>
           <a:p>
-            <a:pPr indent="0" marL="0">
+            <a:pPr marL="0" indent="0">
               <a:buNone/>
             </a:pPr>
             <a:r>
@@ -2057,7 +2286,7 @@
           </a:prstGeom>
           <a:extLst>
             <a:ext uri="{C572A759-6A51-4108-AA02-DFA0A04FC94B}">
-              <ma14:wrappingTextBoxFlag xmlns:ma14="http://schemas.microsoft.com/office/mac/drawingml/2011/main" val="0"/>
+              <ma14:wrappingTextBoxFlag xmlns:ma14="http://schemas.microsoft.com/office/mac/drawingml/2011/main" xmlns="" val="0"/>
             </a:ext>
           </a:extLst>
         </p:spPr>
@@ -2075,8 +2304,8 @@
           <a:p>
             <a:pPr algn="r"/>
             <a:fld id="{F7021451-1387-4CA6-816F-3879F97B5CBC}" type="slidenum">
-              <a:rPr b="0" lang="en-US"/>
-              <a:t>1003</a:t>
+              <a:rPr lang="en-US" b="0"/>
+              <a:t>‹Nº›</a:t>
             </a:fld>
             <a:endParaRPr lang="en-US"/>
           </a:p>
@@ -2098,6 +2327,7 @@
         <a:solidFill>
           <a:schemeClr val="tx1"/>
         </a:solidFill>
+        <a:effectLst/>
       </p:bgPr>
     </p:bg>
     <p:spTree>
@@ -2117,9 +2347,11 @@
       <p:sp>
         <p:nvSpPr>
           <p:cNvPr id="2" name="Text 0"/>
-          <p:cNvSpPr/>
+          <p:cNvSpPr>
+            <a:spLocks noGrp="1"/>
+          </p:cNvSpPr>
           <p:nvPr>
-            <p:ph idx="100" type="title" hasCustomPrompt="1"/>
+            <p:ph type="title" idx="100" hasCustomPrompt="1"/>
           </p:nvPr>
         </p:nvSpPr>
         <p:spPr>
@@ -2136,7 +2368,7 @@
         <p:txBody>
           <a:bodyPr wrap="square" rtlCol="0"/>
           <a:lstStyle>
-            <a:lvl1pPr algn="l" indent="0" marL="0">
+            <a:lvl1pPr marL="0" indent="0" algn="l">
               <a:buNone/>
               <a:defRPr lang="en-US" sz="3200" dirty="0">
                 <a:solidFill>
@@ -2146,7 +2378,7 @@
             </a:lvl1pPr>
           </a:lstStyle>
           <a:p>
-            <a:pPr algn="l" indent="0" marL="0">
+            <a:pPr marL="0" indent="0" algn="l">
               <a:buNone/>
             </a:pPr>
             <a:endParaRPr lang="en-US" sz="3200" dirty="0"/>
@@ -2174,7 +2406,7 @@
           <a:bodyPr wrap="square" lIns="0" tIns="0" rIns="0" bIns="0" rtlCol="0" anchor="ctr"/>
           <a:lstStyle/>
           <a:p>
-            <a:pPr indent="0" marL="0">
+            <a:pPr marL="0" indent="0">
               <a:buNone/>
             </a:pPr>
             <a:r>
@@ -2209,7 +2441,7 @@
           </a:prstGeom>
           <a:extLst>
             <a:ext uri="{C572A759-6A51-4108-AA02-DFA0A04FC94B}">
-              <ma14:wrappingTextBoxFlag xmlns:ma14="http://schemas.microsoft.com/office/mac/drawingml/2011/main" val="0"/>
+              <ma14:wrappingTextBoxFlag xmlns:ma14="http://schemas.microsoft.com/office/mac/drawingml/2011/main" xmlns="" val="0"/>
             </a:ext>
           </a:extLst>
         </p:spPr>
@@ -2227,8 +2459,8 @@
           <a:p>
             <a:pPr algn="r"/>
             <a:fld id="{F7021451-1387-4CA6-816F-3879F97B5CBC}" type="slidenum">
-              <a:rPr b="0" lang="en-US"/>
-              <a:t>1004</a:t>
+              <a:rPr lang="en-US" b="0"/>
+              <a:t>‹Nº›</a:t>
             </a:fld>
             <a:endParaRPr lang="en-US"/>
           </a:p>
@@ -2245,6 +2477,11 @@
 <file path=ppt/slideMasters/slideMaster1.xml><?xml version="1.0" encoding="utf-8"?>
 <p:sldMaster xmlns:a="http://schemas.openxmlformats.org/drawingml/2006/main" xmlns:r="http://schemas.openxmlformats.org/officeDocument/2006/relationships" xmlns:p="http://schemas.openxmlformats.org/presentationml/2006/main">
   <p:cSld>
+    <p:bg>
+      <p:bgRef idx="1001">
+        <a:schemeClr val="bg1"/>
+      </p:bgRef>
+    </p:bg>
     <p:spTree>
       <p:nvGrpSpPr>
         <p:cNvPr id="1" name=""/>
@@ -2279,7 +2516,7 @@
           </a:prstGeom>
           <a:extLst>
             <a:ext uri="{C572A759-6A51-4108-AA02-DFA0A04FC94B}">
-              <ma14:wrappingTextBoxFlag xmlns:ma14="http://schemas.microsoft.com/office/mac/drawingml/2011/main" val="0"/>
+              <ma14:wrappingTextBoxFlag xmlns:ma14="http://schemas.microsoft.com/office/mac/drawingml/2011/main" xmlns="" val="0"/>
             </a:ext>
           </a:extLst>
         </p:spPr>
@@ -2297,8 +2534,8 @@
           <a:p>
             <a:pPr algn="r"/>
             <a:fld id="{F7021451-1387-4CA6-816F-3879F97B5CBC}" type="slidenum">
-              <a:rPr b="0" lang="en-US"/>
-              <a:t>null</a:t>
+              <a:rPr lang="en-US" b="0"/>
+              <a:t>‹Nº›</a:t>
             </a:fld>
             <a:endParaRPr lang="en-US"/>
           </a:p>
@@ -2605,7 +2842,7 @@
           <a:bodyPr wrap="square" lIns="0" tIns="0" rIns="0" bIns="0" rtlCol="0" anchor="t"/>
           <a:lstStyle/>
           <a:p>
-            <a:pPr indent="0" marL="0">
+            <a:pPr marL="0" indent="0">
               <a:buNone/>
             </a:pPr>
             <a:r>
@@ -2641,7 +2878,7 @@
           <a:bodyPr wrap="square" lIns="0" tIns="0" rIns="0" bIns="0" rtlCol="0" anchor="ctr"/>
           <a:lstStyle/>
           <a:p>
-            <a:pPr indent="0" marL="0">
+            <a:pPr marL="0" indent="0">
               <a:buNone/>
             </a:pPr>
             <a:r>
@@ -2680,7 +2917,7 @@
           <a:bodyPr wrap="square" lIns="0" tIns="0" rIns="0" bIns="0" rtlCol="0" anchor="t"/>
           <a:lstStyle/>
           <a:p>
-            <a:pPr indent="0" marL="0">
+            <a:pPr marL="0" indent="0">
               <a:buNone/>
             </a:pPr>
             <a:r>
@@ -2719,7 +2956,7 @@
           <a:bodyPr wrap="square" lIns="0" tIns="0" rIns="0" bIns="0" rtlCol="0" anchor="t"/>
           <a:lstStyle/>
           <a:p>
-            <a:pPr indent="0" marL="0">
+            <a:pPr marL="0" indent="0">
               <a:buNone/>
             </a:pPr>
             <a:r>
@@ -2753,11 +2990,18 @@
           </a:solidFill>
           <a:ln/>
         </p:spPr>
+        <p:txBody>
+          <a:bodyPr/>
+          <a:lstStyle/>
+          <a:p>
+            <a:endParaRPr lang="es-PE"/>
+          </a:p>
+        </p:txBody>
       </p:sp>
       <p:sp>
         <p:nvSpPr>
           <p:cNvPr id="7" name="texto-6">
-            <a:hlinkClick r:id="rId1" tooltip=""/>
+            <a:hlinkClick r:id="rId3"/>
           </p:cNvPr>
           <p:cNvSpPr txBox="1"/>
           <p:nvPr/>
@@ -2777,7 +3021,7 @@
           <a:bodyPr wrap="square" lIns="0" tIns="0" rIns="0" bIns="0" rtlCol="0" anchor="ctr"/>
           <a:lstStyle/>
           <a:p>
-            <a:pPr algn="ctr" indent="0" marL="0">
+            <a:pPr marL="0" indent="0" algn="ctr">
               <a:buNone/>
             </a:pPr>
             <a:r>
@@ -2788,7 +3032,7 @@
                 <a:latin typeface="Arial Black" pitchFamily="34" charset="0"/>
                 <a:ea typeface="Arial Black" pitchFamily="34" charset="-122"/>
                 <a:cs typeface="Arial Black" pitchFamily="34" charset="-120"/>
-                <a:hlinkClick r:id="rId1" invalidUrl="" action="" tgtFrame="" tooltip="" history="1" highlightClick="0" endSnd="0">
+                <a:hlinkClick r:id="rId3">
                   <a:extLst>
                     <a:ext uri="{A12FA001-AC4F-418D-AE19-62706E023703}">
                       <ahyp:hlinkClr xmlns:ahyp="http://schemas.microsoft.com/office/drawing/2018/hyperlinkcolor" val="tx"/>
@@ -2823,7 +3067,7 @@
           <a:bodyPr wrap="square" lIns="0" tIns="0" rIns="0" bIns="0" rtlCol="0" anchor="t"/>
           <a:lstStyle/>
           <a:p>
-            <a:pPr indent="0" marL="0">
+            <a:pPr marL="0" indent="0">
               <a:buNone/>
             </a:pPr>
             <a:r>
@@ -2832,22 +3076,14 @@
                   <a:schemeClr val="tx1"/>
                 </a:solidFill>
               </a:rPr>
-              <a:t>Adrian Urbina Mendoza</a:t>
+              <a:t>Breysi Salazar Medina</a:t>
             </a:r>
             <a:endParaRPr lang="en-US" sz="1400" dirty="0"/>
           </a:p>
           <a:p>
-            <a:pPr indent="0" marL="0">
-              <a:buNone/>
-            </a:pPr>
-            <a:r>
-              <a:rPr lang="en-US" sz="1200" dirty="0">
-                <a:solidFill>
-                  <a:schemeClr val="tx1"/>
-                </a:solidFill>
-              </a:rPr>
-              <a:t>Coordinación, datos y mantenimiento</a:t>
-            </a:r>
+            <a:pPr marL="0" indent="0">
+              <a:buNone/>
+            </a:pPr>
             <a:endParaRPr lang="en-US" sz="1400" dirty="0"/>
           </a:p>
         </p:txBody>
@@ -2873,7 +3109,7 @@
           <a:bodyPr wrap="square" lIns="0" tIns="0" rIns="0" bIns="0" rtlCol="0" anchor="t"/>
           <a:lstStyle/>
           <a:p>
-            <a:pPr indent="0" marL="0">
+            <a:pPr marL="0" indent="0">
               <a:buNone/>
             </a:pPr>
             <a:r>
@@ -2882,21 +3118,31 @@
                   <a:schemeClr val="tx1"/>
                 </a:solidFill>
               </a:rPr>
-              <a:t>Armando Martinez Palomino</a:t>
-            </a:r>
-            <a:endParaRPr lang="en-US" sz="1400" dirty="0"/>
-          </a:p>
-          <a:p>
-            <a:pPr indent="0" marL="0">
-              <a:buNone/>
-            </a:pPr>
-            <a:r>
-              <a:rPr lang="en-US" sz="1200" dirty="0">
-                <a:solidFill>
-                  <a:schemeClr val="tx1"/>
-                </a:solidFill>
-              </a:rPr>
-              <a:t>Fuentes externas</a:t>
+              <a:t>Luciana </a:t>
+            </a:r>
+            <a:r>
+              <a:rPr lang="en-US" sz="1400" b="1" dirty="0" err="1">
+                <a:solidFill>
+                  <a:schemeClr val="tx1"/>
+                </a:solidFill>
+              </a:rPr>
+              <a:t>Yangali</a:t>
+            </a:r>
+            <a:r>
+              <a:rPr lang="en-US" sz="1400" b="1" dirty="0">
+                <a:solidFill>
+                  <a:schemeClr val="tx1"/>
+                </a:solidFill>
+              </a:rPr>
+              <a:t> </a:t>
+            </a:r>
+            <a:r>
+              <a:rPr lang="en-US" sz="1400" b="1" dirty="0" err="1">
+                <a:solidFill>
+                  <a:schemeClr val="tx1"/>
+                </a:solidFill>
+              </a:rPr>
+              <a:t>Cáceres</a:t>
             </a:r>
             <a:endParaRPr lang="en-US" sz="1400" dirty="0"/>
           </a:p>
@@ -2923,7 +3169,7 @@
           <a:bodyPr wrap="square" lIns="0" tIns="0" rIns="0" bIns="0" rtlCol="0" anchor="t"/>
           <a:lstStyle/>
           <a:p>
-            <a:pPr indent="0" marL="0">
+            <a:pPr marL="0" indent="0">
               <a:buNone/>
             </a:pPr>
             <a:r>
@@ -2932,21 +3178,7 @@
                   <a:schemeClr val="tx1"/>
                 </a:solidFill>
               </a:rPr>
-              <a:t>Breysi Salazar Medina</a:t>
-            </a:r>
-            <a:endParaRPr lang="en-US" sz="1400" dirty="0"/>
-          </a:p>
-          <a:p>
-            <a:pPr indent="0" marL="0">
-              <a:buNone/>
-            </a:pPr>
-            <a:r>
-              <a:rPr lang="en-US" sz="1200" dirty="0">
-                <a:solidFill>
-                  <a:schemeClr val="tx1"/>
-                </a:solidFill>
-              </a:rPr>
-              <a:t>Modelado</a:t>
+              <a:t>Adrian Urbina Mendoza</a:t>
             </a:r>
             <a:endParaRPr lang="en-US" sz="1400" dirty="0"/>
           </a:p>
@@ -2973,7 +3205,7 @@
           <a:bodyPr wrap="square" lIns="0" tIns="0" rIns="0" bIns="0" rtlCol="0" anchor="t"/>
           <a:lstStyle/>
           <a:p>
-            <a:pPr indent="0" marL="0">
+            <a:pPr marL="0" indent="0">
               <a:buNone/>
             </a:pPr>
             <a:r>
@@ -2982,21 +3214,7 @@
                   <a:schemeClr val="tx1"/>
                 </a:solidFill>
               </a:rPr>
-              <a:t>Luciana Yangali Cáceres</a:t>
-            </a:r>
-            <a:endParaRPr lang="en-US" sz="1400" dirty="0"/>
-          </a:p>
-          <a:p>
-            <a:pPr indent="0" marL="0">
-              <a:buNone/>
-            </a:pPr>
-            <a:r>
-              <a:rPr lang="en-US" sz="1200" dirty="0">
-                <a:solidFill>
-                  <a:schemeClr val="tx1"/>
-                </a:solidFill>
-              </a:rPr>
-              <a:t>Producto y diseño</a:t>
+              <a:t>Armando Martinez Palomino</a:t>
             </a:r>
             <a:endParaRPr lang="en-US" sz="1400" dirty="0"/>
           </a:p>
@@ -3004,14 +3222,14 @@
       </p:sp>
       <p:pic>
         <p:nvPicPr>
-          <p:cNvPr id="12" name="cartel-estimador" descr="El estimador en vivo de la página de inicio: Miraflores, 90 m², 3 dormitorios, 2 baños, S/ 3,551 al mes">    </p:cNvPr>
+          <p:cNvPr id="12" name="cartel-estimador" descr="El estimador en vivo de la página de inicio: Miraflores, 90 m², 3 dormitorios, 2 baños, S/ 3,551 al mes"/>
           <p:cNvPicPr>
             <a:picLocks noChangeAspect="1"/>
           </p:cNvPicPr>
           <p:nvPr/>
         </p:nvPicPr>
         <p:blipFill>
-          <a:blip r:embed="rId2"/>
+          <a:blip r:embed="rId4"/>
           <a:stretch>
             <a:fillRect/>
           </a:stretch>
@@ -3054,9 +3272,11 @@
       <p:sp>
         <p:nvSpPr>
           <p:cNvPr id="2" name="Text 0"/>
-          <p:cNvSpPr/>
+          <p:cNvSpPr>
+            <a:spLocks noGrp="1"/>
+          </p:cNvSpPr>
           <p:nvPr>
-            <p:ph idx="100" type="title" hasCustomPrompt="1"/>
+            <p:ph type="title" idx="100" hasCustomPrompt="1"/>
           </p:nvPr>
         </p:nvSpPr>
         <p:spPr>
@@ -3074,7 +3294,7 @@
           <a:bodyPr wrap="square" lIns="0" tIns="0" rIns="0" bIns="0" rtlCol="0" anchor="ctr"/>
           <a:lstStyle/>
           <a:p>
-            <a:pPr algn="l" indent="0" marL="0">
+            <a:pPr marL="0" indent="0" algn="l">
               <a:buNone/>
             </a:pPr>
             <a:r>
@@ -3112,11 +3332,41 @@
             <a:tbl>
               <a:tblPr/>
               <a:tblGrid>
-                <a:gridCol w="2212848"/>
-                <a:gridCol w="2212848"/>
-                <a:gridCol w="2212848"/>
-                <a:gridCol w="2212848"/>
-                <a:gridCol w="2212848"/>
+                <a:gridCol w="2212848">
+                  <a:extLst>
+                    <a:ext uri="{9D8B030D-6E8A-4147-A177-3AD203B41FA5}">
+                      <a16:colId xmlns:a16="http://schemas.microsoft.com/office/drawing/2014/main" val="20000"/>
+                    </a:ext>
+                  </a:extLst>
+                </a:gridCol>
+                <a:gridCol w="2212848">
+                  <a:extLst>
+                    <a:ext uri="{9D8B030D-6E8A-4147-A177-3AD203B41FA5}">
+                      <a16:colId xmlns:a16="http://schemas.microsoft.com/office/drawing/2014/main" val="20001"/>
+                    </a:ext>
+                  </a:extLst>
+                </a:gridCol>
+                <a:gridCol w="2212848">
+                  <a:extLst>
+                    <a:ext uri="{9D8B030D-6E8A-4147-A177-3AD203B41FA5}">
+                      <a16:colId xmlns:a16="http://schemas.microsoft.com/office/drawing/2014/main" val="20002"/>
+                    </a:ext>
+                  </a:extLst>
+                </a:gridCol>
+                <a:gridCol w="2212848">
+                  <a:extLst>
+                    <a:ext uri="{9D8B030D-6E8A-4147-A177-3AD203B41FA5}">
+                      <a16:colId xmlns:a16="http://schemas.microsoft.com/office/drawing/2014/main" val="20003"/>
+                    </a:ext>
+                  </a:extLst>
+                </a:gridCol>
+                <a:gridCol w="2212848">
+                  <a:extLst>
+                    <a:ext uri="{9D8B030D-6E8A-4147-A177-3AD203B41FA5}">
+                      <a16:colId xmlns:a16="http://schemas.microsoft.com/office/drawing/2014/main" val="20004"/>
+                    </a:ext>
+                  </a:extLst>
+                </a:gridCol>
               </a:tblGrid>
               <a:tr h="457200">
                 <a:tc>
@@ -3124,7 +3374,7 @@
                     <a:bodyPr/>
                     <a:lstStyle/>
                     <a:p>
-                      <a:pPr algn="ctr" indent="0" marL="0">
+                      <a:pPr marL="0" indent="0" algn="ctr">
                         <a:buNone/>
                       </a:pPr>
                       <a:r>
@@ -3145,7 +3395,7 @@
                       </a:endParaRPr>
                     </a:p>
                   </a:txBody>
-                  <a:tcPr marL="91440" marR="91440" marT="45720" marB="45720" anchor="ctr">
+                  <a:tcPr anchor="ctr">
                     <a:lnL w="9525" cap="flat" cmpd="sng" algn="ctr">
                       <a:solidFill>
                         <a:srgbClr val="E3E2DE"/>
@@ -3192,7 +3442,7 @@
                     <a:bodyPr/>
                     <a:lstStyle/>
                     <a:p>
-                      <a:pPr algn="ctr" indent="0" marL="0">
+                      <a:pPr marL="0" indent="0" algn="ctr">
                         <a:buNone/>
                       </a:pPr>
                       <a:r>
@@ -3213,7 +3463,7 @@
                       </a:endParaRPr>
                     </a:p>
                   </a:txBody>
-                  <a:tcPr marL="91440" marR="91440" marT="45720" marB="45720" anchor="ctr">
+                  <a:tcPr anchor="ctr">
                     <a:lnL w="9525" cap="flat" cmpd="sng" algn="ctr">
                       <a:solidFill>
                         <a:srgbClr val="E3E2DE"/>
@@ -3260,7 +3510,7 @@
                     <a:bodyPr/>
                     <a:lstStyle/>
                     <a:p>
-                      <a:pPr algn="ctr" indent="0" marL="0">
+                      <a:pPr marL="0" indent="0" algn="ctr">
                         <a:buNone/>
                       </a:pPr>
                       <a:r>
@@ -3281,7 +3531,7 @@
                       </a:endParaRPr>
                     </a:p>
                   </a:txBody>
-                  <a:tcPr marL="91440" marR="91440" marT="45720" marB="45720" anchor="ctr">
+                  <a:tcPr anchor="ctr">
                     <a:lnL w="9525" cap="flat" cmpd="sng" algn="ctr">
                       <a:solidFill>
                         <a:srgbClr val="E3E2DE"/>
@@ -3328,7 +3578,7 @@
                     <a:bodyPr/>
                     <a:lstStyle/>
                     <a:p>
-                      <a:pPr algn="ctr" indent="0" marL="0">
+                      <a:pPr marL="0" indent="0" algn="ctr">
                         <a:buNone/>
                       </a:pPr>
                       <a:r>
@@ -3349,7 +3599,7 @@
                       </a:endParaRPr>
                     </a:p>
                   </a:txBody>
-                  <a:tcPr marL="91440" marR="91440" marT="45720" marB="45720" anchor="ctr">
+                  <a:tcPr anchor="ctr">
                     <a:lnL w="9525" cap="flat" cmpd="sng" algn="ctr">
                       <a:solidFill>
                         <a:srgbClr val="E3E2DE"/>
@@ -3396,7 +3646,7 @@
                     <a:bodyPr/>
                     <a:lstStyle/>
                     <a:p>
-                      <a:pPr algn="ctr" indent="0" marL="0">
+                      <a:pPr marL="0" indent="0" algn="ctr">
                         <a:buNone/>
                       </a:pPr>
                       <a:r>
@@ -3417,7 +3667,7 @@
                       </a:endParaRPr>
                     </a:p>
                   </a:txBody>
-                  <a:tcPr marL="91440" marR="91440" marT="45720" marB="45720" anchor="ctr">
+                  <a:tcPr anchor="ctr">
                     <a:lnL w="9525" cap="flat" cmpd="sng" algn="ctr">
                       <a:solidFill>
                         <a:srgbClr val="E3E2DE"/>
@@ -3459,6 +3709,11 @@
                     </a:solidFill>
                   </a:tcPr>
                 </a:tc>
+                <a:extLst>
+                  <a:ext uri="{0D108BD9-81ED-4DB2-BD59-A6C34878D82A}">
+                    <a16:rowId xmlns:a16="http://schemas.microsoft.com/office/drawing/2014/main" val="10000"/>
+                  </a:ext>
+                </a:extLst>
               </a:tr>
               <a:tr h="548640">
                 <a:tc>
@@ -3466,7 +3721,7 @@
                     <a:bodyPr/>
                     <a:lstStyle/>
                     <a:p>
-                      <a:pPr algn="ctr" indent="0" marL="0">
+                      <a:pPr marL="0" indent="0" algn="ctr">
                         <a:buNone/>
                       </a:pPr>
                       <a:r>
@@ -3487,7 +3742,7 @@
                       </a:endParaRPr>
                     </a:p>
                   </a:txBody>
-                  <a:tcPr marL="91440" marR="91440" marT="45720" marB="45720" anchor="ctr">
+                  <a:tcPr anchor="ctr">
                     <a:lnL w="9525" cap="flat" cmpd="sng" algn="ctr">
                       <a:solidFill>
                         <a:srgbClr val="E3E2DE"/>
@@ -3531,7 +3786,7 @@
                     <a:bodyPr/>
                     <a:lstStyle/>
                     <a:p>
-                      <a:pPr algn="ctr" indent="0" marL="0">
+                      <a:pPr marL="0" indent="0" algn="ctr">
                         <a:buNone/>
                       </a:pPr>
                       <a:r>
@@ -3552,7 +3807,7 @@
                       </a:endParaRPr>
                     </a:p>
                   </a:txBody>
-                  <a:tcPr marL="91440" marR="91440" marT="45720" marB="45720" anchor="ctr">
+                  <a:tcPr anchor="ctr">
                     <a:lnL w="9525" cap="flat" cmpd="sng" algn="ctr">
                       <a:solidFill>
                         <a:srgbClr val="E3E2DE"/>
@@ -3596,7 +3851,7 @@
                     <a:bodyPr/>
                     <a:lstStyle/>
                     <a:p>
-                      <a:pPr algn="ctr" indent="0" marL="0">
+                      <a:pPr marL="0" indent="0" algn="ctr">
                         <a:buNone/>
                       </a:pPr>
                       <a:r>
@@ -3617,7 +3872,7 @@
                       </a:endParaRPr>
                     </a:p>
                   </a:txBody>
-                  <a:tcPr marL="91440" marR="91440" marT="45720" marB="45720" anchor="ctr">
+                  <a:tcPr anchor="ctr">
                     <a:lnL w="9525" cap="flat" cmpd="sng" algn="ctr">
                       <a:solidFill>
                         <a:srgbClr val="E3E2DE"/>
@@ -3661,7 +3916,7 @@
                     <a:bodyPr/>
                     <a:lstStyle/>
                     <a:p>
-                      <a:pPr algn="ctr" indent="0" marL="0">
+                      <a:pPr marL="0" indent="0" algn="ctr">
                         <a:buNone/>
                       </a:pPr>
                       <a:r>
@@ -3682,7 +3937,7 @@
                       </a:endParaRPr>
                     </a:p>
                   </a:txBody>
-                  <a:tcPr marL="91440" marR="91440" marT="45720" marB="45720" anchor="ctr">
+                  <a:tcPr anchor="ctr">
                     <a:lnL w="9525" cap="flat" cmpd="sng" algn="ctr">
                       <a:solidFill>
                         <a:srgbClr val="E3E2DE"/>
@@ -3726,7 +3981,7 @@
                     <a:bodyPr/>
                     <a:lstStyle/>
                     <a:p>
-                      <a:pPr algn="ctr" indent="0" marL="0">
+                      <a:pPr marL="0" indent="0" algn="ctr">
                         <a:buNone/>
                       </a:pPr>
                       <a:r>
@@ -3747,7 +4002,7 @@
                       </a:endParaRPr>
                     </a:p>
                   </a:txBody>
-                  <a:tcPr marL="91440" marR="91440" marT="45720" marB="45720" anchor="ctr">
+                  <a:tcPr anchor="ctr">
                     <a:lnL w="9525" cap="flat" cmpd="sng" algn="ctr">
                       <a:solidFill>
                         <a:srgbClr val="E3E2DE"/>
@@ -3786,6 +4041,11 @@
                     </a:lnB>
                   </a:tcPr>
                 </a:tc>
+                <a:extLst>
+                  <a:ext uri="{0D108BD9-81ED-4DB2-BD59-A6C34878D82A}">
+                    <a16:rowId xmlns:a16="http://schemas.microsoft.com/office/drawing/2014/main" val="10001"/>
+                  </a:ext>
+                </a:extLst>
               </a:tr>
             </a:tbl>
           </a:graphicData>
@@ -3810,6 +4070,13 @@
           </a:solidFill>
           <a:ln/>
         </p:spPr>
+        <p:txBody>
+          <a:bodyPr/>
+          <a:lstStyle/>
+          <a:p>
+            <a:endParaRPr lang="es-PE"/>
+          </a:p>
+        </p:txBody>
       </p:sp>
       <p:sp>
         <p:nvSpPr>
@@ -3832,7 +4099,7 @@
           <a:bodyPr wrap="square" lIns="0" tIns="0" rIns="0" bIns="0" rtlCol="0" anchor="t"/>
           <a:lstStyle/>
           <a:p>
-            <a:pPr indent="0" marL="0">
+            <a:pPr marL="0" indent="0">
               <a:buNone/>
             </a:pPr>
             <a:r>
@@ -3868,7 +4135,7 @@
           <a:bodyPr wrap="square" lIns="0" tIns="0" rIns="0" bIns="0" rtlCol="0" anchor="ctr"/>
           <a:lstStyle/>
           <a:p>
-            <a:pPr indent="0" marL="0">
+            <a:pPr marL="0" indent="0">
               <a:buNone/>
             </a:pPr>
             <a:r>
@@ -3907,7 +4174,7 @@
           <a:bodyPr wrap="square" lIns="0" tIns="0" rIns="0" bIns="0" rtlCol="0" anchor="t"/>
           <a:lstStyle/>
           <a:p>
-            <a:pPr indent="0" marL="0">
+            <a:pPr marL="0" indent="0">
               <a:buNone/>
             </a:pPr>
             <a:r>
@@ -3943,7 +4210,7 @@
           <a:bodyPr wrap="square" lIns="0" tIns="0" rIns="0" bIns="0" rtlCol="0" anchor="t"/>
           <a:lstStyle/>
           <a:p>
-            <a:pPr indent="0" marL="0">
+            <a:pPr marL="0" indent="0">
               <a:buNone/>
             </a:pPr>
             <a:r>
@@ -4072,7 +4339,7 @@
           </a:prstGeom>
           <a:extLst>
             <a:ext uri="{C572A759-6A51-4108-AA02-DFA0A04FC94B}">
-              <ma14:wrappingTextBoxFlag xmlns:ma14="http://schemas.microsoft.com/office/mac/drawingml/2011/main" val="0"/>
+              <ma14:wrappingTextBoxFlag xmlns:ma14="http://schemas.microsoft.com/office/mac/drawingml/2011/main" xmlns="" val="0"/>
             </a:ext>
           </a:extLst>
         </p:spPr>
@@ -4090,7 +4357,7 @@
           <a:p>
             <a:pPr algn="r"/>
             <a:fld id="{F7021451-1387-4CA6-816F-3879F97B5CBC}" type="slidenum">
-              <a:rPr b="0" lang="en-US"/>
+              <a:rPr lang="en-US" b="0"/>
               <a:t>10</a:t>
             </a:fld>
             <a:endParaRPr lang="en-US"/>
@@ -4125,9 +4392,11 @@
       <p:sp>
         <p:nvSpPr>
           <p:cNvPr id="2" name="Text 0"/>
-          <p:cNvSpPr/>
+          <p:cNvSpPr>
+            <a:spLocks noGrp="1"/>
+          </p:cNvSpPr>
           <p:nvPr>
-            <p:ph idx="100" type="title" hasCustomPrompt="1"/>
+            <p:ph type="title" idx="100" hasCustomPrompt="1"/>
           </p:nvPr>
         </p:nvSpPr>
         <p:spPr>
@@ -4145,7 +4414,7 @@
           <a:bodyPr wrap="square" lIns="0" tIns="0" rIns="0" bIns="0" rtlCol="0" anchor="ctr"/>
           <a:lstStyle/>
           <a:p>
-            <a:pPr algn="l" indent="0" marL="0">
+            <a:pPr marL="0" indent="0" algn="l">
               <a:buNone/>
             </a:pPr>
             <a:r>
@@ -4179,6 +4448,13 @@
           </a:solidFill>
           <a:ln/>
         </p:spPr>
+        <p:txBody>
+          <a:bodyPr/>
+          <a:lstStyle/>
+          <a:p>
+            <a:endParaRPr lang="es-PE"/>
+          </a:p>
+        </p:txBody>
       </p:sp>
       <p:sp>
         <p:nvSpPr>
@@ -4201,7 +4477,7 @@
           <a:bodyPr wrap="square" lIns="0" tIns="0" rIns="0" bIns="0" rtlCol="0" anchor="t"/>
           <a:lstStyle/>
           <a:p>
-            <a:pPr indent="0" marL="0">
+            <a:pPr marL="0" indent="0">
               <a:buNone/>
             </a:pPr>
             <a:r>
@@ -4350,6 +4626,13 @@
           </a:solidFill>
           <a:ln/>
         </p:spPr>
+        <p:txBody>
+          <a:bodyPr/>
+          <a:lstStyle/>
+          <a:p>
+            <a:endParaRPr lang="es-PE"/>
+          </a:p>
+        </p:txBody>
       </p:sp>
       <p:sp>
         <p:nvSpPr>
@@ -4372,7 +4655,7 @@
           <a:bodyPr wrap="square" lIns="0" tIns="0" rIns="0" bIns="0" rtlCol="0" anchor="t"/>
           <a:lstStyle/>
           <a:p>
-            <a:pPr indent="0" marL="0">
+            <a:pPr marL="0" indent="0">
               <a:buNone/>
             </a:pPr>
             <a:r>
@@ -4504,7 +4787,7 @@
           </a:prstGeom>
           <a:extLst>
             <a:ext uri="{C572A759-6A51-4108-AA02-DFA0A04FC94B}">
-              <ma14:wrappingTextBoxFlag xmlns:ma14="http://schemas.microsoft.com/office/mac/drawingml/2011/main" val="0"/>
+              <ma14:wrappingTextBoxFlag xmlns:ma14="http://schemas.microsoft.com/office/mac/drawingml/2011/main" xmlns="" val="0"/>
             </a:ext>
           </a:extLst>
         </p:spPr>
@@ -4522,7 +4805,7 @@
           <a:p>
             <a:pPr algn="r"/>
             <a:fld id="{F7021451-1387-4CA6-816F-3879F97B5CBC}" type="slidenum">
-              <a:rPr b="0" lang="en-US"/>
+              <a:rPr lang="en-US" b="0"/>
               <a:t>11</a:t>
             </a:fld>
             <a:endParaRPr lang="en-US"/>
@@ -4557,9 +4840,11 @@
       <p:sp>
         <p:nvSpPr>
           <p:cNvPr id="2" name="Text 0"/>
-          <p:cNvSpPr/>
+          <p:cNvSpPr>
+            <a:spLocks noGrp="1"/>
+          </p:cNvSpPr>
           <p:nvPr>
-            <p:ph idx="100" type="title" hasCustomPrompt="1"/>
+            <p:ph type="title" idx="100" hasCustomPrompt="1"/>
           </p:nvPr>
         </p:nvSpPr>
         <p:spPr>
@@ -4577,7 +4862,7 @@
           <a:bodyPr wrap="square" lIns="0" tIns="0" rIns="0" bIns="0" rtlCol="0" anchor="ctr"/>
           <a:lstStyle/>
           <a:p>
-            <a:pPr algn="l" indent="0" marL="0">
+            <a:pPr marL="0" indent="0" algn="l">
               <a:buNone/>
             </a:pPr>
             <a:r>
@@ -4586,7 +4871,7 @@
                   <a:schemeClr val="bg1"/>
                 </a:solidFill>
               </a:rPr>
-              <a:t>Hacia la Semana 12</a:t>
+              <a:t>Hacia la Semana 13</a:t>
             </a:r>
             <a:endParaRPr lang="en-US" sz="3200" dirty="0"/>
           </a:p>
@@ -4611,6 +4896,13 @@
           </a:solidFill>
           <a:ln/>
         </p:spPr>
+        <p:txBody>
+          <a:bodyPr/>
+          <a:lstStyle/>
+          <a:p>
+            <a:endParaRPr lang="es-PE"/>
+          </a:p>
+        </p:txBody>
       </p:sp>
       <p:sp>
         <p:nvSpPr>
@@ -4633,7 +4925,7 @@
           <a:bodyPr wrap="square" lIns="0" tIns="0" rIns="0" bIns="0" rtlCol="0" anchor="ctr"/>
           <a:lstStyle/>
           <a:p>
-            <a:pPr algn="ctr" indent="0" marL="0">
+            <a:pPr marL="0" indent="0" algn="ctr">
               <a:buNone/>
             </a:pPr>
             <a:r>
@@ -4672,7 +4964,7 @@
           <a:bodyPr wrap="square" lIns="0" tIns="0" rIns="0" bIns="0" rtlCol="0" anchor="ctr"/>
           <a:lstStyle/>
           <a:p>
-            <a:pPr indent="0" marL="0">
+            <a:pPr marL="0" indent="0">
               <a:buNone/>
             </a:pPr>
             <a:r>
@@ -4706,6 +4998,13 @@
           </a:solidFill>
           <a:ln/>
         </p:spPr>
+        <p:txBody>
+          <a:bodyPr/>
+          <a:lstStyle/>
+          <a:p>
+            <a:endParaRPr lang="es-PE"/>
+          </a:p>
+        </p:txBody>
       </p:sp>
       <p:sp>
         <p:nvSpPr>
@@ -4728,7 +5027,7 @@
           <a:bodyPr wrap="square" lIns="0" tIns="0" rIns="0" bIns="0" rtlCol="0" anchor="ctr"/>
           <a:lstStyle/>
           <a:p>
-            <a:pPr algn="ctr" indent="0" marL="0">
+            <a:pPr marL="0" indent="0" algn="ctr">
               <a:buNone/>
             </a:pPr>
             <a:r>
@@ -4767,7 +5066,7 @@
           <a:bodyPr wrap="square" lIns="0" tIns="0" rIns="0" bIns="0" rtlCol="0" anchor="ctr"/>
           <a:lstStyle/>
           <a:p>
-            <a:pPr indent="0" marL="0">
+            <a:pPr marL="0" indent="0">
               <a:buNone/>
             </a:pPr>
             <a:r>
@@ -4801,6 +5100,13 @@
           </a:solidFill>
           <a:ln/>
         </p:spPr>
+        <p:txBody>
+          <a:bodyPr/>
+          <a:lstStyle/>
+          <a:p>
+            <a:endParaRPr lang="es-PE"/>
+          </a:p>
+        </p:txBody>
       </p:sp>
       <p:sp>
         <p:nvSpPr>
@@ -4823,7 +5129,7 @@
           <a:bodyPr wrap="square" lIns="0" tIns="0" rIns="0" bIns="0" rtlCol="0" anchor="ctr"/>
           <a:lstStyle/>
           <a:p>
-            <a:pPr algn="ctr" indent="0" marL="0">
+            <a:pPr marL="0" indent="0" algn="ctr">
               <a:buNone/>
             </a:pPr>
             <a:r>
@@ -4862,7 +5168,7 @@
           <a:bodyPr wrap="square" lIns="0" tIns="0" rIns="0" bIns="0" rtlCol="0" anchor="ctr"/>
           <a:lstStyle/>
           <a:p>
-            <a:pPr indent="0" marL="0">
+            <a:pPr marL="0" indent="0">
               <a:buNone/>
             </a:pPr>
             <a:r>
@@ -4896,6 +5202,13 @@
           </a:solidFill>
           <a:ln/>
         </p:spPr>
+        <p:txBody>
+          <a:bodyPr/>
+          <a:lstStyle/>
+          <a:p>
+            <a:endParaRPr lang="es-PE"/>
+          </a:p>
+        </p:txBody>
       </p:sp>
       <p:sp>
         <p:nvSpPr>
@@ -4918,7 +5231,7 @@
           <a:bodyPr wrap="square" lIns="0" tIns="0" rIns="0" bIns="0" rtlCol="0" anchor="ctr"/>
           <a:lstStyle/>
           <a:p>
-            <a:pPr algn="ctr" indent="0" marL="0">
+            <a:pPr marL="0" indent="0" algn="ctr">
               <a:buNone/>
             </a:pPr>
             <a:r>
@@ -4957,7 +5270,7 @@
           <a:bodyPr wrap="square" lIns="0" tIns="0" rIns="0" bIns="0" rtlCol="0" anchor="ctr"/>
           <a:lstStyle/>
           <a:p>
-            <a:pPr indent="0" marL="0">
+            <a:pPr marL="0" indent="0">
               <a:buNone/>
             </a:pPr>
             <a:r>
@@ -4991,6 +5304,13 @@
           </a:solidFill>
           <a:ln/>
         </p:spPr>
+        <p:txBody>
+          <a:bodyPr/>
+          <a:lstStyle/>
+          <a:p>
+            <a:endParaRPr lang="es-PE"/>
+          </a:p>
+        </p:txBody>
       </p:sp>
       <p:sp>
         <p:nvSpPr>
@@ -5013,7 +5333,7 @@
           <a:bodyPr wrap="square" lIns="0" tIns="0" rIns="0" bIns="0" rtlCol="0" anchor="ctr"/>
           <a:lstStyle/>
           <a:p>
-            <a:pPr algn="ctr" indent="0" marL="0">
+            <a:pPr marL="0" indent="0" algn="ctr">
               <a:buNone/>
             </a:pPr>
             <a:r>
@@ -5052,7 +5372,7 @@
           <a:bodyPr wrap="square" lIns="0" tIns="0" rIns="0" bIns="0" rtlCol="0" anchor="ctr"/>
           <a:lstStyle/>
           <a:p>
-            <a:pPr indent="0" marL="0">
+            <a:pPr marL="0" indent="0">
               <a:buNone/>
             </a:pPr>
             <a:r>
@@ -5086,6 +5406,13 @@
           </a:solidFill>
           <a:ln/>
         </p:spPr>
+        <p:txBody>
+          <a:bodyPr/>
+          <a:lstStyle/>
+          <a:p>
+            <a:endParaRPr lang="es-PE"/>
+          </a:p>
+        </p:txBody>
       </p:sp>
       <p:sp>
         <p:nvSpPr>
@@ -5108,7 +5435,7 @@
           <a:bodyPr wrap="square" lIns="0" tIns="0" rIns="0" bIns="0" rtlCol="0" anchor="ctr"/>
           <a:lstStyle/>
           <a:p>
-            <a:pPr algn="ctr" indent="0" marL="0">
+            <a:pPr marL="0" indent="0" algn="ctr">
               <a:buNone/>
             </a:pPr>
             <a:r>
@@ -5147,7 +5474,7 @@
           <a:bodyPr wrap="square" lIns="0" tIns="0" rIns="0" bIns="0" rtlCol="0" anchor="ctr"/>
           <a:lstStyle/>
           <a:p>
-            <a:pPr indent="0" marL="0">
+            <a:pPr marL="0" indent="0">
               <a:buNone/>
             </a:pPr>
             <a:r>
@@ -5183,7 +5510,7 @@
           <a:bodyPr wrap="square" lIns="0" tIns="0" rIns="0" bIns="0" rtlCol="0" anchor="ctr"/>
           <a:lstStyle/>
           <a:p>
-            <a:pPr indent="0" marL="0">
+            <a:pPr marL="0" indent="0">
               <a:buNone/>
             </a:pPr>
             <a:r>
@@ -5197,9 +5524,6 @@
               </a:rPr>
               <a:t>Pruébalo: </a:t>
             </a:r>
-            <a:pPr indent="0" marL="0">
-              <a:buNone/>
-            </a:pPr>
             <a:r>
               <a:rPr lang="en-US" sz="2800" u="sng" dirty="0">
                 <a:solidFill>
@@ -5208,7 +5532,7 @@
                 <a:latin typeface="Arial Black" pitchFamily="34" charset="0"/>
                 <a:ea typeface="Arial Black" pitchFamily="34" charset="-122"/>
                 <a:cs typeface="Arial Black" pitchFamily="34" charset="-120"/>
-                <a:hlinkClick r:id="rId1" invalidUrl="" action="" tgtFrame="" tooltip="" history="1" highlightClick="0" endSnd="0">
+                <a:hlinkClick r:id="rId3">
                   <a:extLst>
                     <a:ext uri="{A12FA001-AC4F-418D-AE19-62706E023703}">
                       <ahyp:hlinkClr xmlns:ahyp="http://schemas.microsoft.com/office/drawing/2018/hyperlinkcolor" val="tx"/>
@@ -5242,7 +5566,7 @@
           </a:prstGeom>
           <a:extLst>
             <a:ext uri="{C572A759-6A51-4108-AA02-DFA0A04FC94B}">
-              <ma14:wrappingTextBoxFlag xmlns:ma14="http://schemas.microsoft.com/office/mac/drawingml/2011/main" val="0"/>
+              <ma14:wrappingTextBoxFlag xmlns:ma14="http://schemas.microsoft.com/office/mac/drawingml/2011/main" xmlns="" val="0"/>
             </a:ext>
           </a:extLst>
         </p:spPr>
@@ -5260,7 +5584,7 @@
           <a:p>
             <a:pPr algn="r"/>
             <a:fld id="{F7021451-1387-4CA6-816F-3879F97B5CBC}" type="slidenum">
-              <a:rPr b="0" lang="en-US"/>
+              <a:rPr lang="en-US" b="0"/>
               <a:t>12</a:t>
             </a:fld>
             <a:endParaRPr lang="en-US"/>
@@ -5295,9 +5619,11 @@
       <p:sp>
         <p:nvSpPr>
           <p:cNvPr id="2" name="Text 0"/>
-          <p:cNvSpPr/>
+          <p:cNvSpPr>
+            <a:spLocks noGrp="1"/>
+          </p:cNvSpPr>
           <p:nvPr>
-            <p:ph idx="100" type="title" hasCustomPrompt="1"/>
+            <p:ph type="title" idx="100" hasCustomPrompt="1"/>
           </p:nvPr>
         </p:nvSpPr>
         <p:spPr>
@@ -5315,7 +5641,7 @@
           <a:bodyPr wrap="square" lIns="0" tIns="0" rIns="0" bIns="0" rtlCol="0" anchor="ctr"/>
           <a:lstStyle/>
           <a:p>
-            <a:pPr algn="l" indent="0" marL="0">
+            <a:pPr marL="0" indent="0" algn="l">
               <a:buNone/>
             </a:pPr>
             <a:r>
@@ -5349,6 +5675,13 @@
           </a:solidFill>
           <a:ln/>
         </p:spPr>
+        <p:txBody>
+          <a:bodyPr/>
+          <a:lstStyle/>
+          <a:p>
+            <a:endParaRPr lang="es-PE"/>
+          </a:p>
+        </p:txBody>
       </p:sp>
       <p:sp>
         <p:nvSpPr>
@@ -5371,7 +5704,7 @@
           <a:bodyPr wrap="square" lIns="0" tIns="0" rIns="0" bIns="0" rtlCol="0" anchor="t"/>
           <a:lstStyle/>
           <a:p>
-            <a:pPr indent="0" marL="0">
+            <a:pPr marL="0" indent="0">
               <a:buNone/>
             </a:pPr>
             <a:r>
@@ -5410,7 +5743,7 @@
           <a:bodyPr wrap="square" lIns="0" tIns="0" rIns="0" bIns="0" rtlCol="0" anchor="t"/>
           <a:lstStyle/>
           <a:p>
-            <a:pPr indent="0" marL="0">
+            <a:pPr marL="0" indent="0">
               <a:buNone/>
             </a:pPr>
             <a:r>
@@ -5444,6 +5777,13 @@
           </a:solidFill>
           <a:ln/>
         </p:spPr>
+        <p:txBody>
+          <a:bodyPr/>
+          <a:lstStyle/>
+          <a:p>
+            <a:endParaRPr lang="es-PE"/>
+          </a:p>
+        </p:txBody>
       </p:sp>
       <p:sp>
         <p:nvSpPr>
@@ -5466,7 +5806,7 @@
           <a:bodyPr wrap="square" lIns="0" tIns="0" rIns="0" bIns="0" rtlCol="0" anchor="t"/>
           <a:lstStyle/>
           <a:p>
-            <a:pPr indent="0" marL="0">
+            <a:pPr marL="0" indent="0">
               <a:buNone/>
             </a:pPr>
             <a:r>
@@ -5505,7 +5845,7 @@
           <a:bodyPr wrap="square" lIns="0" tIns="0" rIns="0" bIns="0" rtlCol="0" anchor="t"/>
           <a:lstStyle/>
           <a:p>
-            <a:pPr indent="0" marL="0">
+            <a:pPr marL="0" indent="0">
               <a:buNone/>
             </a:pPr>
             <a:r>
@@ -5539,6 +5879,13 @@
           </a:solidFill>
           <a:ln/>
         </p:spPr>
+        <p:txBody>
+          <a:bodyPr/>
+          <a:lstStyle/>
+          <a:p>
+            <a:endParaRPr lang="es-PE"/>
+          </a:p>
+        </p:txBody>
       </p:sp>
       <p:sp>
         <p:nvSpPr>
@@ -5561,7 +5908,7 @@
           <a:bodyPr wrap="square" lIns="0" tIns="0" rIns="0" bIns="0" rtlCol="0" anchor="t"/>
           <a:lstStyle/>
           <a:p>
-            <a:pPr indent="0" marL="0">
+            <a:pPr marL="0" indent="0">
               <a:buNone/>
             </a:pPr>
             <a:r>
@@ -5597,7 +5944,7 @@
           <a:bodyPr wrap="square" lIns="0" tIns="0" rIns="0" bIns="0" rtlCol="0" anchor="ctr"/>
           <a:lstStyle/>
           <a:p>
-            <a:pPr indent="0" marL="0">
+            <a:pPr marL="0" indent="0">
               <a:buNone/>
             </a:pPr>
             <a:r>
@@ -5636,7 +5983,7 @@
           <a:bodyPr wrap="square" lIns="0" tIns="0" rIns="0" bIns="0" rtlCol="0" anchor="t"/>
           <a:lstStyle/>
           <a:p>
-            <a:pPr indent="0" marL="0">
+            <a:pPr marL="0" indent="0">
               <a:buNone/>
             </a:pPr>
             <a:r>
@@ -5672,7 +6019,7 @@
           <a:bodyPr wrap="square" lIns="0" tIns="0" rIns="0" bIns="0" rtlCol="0" anchor="t"/>
           <a:lstStyle/>
           <a:p>
-            <a:pPr indent="0" marL="0">
+            <a:pPr marL="0" indent="0">
               <a:buNone/>
             </a:pPr>
             <a:r>
@@ -5686,7 +6033,7 @@
             <a:endParaRPr lang="en-US" sz="1600" dirty="0"/>
           </a:p>
           <a:p>
-            <a:pPr indent="0" marL="0">
+            <a:pPr marL="0" indent="0">
               <a:buNone/>
             </a:pPr>
             <a:r>
@@ -5721,7 +6068,7 @@
           </a:prstGeom>
           <a:extLst>
             <a:ext uri="{C572A759-6A51-4108-AA02-DFA0A04FC94B}">
-              <ma14:wrappingTextBoxFlag xmlns:ma14="http://schemas.microsoft.com/office/mac/drawingml/2011/main" val="0"/>
+              <ma14:wrappingTextBoxFlag xmlns:ma14="http://schemas.microsoft.com/office/mac/drawingml/2011/main" xmlns="" val="0"/>
             </a:ext>
           </a:extLst>
         </p:spPr>
@@ -5739,7 +6086,7 @@
           <a:p>
             <a:pPr algn="r"/>
             <a:fld id="{F7021451-1387-4CA6-816F-3879F97B5CBC}" type="slidenum">
-              <a:rPr b="0" lang="en-US"/>
+              <a:rPr lang="en-US" b="0"/>
               <a:t>2</a:t>
             </a:fld>
             <a:endParaRPr lang="en-US"/>
@@ -5774,9 +6121,11 @@
       <p:sp>
         <p:nvSpPr>
           <p:cNvPr id="2" name="Text 0"/>
-          <p:cNvSpPr/>
+          <p:cNvSpPr>
+            <a:spLocks noGrp="1"/>
+          </p:cNvSpPr>
           <p:nvPr>
-            <p:ph idx="100" type="title" hasCustomPrompt="1"/>
+            <p:ph type="title" idx="100" hasCustomPrompt="1"/>
           </p:nvPr>
         </p:nvSpPr>
         <p:spPr>
@@ -5794,7 +6143,7 @@
           <a:bodyPr wrap="square" lIns="0" tIns="0" rIns="0" bIns="0" rtlCol="0" anchor="ctr"/>
           <a:lstStyle/>
           <a:p>
-            <a:pPr algn="l" indent="0" marL="0">
+            <a:pPr marL="0" indent="0" algn="l">
               <a:buNone/>
             </a:pPr>
             <a:r>
@@ -5830,7 +6179,7 @@
           <a:bodyPr wrap="square" lIns="0" tIns="0" rIns="0" bIns="0" rtlCol="0" anchor="t"/>
           <a:lstStyle/>
           <a:p>
-            <a:pPr indent="0" marL="0">
+            <a:pPr marL="0" indent="0">
               <a:buNone/>
             </a:pPr>
             <a:r>
@@ -5867,6 +6216,13 @@
           </a:solidFill>
           <a:ln/>
         </p:spPr>
+        <p:txBody>
+          <a:bodyPr/>
+          <a:lstStyle/>
+          <a:p>
+            <a:endParaRPr lang="es-PE"/>
+          </a:p>
+        </p:txBody>
       </p:sp>
       <p:sp>
         <p:nvSpPr>
@@ -5887,6 +6243,13 @@
           </a:solidFill>
           <a:ln/>
         </p:spPr>
+        <p:txBody>
+          <a:bodyPr/>
+          <a:lstStyle/>
+          <a:p>
+            <a:endParaRPr lang="es-PE"/>
+          </a:p>
+        </p:txBody>
       </p:sp>
       <p:sp>
         <p:nvSpPr>
@@ -5909,7 +6272,7 @@
           <a:bodyPr wrap="square" lIns="0" tIns="0" rIns="0" bIns="0" rtlCol="0" anchor="ctr"/>
           <a:lstStyle/>
           <a:p>
-            <a:pPr algn="ctr" indent="0" marL="0">
+            <a:pPr marL="0" indent="0" algn="ctr">
               <a:buNone/>
             </a:pPr>
             <a:r>
@@ -5948,7 +6311,7 @@
           <a:bodyPr wrap="square" lIns="0" tIns="0" rIns="0" bIns="0" rtlCol="0" anchor="t"/>
           <a:lstStyle/>
           <a:p>
-            <a:pPr indent="0" marL="0">
+            <a:pPr marL="0" indent="0">
               <a:buNone/>
             </a:pPr>
             <a:r>
@@ -5984,7 +6347,7 @@
           <a:bodyPr wrap="square" lIns="0" tIns="0" rIns="0" bIns="0" rtlCol="0" anchor="t"/>
           <a:lstStyle/>
           <a:p>
-            <a:pPr indent="0" marL="0">
+            <a:pPr marL="0" indent="0">
               <a:buNone/>
             </a:pPr>
             <a:r>
@@ -6020,7 +6383,7 @@
           <a:bodyPr wrap="square" lIns="0" tIns="0" rIns="0" bIns="0" rtlCol="0" anchor="t"/>
           <a:lstStyle/>
           <a:p>
-            <a:pPr algn="ctr" indent="0" marL="0">
+            <a:pPr marL="0" indent="0" algn="ctr">
               <a:buNone/>
             </a:pPr>
             <a:r>
@@ -6054,6 +6417,13 @@
           </a:solidFill>
           <a:ln/>
         </p:spPr>
+        <p:txBody>
+          <a:bodyPr/>
+          <a:lstStyle/>
+          <a:p>
+            <a:endParaRPr lang="es-PE"/>
+          </a:p>
+        </p:txBody>
       </p:sp>
       <p:sp>
         <p:nvSpPr>
@@ -6074,6 +6444,13 @@
           </a:solidFill>
           <a:ln/>
         </p:spPr>
+        <p:txBody>
+          <a:bodyPr/>
+          <a:lstStyle/>
+          <a:p>
+            <a:endParaRPr lang="es-PE"/>
+          </a:p>
+        </p:txBody>
       </p:sp>
       <p:sp>
         <p:nvSpPr>
@@ -6096,7 +6473,7 @@
           <a:bodyPr wrap="square" lIns="0" tIns="0" rIns="0" bIns="0" rtlCol="0" anchor="ctr"/>
           <a:lstStyle/>
           <a:p>
-            <a:pPr algn="ctr" indent="0" marL="0">
+            <a:pPr marL="0" indent="0" algn="ctr">
               <a:buNone/>
             </a:pPr>
             <a:r>
@@ -6135,7 +6512,7 @@
           <a:bodyPr wrap="square" lIns="0" tIns="0" rIns="0" bIns="0" rtlCol="0" anchor="t"/>
           <a:lstStyle/>
           <a:p>
-            <a:pPr indent="0" marL="0">
+            <a:pPr marL="0" indent="0">
               <a:buNone/>
             </a:pPr>
             <a:r>
@@ -6171,7 +6548,7 @@
           <a:bodyPr wrap="square" lIns="0" tIns="0" rIns="0" bIns="0" rtlCol="0" anchor="t"/>
           <a:lstStyle/>
           <a:p>
-            <a:pPr indent="0" marL="0">
+            <a:pPr marL="0" indent="0">
               <a:buNone/>
             </a:pPr>
             <a:r>
@@ -6207,7 +6584,7 @@
           <a:bodyPr wrap="square" lIns="0" tIns="0" rIns="0" bIns="0" rtlCol="0" anchor="t"/>
           <a:lstStyle/>
           <a:p>
-            <a:pPr algn="ctr" indent="0" marL="0">
+            <a:pPr marL="0" indent="0" algn="ctr">
               <a:buNone/>
             </a:pPr>
             <a:r>
@@ -6241,6 +6618,13 @@
           </a:solidFill>
           <a:ln/>
         </p:spPr>
+        <p:txBody>
+          <a:bodyPr/>
+          <a:lstStyle/>
+          <a:p>
+            <a:endParaRPr lang="es-PE"/>
+          </a:p>
+        </p:txBody>
       </p:sp>
       <p:sp>
         <p:nvSpPr>
@@ -6261,6 +6645,13 @@
           </a:solidFill>
           <a:ln/>
         </p:spPr>
+        <p:txBody>
+          <a:bodyPr/>
+          <a:lstStyle/>
+          <a:p>
+            <a:endParaRPr lang="es-PE"/>
+          </a:p>
+        </p:txBody>
       </p:sp>
       <p:sp>
         <p:nvSpPr>
@@ -6283,7 +6674,7 @@
           <a:bodyPr wrap="square" lIns="0" tIns="0" rIns="0" bIns="0" rtlCol="0" anchor="ctr"/>
           <a:lstStyle/>
           <a:p>
-            <a:pPr algn="ctr" indent="0" marL="0">
+            <a:pPr marL="0" indent="0" algn="ctr">
               <a:buNone/>
             </a:pPr>
             <a:r>
@@ -6322,7 +6713,7 @@
           <a:bodyPr wrap="square" lIns="0" tIns="0" rIns="0" bIns="0" rtlCol="0" anchor="t"/>
           <a:lstStyle/>
           <a:p>
-            <a:pPr indent="0" marL="0">
+            <a:pPr marL="0" indent="0">
               <a:buNone/>
             </a:pPr>
             <a:r>
@@ -6358,7 +6749,7 @@
           <a:bodyPr wrap="square" lIns="0" tIns="0" rIns="0" bIns="0" rtlCol="0" anchor="t"/>
           <a:lstStyle/>
           <a:p>
-            <a:pPr indent="0" marL="0">
+            <a:pPr marL="0" indent="0">
               <a:buNone/>
             </a:pPr>
             <a:r>
@@ -6394,7 +6785,7 @@
           <a:bodyPr wrap="square" lIns="0" tIns="0" rIns="0" bIns="0" rtlCol="0" anchor="t"/>
           <a:lstStyle/>
           <a:p>
-            <a:pPr algn="ctr" indent="0" marL="0">
+            <a:pPr marL="0" indent="0" algn="ctr">
               <a:buNone/>
             </a:pPr>
             <a:r>
@@ -6428,6 +6819,13 @@
           </a:solidFill>
           <a:ln/>
         </p:spPr>
+        <p:txBody>
+          <a:bodyPr/>
+          <a:lstStyle/>
+          <a:p>
+            <a:endParaRPr lang="es-PE"/>
+          </a:p>
+        </p:txBody>
       </p:sp>
       <p:sp>
         <p:nvSpPr>
@@ -6448,6 +6846,13 @@
           </a:solidFill>
           <a:ln/>
         </p:spPr>
+        <p:txBody>
+          <a:bodyPr/>
+          <a:lstStyle/>
+          <a:p>
+            <a:endParaRPr lang="es-PE"/>
+          </a:p>
+        </p:txBody>
       </p:sp>
       <p:sp>
         <p:nvSpPr>
@@ -6470,7 +6875,7 @@
           <a:bodyPr wrap="square" lIns="0" tIns="0" rIns="0" bIns="0" rtlCol="0" anchor="ctr"/>
           <a:lstStyle/>
           <a:p>
-            <a:pPr algn="ctr" indent="0" marL="0">
+            <a:pPr marL="0" indent="0" algn="ctr">
               <a:buNone/>
             </a:pPr>
             <a:r>
@@ -6509,7 +6914,7 @@
           <a:bodyPr wrap="square" lIns="0" tIns="0" rIns="0" bIns="0" rtlCol="0" anchor="t"/>
           <a:lstStyle/>
           <a:p>
-            <a:pPr indent="0" marL="0">
+            <a:pPr marL="0" indent="0">
               <a:buNone/>
             </a:pPr>
             <a:r>
@@ -6545,7 +6950,7 @@
           <a:bodyPr wrap="square" lIns="0" tIns="0" rIns="0" bIns="0" rtlCol="0" anchor="t"/>
           <a:lstStyle/>
           <a:p>
-            <a:pPr indent="0" marL="0">
+            <a:pPr marL="0" indent="0">
               <a:buNone/>
             </a:pPr>
             <a:r>
@@ -6581,7 +6986,7 @@
           <a:bodyPr wrap="square" lIns="0" tIns="0" rIns="0" bIns="0" rtlCol="0" anchor="t"/>
           <a:lstStyle/>
           <a:p>
-            <a:pPr indent="0" marL="0">
+            <a:pPr marL="0" indent="0">
               <a:buNone/>
             </a:pPr>
             <a:r>
@@ -6618,6 +7023,13 @@
           </a:solidFill>
           <a:ln/>
         </p:spPr>
+        <p:txBody>
+          <a:bodyPr/>
+          <a:lstStyle/>
+          <a:p>
+            <a:endParaRPr lang="es-PE"/>
+          </a:p>
+        </p:txBody>
       </p:sp>
       <p:sp>
         <p:nvSpPr>
@@ -6638,6 +7050,13 @@
           </a:solidFill>
           <a:ln/>
         </p:spPr>
+        <p:txBody>
+          <a:bodyPr/>
+          <a:lstStyle/>
+          <a:p>
+            <a:endParaRPr lang="es-PE"/>
+          </a:p>
+        </p:txBody>
       </p:sp>
       <p:sp>
         <p:nvSpPr>
@@ -6660,7 +7079,7 @@
           <a:bodyPr wrap="square" lIns="0" tIns="0" rIns="0" bIns="0" rtlCol="0" anchor="ctr"/>
           <a:lstStyle/>
           <a:p>
-            <a:pPr algn="ctr" indent="0" marL="0">
+            <a:pPr marL="0" indent="0" algn="ctr">
               <a:buNone/>
             </a:pPr>
             <a:r>
@@ -6699,7 +7118,7 @@
           <a:bodyPr wrap="square" lIns="0" tIns="0" rIns="0" bIns="0" rtlCol="0" anchor="t"/>
           <a:lstStyle/>
           <a:p>
-            <a:pPr indent="0" marL="0">
+            <a:pPr marL="0" indent="0">
               <a:buNone/>
             </a:pPr>
             <a:r>
@@ -6735,7 +7154,7 @@
           <a:bodyPr wrap="square" lIns="0" tIns="0" rIns="0" bIns="0" rtlCol="0" anchor="t"/>
           <a:lstStyle/>
           <a:p>
-            <a:pPr indent="0" marL="0">
+            <a:pPr marL="0" indent="0">
               <a:buNone/>
             </a:pPr>
             <a:r>
@@ -6771,7 +7190,7 @@
           <a:bodyPr wrap="square" lIns="0" tIns="0" rIns="0" bIns="0" rtlCol="0" anchor="t"/>
           <a:lstStyle/>
           <a:p>
-            <a:pPr algn="ctr" indent="0" marL="0">
+            <a:pPr marL="0" indent="0" algn="ctr">
               <a:buNone/>
             </a:pPr>
             <a:r>
@@ -6805,6 +7224,13 @@
           </a:solidFill>
           <a:ln/>
         </p:spPr>
+        <p:txBody>
+          <a:bodyPr/>
+          <a:lstStyle/>
+          <a:p>
+            <a:endParaRPr lang="es-PE"/>
+          </a:p>
+        </p:txBody>
       </p:sp>
       <p:sp>
         <p:nvSpPr>
@@ -6825,6 +7251,13 @@
           </a:solidFill>
           <a:ln/>
         </p:spPr>
+        <p:txBody>
+          <a:bodyPr/>
+          <a:lstStyle/>
+          <a:p>
+            <a:endParaRPr lang="es-PE"/>
+          </a:p>
+        </p:txBody>
       </p:sp>
       <p:sp>
         <p:nvSpPr>
@@ -6847,7 +7280,7 @@
           <a:bodyPr wrap="square" lIns="0" tIns="0" rIns="0" bIns="0" rtlCol="0" anchor="ctr"/>
           <a:lstStyle/>
           <a:p>
-            <a:pPr algn="ctr" indent="0" marL="0">
+            <a:pPr marL="0" indent="0" algn="ctr">
               <a:buNone/>
             </a:pPr>
             <a:r>
@@ -6886,7 +7319,7 @@
           <a:bodyPr wrap="square" lIns="0" tIns="0" rIns="0" bIns="0" rtlCol="0" anchor="t"/>
           <a:lstStyle/>
           <a:p>
-            <a:pPr indent="0" marL="0">
+            <a:pPr marL="0" indent="0">
               <a:buNone/>
             </a:pPr>
             <a:r>
@@ -6922,7 +7355,7 @@
           <a:bodyPr wrap="square" lIns="0" tIns="0" rIns="0" bIns="0" rtlCol="0" anchor="t"/>
           <a:lstStyle/>
           <a:p>
-            <a:pPr indent="0" marL="0">
+            <a:pPr marL="0" indent="0">
               <a:buNone/>
             </a:pPr>
             <a:r>
@@ -6958,7 +7391,7 @@
           <a:bodyPr wrap="square" lIns="0" tIns="0" rIns="0" bIns="0" rtlCol="0" anchor="t"/>
           <a:lstStyle/>
           <a:p>
-            <a:pPr algn="ctr" indent="0" marL="0">
+            <a:pPr marL="0" indent="0" algn="ctr">
               <a:buNone/>
             </a:pPr>
             <a:r>
@@ -6992,6 +7425,13 @@
           </a:solidFill>
           <a:ln/>
         </p:spPr>
+        <p:txBody>
+          <a:bodyPr/>
+          <a:lstStyle/>
+          <a:p>
+            <a:endParaRPr lang="es-PE"/>
+          </a:p>
+        </p:txBody>
       </p:sp>
       <p:sp>
         <p:nvSpPr>
@@ -7012,6 +7452,13 @@
           </a:solidFill>
           <a:ln/>
         </p:spPr>
+        <p:txBody>
+          <a:bodyPr/>
+          <a:lstStyle/>
+          <a:p>
+            <a:endParaRPr lang="es-PE"/>
+          </a:p>
+        </p:txBody>
       </p:sp>
       <p:sp>
         <p:nvSpPr>
@@ -7034,7 +7481,7 @@
           <a:bodyPr wrap="square" lIns="0" tIns="0" rIns="0" bIns="0" rtlCol="0" anchor="ctr"/>
           <a:lstStyle/>
           <a:p>
-            <a:pPr algn="ctr" indent="0" marL="0">
+            <a:pPr marL="0" indent="0" algn="ctr">
               <a:buNone/>
             </a:pPr>
             <a:r>
@@ -7073,7 +7520,7 @@
           <a:bodyPr wrap="square" lIns="0" tIns="0" rIns="0" bIns="0" rtlCol="0" anchor="t"/>
           <a:lstStyle/>
           <a:p>
-            <a:pPr indent="0" marL="0">
+            <a:pPr marL="0" indent="0">
               <a:buNone/>
             </a:pPr>
             <a:r>
@@ -7109,7 +7556,7 @@
           <a:bodyPr wrap="square" lIns="0" tIns="0" rIns="0" bIns="0" rtlCol="0" anchor="t"/>
           <a:lstStyle/>
           <a:p>
-            <a:pPr indent="0" marL="0">
+            <a:pPr marL="0" indent="0">
               <a:buNone/>
             </a:pPr>
             <a:r>
@@ -7145,7 +7592,7 @@
           <a:bodyPr wrap="square" lIns="0" tIns="0" rIns="0" bIns="0" rtlCol="0" anchor="t"/>
           <a:lstStyle/>
           <a:p>
-            <a:pPr algn="ctr" indent="0" marL="0">
+            <a:pPr marL="0" indent="0" algn="ctr">
               <a:buNone/>
             </a:pPr>
             <a:r>
@@ -7179,6 +7626,13 @@
           </a:solidFill>
           <a:ln/>
         </p:spPr>
+        <p:txBody>
+          <a:bodyPr/>
+          <a:lstStyle/>
+          <a:p>
+            <a:endParaRPr lang="es-PE"/>
+          </a:p>
+        </p:txBody>
       </p:sp>
       <p:sp>
         <p:nvSpPr>
@@ -7199,6 +7653,13 @@
           </a:solidFill>
           <a:ln/>
         </p:spPr>
+        <p:txBody>
+          <a:bodyPr/>
+          <a:lstStyle/>
+          <a:p>
+            <a:endParaRPr lang="es-PE"/>
+          </a:p>
+        </p:txBody>
       </p:sp>
       <p:sp>
         <p:nvSpPr>
@@ -7221,7 +7682,7 @@
           <a:bodyPr wrap="square" lIns="0" tIns="0" rIns="0" bIns="0" rtlCol="0" anchor="ctr"/>
           <a:lstStyle/>
           <a:p>
-            <a:pPr algn="ctr" indent="0" marL="0">
+            <a:pPr marL="0" indent="0" algn="ctr">
               <a:buNone/>
             </a:pPr>
             <a:r>
@@ -7260,7 +7721,7 @@
           <a:bodyPr wrap="square" lIns="0" tIns="0" rIns="0" bIns="0" rtlCol="0" anchor="t"/>
           <a:lstStyle/>
           <a:p>
-            <a:pPr indent="0" marL="0">
+            <a:pPr marL="0" indent="0">
               <a:buNone/>
             </a:pPr>
             <a:r>
@@ -7296,7 +7757,7 @@
           <a:bodyPr wrap="square" lIns="0" tIns="0" rIns="0" bIns="0" rtlCol="0" anchor="t"/>
           <a:lstStyle/>
           <a:p>
-            <a:pPr indent="0" marL="0">
+            <a:pPr marL="0" indent="0">
               <a:buNone/>
             </a:pPr>
             <a:r>
@@ -7313,7 +7774,7 @@
       </p:sp>
       <p:sp>
         <p:nvSpPr>
-          <p:cNvPr id="25" name="Slide Number Placeholder 0"/>
+          <p:cNvPr id="51" name="Slide Number Placeholder 0"/>
           <p:cNvSpPr>
             <a:spLocks noGrp="1"/>
           </p:cNvSpPr>
@@ -7331,7 +7792,7 @@
           </a:prstGeom>
           <a:extLst>
             <a:ext uri="{C572A759-6A51-4108-AA02-DFA0A04FC94B}">
-              <ma14:wrappingTextBoxFlag xmlns:ma14="http://schemas.microsoft.com/office/mac/drawingml/2011/main" val="0"/>
+              <ma14:wrappingTextBoxFlag xmlns:ma14="http://schemas.microsoft.com/office/mac/drawingml/2011/main" xmlns="" val="0"/>
             </a:ext>
           </a:extLst>
         </p:spPr>
@@ -7349,7 +7810,7 @@
           <a:p>
             <a:pPr algn="r"/>
             <a:fld id="{F7021451-1387-4CA6-816F-3879F97B5CBC}" type="slidenum">
-              <a:rPr b="0" lang="en-US"/>
+              <a:rPr lang="en-US" b="0"/>
               <a:t>3</a:t>
             </a:fld>
             <a:endParaRPr lang="en-US"/>
@@ -7384,9 +7845,11 @@
       <p:sp>
         <p:nvSpPr>
           <p:cNvPr id="2" name="Text 0"/>
-          <p:cNvSpPr/>
+          <p:cNvSpPr>
+            <a:spLocks noGrp="1"/>
+          </p:cNvSpPr>
           <p:nvPr>
-            <p:ph idx="100" type="title" hasCustomPrompt="1"/>
+            <p:ph type="title" idx="100" hasCustomPrompt="1"/>
           </p:nvPr>
         </p:nvSpPr>
         <p:spPr>
@@ -7404,7 +7867,7 @@
           <a:bodyPr wrap="square" lIns="0" tIns="0" rIns="0" bIns="0" rtlCol="0" anchor="ctr"/>
           <a:lstStyle/>
           <a:p>
-            <a:pPr algn="l" indent="0" marL="0">
+            <a:pPr marL="0" indent="0" algn="l">
               <a:buNone/>
             </a:pPr>
             <a:r>
@@ -7438,6 +7901,13 @@
           </a:solidFill>
           <a:ln/>
         </p:spPr>
+        <p:txBody>
+          <a:bodyPr/>
+          <a:lstStyle/>
+          <a:p>
+            <a:endParaRPr lang="es-PE"/>
+          </a:p>
+        </p:txBody>
       </p:sp>
       <p:sp>
         <p:nvSpPr>
@@ -7460,7 +7930,7 @@
           <a:bodyPr wrap="square" lIns="0" tIns="0" rIns="0" bIns="0" rtlCol="0" anchor="ctr"/>
           <a:lstStyle/>
           <a:p>
-            <a:pPr indent="0" marL="0">
+            <a:pPr marL="0" indent="0">
               <a:buNone/>
             </a:pPr>
             <a:r>
@@ -7499,7 +7969,7 @@
           <a:bodyPr wrap="square" lIns="0" tIns="0" rIns="0" bIns="0" rtlCol="0" anchor="t"/>
           <a:lstStyle/>
           <a:p>
-            <a:pPr indent="0" marL="0">
+            <a:pPr marL="0" indent="0">
               <a:buNone/>
             </a:pPr>
             <a:r>
@@ -7535,7 +8005,7 @@
           <a:bodyPr wrap="square" lIns="0" tIns="0" rIns="0" bIns="0" rtlCol="0" anchor="t"/>
           <a:lstStyle/>
           <a:p>
-            <a:pPr indent="0" marL="0">
+            <a:pPr marL="0" indent="0">
               <a:buNone/>
             </a:pPr>
             <a:r>
@@ -7569,6 +8039,13 @@
           </a:solidFill>
           <a:ln/>
         </p:spPr>
+        <p:txBody>
+          <a:bodyPr/>
+          <a:lstStyle/>
+          <a:p>
+            <a:endParaRPr lang="es-PE"/>
+          </a:p>
+        </p:txBody>
       </p:sp>
       <p:sp>
         <p:nvSpPr>
@@ -7591,7 +8068,7 @@
           <a:bodyPr wrap="square" lIns="0" tIns="0" rIns="0" bIns="0" rtlCol="0" anchor="ctr"/>
           <a:lstStyle/>
           <a:p>
-            <a:pPr indent="0" marL="0">
+            <a:pPr marL="0" indent="0">
               <a:buNone/>
             </a:pPr>
             <a:r>
@@ -7630,7 +8107,7 @@
           <a:bodyPr wrap="square" lIns="0" tIns="0" rIns="0" bIns="0" rtlCol="0" anchor="t"/>
           <a:lstStyle/>
           <a:p>
-            <a:pPr indent="0" marL="0">
+            <a:pPr marL="0" indent="0">
               <a:buNone/>
             </a:pPr>
             <a:r>
@@ -7666,7 +8143,7 @@
           <a:bodyPr wrap="square" lIns="0" tIns="0" rIns="0" bIns="0" rtlCol="0" anchor="t"/>
           <a:lstStyle/>
           <a:p>
-            <a:pPr indent="0" marL="0">
+            <a:pPr marL="0" indent="0">
               <a:buNone/>
             </a:pPr>
             <a:r>
@@ -7700,6 +8177,13 @@
           </a:solidFill>
           <a:ln/>
         </p:spPr>
+        <p:txBody>
+          <a:bodyPr/>
+          <a:lstStyle/>
+          <a:p>
+            <a:endParaRPr lang="es-PE"/>
+          </a:p>
+        </p:txBody>
       </p:sp>
       <p:sp>
         <p:nvSpPr>
@@ -7722,7 +8206,7 @@
           <a:bodyPr wrap="square" lIns="0" tIns="0" rIns="0" bIns="0" rtlCol="0" anchor="ctr"/>
           <a:lstStyle/>
           <a:p>
-            <a:pPr indent="0" marL="0">
+            <a:pPr marL="0" indent="0">
               <a:buNone/>
             </a:pPr>
             <a:r>
@@ -7761,7 +8245,7 @@
           <a:bodyPr wrap="square" lIns="0" tIns="0" rIns="0" bIns="0" rtlCol="0" anchor="t"/>
           <a:lstStyle/>
           <a:p>
-            <a:pPr indent="0" marL="0">
+            <a:pPr marL="0" indent="0">
               <a:buNone/>
             </a:pPr>
             <a:r>
@@ -7797,7 +8281,7 @@
           <a:bodyPr wrap="square" lIns="0" tIns="0" rIns="0" bIns="0" rtlCol="0" anchor="t"/>
           <a:lstStyle/>
           <a:p>
-            <a:pPr indent="0" marL="0">
+            <a:pPr marL="0" indent="0">
               <a:buNone/>
             </a:pPr>
             <a:r>
@@ -7831,6 +8315,13 @@
           </a:solidFill>
           <a:ln/>
         </p:spPr>
+        <p:txBody>
+          <a:bodyPr/>
+          <a:lstStyle/>
+          <a:p>
+            <a:endParaRPr lang="es-PE"/>
+          </a:p>
+        </p:txBody>
       </p:sp>
       <p:sp>
         <p:nvSpPr>
@@ -7853,7 +8344,7 @@
           <a:bodyPr wrap="square" lIns="0" tIns="0" rIns="0" bIns="0" rtlCol="0" anchor="ctr"/>
           <a:lstStyle/>
           <a:p>
-            <a:pPr indent="0" marL="0">
+            <a:pPr marL="0" indent="0">
               <a:buNone/>
             </a:pPr>
             <a:r>
@@ -7892,7 +8383,7 @@
           <a:bodyPr wrap="square" lIns="0" tIns="0" rIns="0" bIns="0" rtlCol="0" anchor="t"/>
           <a:lstStyle/>
           <a:p>
-            <a:pPr indent="0" marL="0">
+            <a:pPr marL="0" indent="0">
               <a:buNone/>
             </a:pPr>
             <a:r>
@@ -7928,7 +8419,7 @@
           <a:bodyPr wrap="square" lIns="0" tIns="0" rIns="0" bIns="0" rtlCol="0" anchor="t"/>
           <a:lstStyle/>
           <a:p>
-            <a:pPr indent="0" marL="0">
+            <a:pPr marL="0" indent="0">
               <a:buNone/>
             </a:pPr>
             <a:r>
@@ -7964,7 +8455,7 @@
           <a:bodyPr wrap="square" lIns="0" tIns="0" rIns="0" bIns="0" rtlCol="0" anchor="t"/>
           <a:lstStyle/>
           <a:p>
-            <a:pPr indent="0" marL="0">
+            <a:pPr marL="0" indent="0">
               <a:buNone/>
             </a:pPr>
             <a:r>
@@ -7975,9 +8466,6 @@
               </a:rPr>
               <a:t>Flujo: </a:t>
             </a:r>
-            <a:pPr indent="0" marL="0">
-              <a:buNone/>
-            </a:pPr>
             <a:r>
               <a:rPr lang="en-US" sz="1500" dirty="0">
                 <a:solidFill>
@@ -7986,9 +8474,6 @@
               </a:rPr>
               <a:t>descarga de los portales → preprocesar.py (mismas reglas de la Semana 7) → data/mercado.csv → la app. </a:t>
             </a:r>
-            <a:pPr indent="0" marL="0">
-              <a:buNone/>
-            </a:pPr>
             <a:r>
               <a:rPr lang="en-US" sz="1500" b="1" dirty="0">
                 <a:solidFill>
@@ -8021,7 +8506,7 @@
           </a:prstGeom>
           <a:extLst>
             <a:ext uri="{C572A759-6A51-4108-AA02-DFA0A04FC94B}">
-              <ma14:wrappingTextBoxFlag xmlns:ma14="http://schemas.microsoft.com/office/mac/drawingml/2011/main" val="0"/>
+              <ma14:wrappingTextBoxFlag xmlns:ma14="http://schemas.microsoft.com/office/mac/drawingml/2011/main" xmlns="" val="0"/>
             </a:ext>
           </a:extLst>
         </p:spPr>
@@ -8039,7 +8524,7 @@
           <a:p>
             <a:pPr algn="r"/>
             <a:fld id="{F7021451-1387-4CA6-816F-3879F97B5CBC}" type="slidenum">
-              <a:rPr b="0" lang="en-US"/>
+              <a:rPr lang="en-US" b="0"/>
               <a:t>4</a:t>
             </a:fld>
             <a:endParaRPr lang="en-US"/>
@@ -8074,9 +8559,11 @@
       <p:sp>
         <p:nvSpPr>
           <p:cNvPr id="2" name="Text 0"/>
-          <p:cNvSpPr/>
+          <p:cNvSpPr>
+            <a:spLocks noGrp="1"/>
+          </p:cNvSpPr>
           <p:nvPr>
-            <p:ph idx="100" type="title" hasCustomPrompt="1"/>
+            <p:ph type="title" idx="100" hasCustomPrompt="1"/>
           </p:nvPr>
         </p:nvSpPr>
         <p:spPr>
@@ -8094,7 +8581,7 @@
           <a:bodyPr wrap="square" lIns="0" tIns="0" rIns="0" bIns="0" rtlCol="0" anchor="ctr"/>
           <a:lstStyle/>
           <a:p>
-            <a:pPr algn="l" indent="0" marL="0">
+            <a:pPr marL="0" indent="0" algn="l">
               <a:buNone/>
             </a:pPr>
             <a:r>
@@ -8130,6 +8617,13 @@
             <a:prstDash val="dash"/>
           </a:ln>
         </p:spPr>
+        <p:txBody>
+          <a:bodyPr/>
+          <a:lstStyle/>
+          <a:p>
+            <a:endParaRPr lang="es-PE"/>
+          </a:p>
+        </p:txBody>
       </p:sp>
       <p:sp>
         <p:nvSpPr>
@@ -8152,7 +8646,7 @@
           <a:bodyPr wrap="square" lIns="0" tIns="0" rIns="0" bIns="0" rtlCol="0" anchor="t"/>
           <a:lstStyle/>
           <a:p>
-            <a:pPr indent="0" marL="0">
+            <a:pPr marL="0" indent="0">
               <a:buNone/>
             </a:pPr>
             <a:r>
@@ -8186,6 +8680,13 @@
           </a:solidFill>
           <a:ln/>
         </p:spPr>
+        <p:txBody>
+          <a:bodyPr/>
+          <a:lstStyle/>
+          <a:p>
+            <a:endParaRPr lang="es-PE"/>
+          </a:p>
+        </p:txBody>
       </p:sp>
       <p:sp>
         <p:nvSpPr>
@@ -8208,7 +8709,7 @@
           <a:bodyPr wrap="square" lIns="0" tIns="0" rIns="0" bIns="0" rtlCol="0" anchor="t"/>
           <a:lstStyle/>
           <a:p>
-            <a:pPr indent="0" marL="0">
+            <a:pPr marL="0" indent="0">
               <a:buNone/>
             </a:pPr>
             <a:r>
@@ -8222,7 +8723,7 @@
             <a:endParaRPr lang="en-US" sz="1400" dirty="0"/>
           </a:p>
           <a:p>
-            <a:pPr indent="0" marL="0">
+            <a:pPr marL="0" indent="0">
               <a:buNone/>
             </a:pPr>
             <a:r>
@@ -8256,6 +8757,13 @@
           </a:solidFill>
           <a:ln/>
         </p:spPr>
+        <p:txBody>
+          <a:bodyPr/>
+          <a:lstStyle/>
+          <a:p>
+            <a:endParaRPr lang="es-PE"/>
+          </a:p>
+        </p:txBody>
       </p:sp>
       <p:sp>
         <p:nvSpPr>
@@ -8278,7 +8786,7 @@
           <a:bodyPr wrap="square" lIns="0" tIns="0" rIns="0" bIns="0" rtlCol="0" anchor="t"/>
           <a:lstStyle/>
           <a:p>
-            <a:pPr indent="0" marL="0">
+            <a:pPr marL="0" indent="0">
               <a:buNone/>
             </a:pPr>
             <a:r>
@@ -8292,7 +8800,7 @@
             <a:endParaRPr lang="en-US" sz="1400" dirty="0"/>
           </a:p>
           <a:p>
-            <a:pPr indent="0" marL="0">
+            <a:pPr marL="0" indent="0">
               <a:buNone/>
             </a:pPr>
             <a:r>
@@ -8306,7 +8814,7 @@
             <a:endParaRPr lang="en-US" sz="1400" dirty="0"/>
           </a:p>
           <a:p>
-            <a:pPr indent="0" marL="0">
+            <a:pPr marL="0" indent="0">
               <a:buNone/>
             </a:pPr>
             <a:r>
@@ -8320,7 +8828,7 @@
             <a:endParaRPr lang="en-US" sz="1400" dirty="0"/>
           </a:p>
           <a:p>
-            <a:pPr indent="0" marL="0">
+            <a:pPr marL="0" indent="0">
               <a:buNone/>
             </a:pPr>
             <a:r>
@@ -8354,6 +8862,13 @@
           </a:solidFill>
           <a:ln/>
         </p:spPr>
+        <p:txBody>
+          <a:bodyPr/>
+          <a:lstStyle/>
+          <a:p>
+            <a:endParaRPr lang="es-PE"/>
+          </a:p>
+        </p:txBody>
       </p:sp>
       <p:sp>
         <p:nvSpPr>
@@ -8376,7 +8891,7 @@
           <a:bodyPr wrap="square" lIns="0" tIns="0" rIns="0" bIns="0" rtlCol="0" anchor="t"/>
           <a:lstStyle/>
           <a:p>
-            <a:pPr indent="0" marL="0">
+            <a:pPr marL="0" indent="0">
               <a:buNone/>
             </a:pPr>
             <a:r>
@@ -8390,7 +8905,7 @@
             <a:endParaRPr lang="en-US" sz="1400" dirty="0"/>
           </a:p>
           <a:p>
-            <a:pPr indent="0" marL="0">
+            <a:pPr marL="0" indent="0">
               <a:buNone/>
             </a:pPr>
             <a:r>
@@ -8424,6 +8939,13 @@
           </a:solidFill>
           <a:ln/>
         </p:spPr>
+        <p:txBody>
+          <a:bodyPr/>
+          <a:lstStyle/>
+          <a:p>
+            <a:endParaRPr lang="es-PE"/>
+          </a:p>
+        </p:txBody>
       </p:sp>
       <p:sp>
         <p:nvSpPr>
@@ -8446,7 +8968,7 @@
           <a:bodyPr wrap="square" lIns="0" tIns="0" rIns="0" bIns="0" rtlCol="0" anchor="t"/>
           <a:lstStyle/>
           <a:p>
-            <a:pPr indent="0" marL="0">
+            <a:pPr marL="0" indent="0">
               <a:buNone/>
             </a:pPr>
             <a:r>
@@ -8460,7 +8982,7 @@
             <a:endParaRPr lang="en-US" sz="1400" dirty="0"/>
           </a:p>
           <a:p>
-            <a:pPr indent="0" marL="0">
+            <a:pPr marL="0" indent="0">
               <a:buNone/>
             </a:pPr>
             <a:r>
@@ -8494,6 +9016,13 @@
           </a:solidFill>
           <a:ln/>
         </p:spPr>
+        <p:txBody>
+          <a:bodyPr/>
+          <a:lstStyle/>
+          <a:p>
+            <a:endParaRPr lang="es-PE"/>
+          </a:p>
+        </p:txBody>
       </p:sp>
       <p:sp>
         <p:nvSpPr>
@@ -8516,7 +9045,7 @@
           <a:bodyPr wrap="square" lIns="0" tIns="0" rIns="0" bIns="0" rtlCol="0" anchor="t"/>
           <a:lstStyle/>
           <a:p>
-            <a:pPr indent="0" marL="0">
+            <a:pPr marL="0" indent="0">
               <a:buNone/>
             </a:pPr>
             <a:r>
@@ -8530,7 +9059,7 @@
             <a:endParaRPr lang="en-US" sz="1400" dirty="0"/>
           </a:p>
           <a:p>
-            <a:pPr indent="0" marL="0">
+            <a:pPr marL="0" indent="0">
               <a:buNone/>
             </a:pPr>
             <a:r>
@@ -8564,6 +9093,13 @@
           </a:solidFill>
           <a:ln/>
         </p:spPr>
+        <p:txBody>
+          <a:bodyPr/>
+          <a:lstStyle/>
+          <a:p>
+            <a:endParaRPr lang="es-PE"/>
+          </a:p>
+        </p:txBody>
       </p:sp>
       <p:sp>
         <p:nvSpPr>
@@ -8586,7 +9122,7 @@
           <a:bodyPr wrap="square" lIns="0" tIns="0" rIns="0" bIns="0" rtlCol="0" anchor="t"/>
           <a:lstStyle/>
           <a:p>
-            <a:pPr indent="0" marL="0">
+            <a:pPr marL="0" indent="0">
               <a:buNone/>
             </a:pPr>
             <a:r>
@@ -8600,7 +9136,7 @@
             <a:endParaRPr lang="en-US" sz="1400" dirty="0"/>
           </a:p>
           <a:p>
-            <a:pPr indent="0" marL="0">
+            <a:pPr marL="0" indent="0">
               <a:buNone/>
             </a:pPr>
             <a:r>
@@ -8634,6 +9170,13 @@
           </a:solidFill>
           <a:ln/>
         </p:spPr>
+        <p:txBody>
+          <a:bodyPr/>
+          <a:lstStyle/>
+          <a:p>
+            <a:endParaRPr lang="es-PE"/>
+          </a:p>
+        </p:txBody>
       </p:sp>
       <p:sp>
         <p:nvSpPr>
@@ -8656,7 +9199,7 @@
           <a:bodyPr wrap="square" lIns="0" tIns="0" rIns="0" bIns="0" rtlCol="0" anchor="t"/>
           <a:lstStyle/>
           <a:p>
-            <a:pPr indent="0" marL="0">
+            <a:pPr marL="0" indent="0">
               <a:buNone/>
             </a:pPr>
             <a:r>
@@ -8670,7 +9213,7 @@
             <a:endParaRPr lang="en-US" sz="1400" dirty="0"/>
           </a:p>
           <a:p>
-            <a:pPr indent="0" marL="0">
+            <a:pPr marL="0" indent="0">
               <a:buNone/>
             </a:pPr>
             <a:r>
@@ -8704,6 +9247,13 @@
           </a:solidFill>
           <a:ln/>
         </p:spPr>
+        <p:txBody>
+          <a:bodyPr/>
+          <a:lstStyle/>
+          <a:p>
+            <a:endParaRPr lang="es-PE"/>
+          </a:p>
+        </p:txBody>
       </p:sp>
       <p:sp>
         <p:nvSpPr>
@@ -8726,7 +9276,7 @@
           <a:bodyPr wrap="square" lIns="0" tIns="0" rIns="0" bIns="0" rtlCol="0" anchor="t"/>
           <a:lstStyle/>
           <a:p>
-            <a:pPr indent="0" marL="0">
+            <a:pPr marL="0" indent="0">
               <a:buNone/>
             </a:pPr>
             <a:r>
@@ -8740,7 +9290,7 @@
             <a:endParaRPr lang="en-US" sz="1400" dirty="0"/>
           </a:p>
           <a:p>
-            <a:pPr indent="0" marL="0">
+            <a:pPr marL="0" indent="0">
               <a:buNone/>
             </a:pPr>
             <a:r>
@@ -8778,6 +9328,13 @@
             <a:tailEnd type="triangle"/>
           </a:ln>
         </p:spPr>
+        <p:txBody>
+          <a:bodyPr/>
+          <a:lstStyle/>
+          <a:p>
+            <a:endParaRPr lang="es-PE"/>
+          </a:p>
+        </p:txBody>
       </p:sp>
       <p:sp>
         <p:nvSpPr>
@@ -8802,6 +9359,13 @@
             <a:tailEnd type="triangle"/>
           </a:ln>
         </p:spPr>
+        <p:txBody>
+          <a:bodyPr/>
+          <a:lstStyle/>
+          <a:p>
+            <a:endParaRPr lang="es-PE"/>
+          </a:p>
+        </p:txBody>
       </p:sp>
       <p:sp>
         <p:nvSpPr>
@@ -8826,6 +9390,13 @@
             <a:tailEnd type="triangle"/>
           </a:ln>
         </p:spPr>
+        <p:txBody>
+          <a:bodyPr/>
+          <a:lstStyle/>
+          <a:p>
+            <a:endParaRPr lang="es-PE"/>
+          </a:p>
+        </p:txBody>
       </p:sp>
       <p:sp>
         <p:nvSpPr>
@@ -8850,6 +9421,13 @@
             <a:tailEnd type="triangle"/>
           </a:ln>
         </p:spPr>
+        <p:txBody>
+          <a:bodyPr/>
+          <a:lstStyle/>
+          <a:p>
+            <a:endParaRPr lang="es-PE"/>
+          </a:p>
+        </p:txBody>
       </p:sp>
       <p:sp>
         <p:nvSpPr>
@@ -8874,6 +9452,13 @@
             <a:tailEnd type="triangle"/>
           </a:ln>
         </p:spPr>
+        <p:txBody>
+          <a:bodyPr/>
+          <a:lstStyle/>
+          <a:p>
+            <a:endParaRPr lang="es-PE"/>
+          </a:p>
+        </p:txBody>
       </p:sp>
       <p:sp>
         <p:nvSpPr>
@@ -8898,6 +9483,13 @@
             <a:tailEnd type="triangle"/>
           </a:ln>
         </p:spPr>
+        <p:txBody>
+          <a:bodyPr/>
+          <a:lstStyle/>
+          <a:p>
+            <a:endParaRPr lang="es-PE"/>
+          </a:p>
+        </p:txBody>
       </p:sp>
       <p:sp>
         <p:nvSpPr>
@@ -8922,6 +9514,13 @@
             <a:tailEnd type="triangle"/>
           </a:ln>
         </p:spPr>
+        <p:txBody>
+          <a:bodyPr/>
+          <a:lstStyle/>
+          <a:p>
+            <a:endParaRPr lang="es-PE"/>
+          </a:p>
+        </p:txBody>
       </p:sp>
       <p:sp>
         <p:nvSpPr>
@@ -8942,6 +9541,13 @@
           </a:solidFill>
           <a:ln/>
         </p:spPr>
+        <p:txBody>
+          <a:bodyPr/>
+          <a:lstStyle/>
+          <a:p>
+            <a:endParaRPr lang="es-PE"/>
+          </a:p>
+        </p:txBody>
       </p:sp>
       <p:sp>
         <p:nvSpPr>
@@ -8964,7 +9570,7 @@
           <a:bodyPr wrap="square" lIns="0" tIns="0" rIns="0" bIns="0" rtlCol="0" anchor="ctr"/>
           <a:lstStyle/>
           <a:p>
-            <a:pPr algn="ctr" indent="0" marL="0">
+            <a:pPr marL="0" indent="0" algn="ctr">
               <a:buNone/>
             </a:pPr>
             <a:r>
@@ -9003,7 +9609,7 @@
           <a:bodyPr wrap="square" lIns="0" tIns="0" rIns="0" bIns="0" rtlCol="0" anchor="ctr"/>
           <a:lstStyle/>
           <a:p>
-            <a:pPr indent="0" marL="0">
+            <a:pPr marL="0" indent="0">
               <a:buNone/>
             </a:pPr>
             <a:r>
@@ -9020,7 +9626,7 @@
       </p:sp>
       <p:sp>
         <p:nvSpPr>
-          <p:cNvPr id="25" name="Slide Number Placeholder 0"/>
+          <p:cNvPr id="31" name="Slide Number Placeholder 0"/>
           <p:cNvSpPr>
             <a:spLocks noGrp="1"/>
           </p:cNvSpPr>
@@ -9038,7 +9644,7 @@
           </a:prstGeom>
           <a:extLst>
             <a:ext uri="{C572A759-6A51-4108-AA02-DFA0A04FC94B}">
-              <ma14:wrappingTextBoxFlag xmlns:ma14="http://schemas.microsoft.com/office/mac/drawingml/2011/main" val="0"/>
+              <ma14:wrappingTextBoxFlag xmlns:ma14="http://schemas.microsoft.com/office/mac/drawingml/2011/main" xmlns="" val="0"/>
             </a:ext>
           </a:extLst>
         </p:spPr>
@@ -9056,7 +9662,7 @@
           <a:p>
             <a:pPr algn="r"/>
             <a:fld id="{F7021451-1387-4CA6-816F-3879F97B5CBC}" type="slidenum">
-              <a:rPr b="0" lang="en-US"/>
+              <a:rPr lang="en-US" b="0"/>
               <a:t>5</a:t>
             </a:fld>
             <a:endParaRPr lang="en-US"/>
@@ -9091,9 +9697,11 @@
       <p:sp>
         <p:nvSpPr>
           <p:cNvPr id="2" name="Text 0"/>
-          <p:cNvSpPr/>
+          <p:cNvSpPr>
+            <a:spLocks noGrp="1"/>
+          </p:cNvSpPr>
           <p:nvPr>
-            <p:ph idx="100" type="title" hasCustomPrompt="1"/>
+            <p:ph type="title" idx="100" hasCustomPrompt="1"/>
           </p:nvPr>
         </p:nvSpPr>
         <p:spPr>
@@ -9111,7 +9719,7 @@
           <a:bodyPr wrap="square" lIns="0" tIns="0" rIns="0" bIns="0" rtlCol="0" anchor="ctr"/>
           <a:lstStyle/>
           <a:p>
-            <a:pPr algn="l" indent="0" marL="0">
+            <a:pPr marL="0" indent="0" algn="l">
               <a:buNone/>
             </a:pPr>
             <a:r>
@@ -9145,6 +9753,13 @@
           </a:solidFill>
           <a:ln/>
         </p:spPr>
+        <p:txBody>
+          <a:bodyPr/>
+          <a:lstStyle/>
+          <a:p>
+            <a:endParaRPr lang="es-PE"/>
+          </a:p>
+        </p:txBody>
       </p:sp>
       <p:sp>
         <p:nvSpPr>
@@ -9165,6 +9780,13 @@
           </a:solidFill>
           <a:ln/>
         </p:spPr>
+        <p:txBody>
+          <a:bodyPr/>
+          <a:lstStyle/>
+          <a:p>
+            <a:endParaRPr lang="es-PE"/>
+          </a:p>
+        </p:txBody>
       </p:sp>
       <p:sp>
         <p:nvSpPr>
@@ -9187,7 +9809,7 @@
           <a:bodyPr wrap="square" lIns="0" tIns="0" rIns="0" bIns="0" rtlCol="0" anchor="ctr"/>
           <a:lstStyle/>
           <a:p>
-            <a:pPr algn="ctr" indent="0" marL="0">
+            <a:pPr marL="0" indent="0" algn="ctr">
               <a:buNone/>
             </a:pPr>
             <a:r>
@@ -9226,7 +9848,7 @@
           <a:bodyPr wrap="square" lIns="0" tIns="0" rIns="0" bIns="0" rtlCol="0" anchor="ctr"/>
           <a:lstStyle/>
           <a:p>
-            <a:pPr indent="0" marL="0">
+            <a:pPr marL="0" indent="0">
               <a:buNone/>
             </a:pPr>
             <a:r>
@@ -9262,7 +9884,7 @@
           <a:bodyPr wrap="square" lIns="0" tIns="0" rIns="0" bIns="0" rtlCol="0" anchor="t"/>
           <a:lstStyle/>
           <a:p>
-            <a:pPr indent="0" marL="0">
+            <a:pPr marL="0" indent="0">
               <a:buNone/>
             </a:pPr>
             <a:r>
@@ -9298,7 +9920,7 @@
           <a:bodyPr wrap="square" lIns="0" tIns="0" rIns="0" bIns="0" rtlCol="0" anchor="t"/>
           <a:lstStyle/>
           <a:p>
-            <a:pPr indent="0" marL="0">
+            <a:pPr marL="0" indent="0">
               <a:buNone/>
             </a:pPr>
             <a:r>
@@ -9332,6 +9954,13 @@
           </a:solidFill>
           <a:ln/>
         </p:spPr>
+        <p:txBody>
+          <a:bodyPr/>
+          <a:lstStyle/>
+          <a:p>
+            <a:endParaRPr lang="es-PE"/>
+          </a:p>
+        </p:txBody>
       </p:sp>
       <p:sp>
         <p:nvSpPr>
@@ -9352,6 +9981,13 @@
           </a:solidFill>
           <a:ln/>
         </p:spPr>
+        <p:txBody>
+          <a:bodyPr/>
+          <a:lstStyle/>
+          <a:p>
+            <a:endParaRPr lang="es-PE"/>
+          </a:p>
+        </p:txBody>
       </p:sp>
       <p:sp>
         <p:nvSpPr>
@@ -9374,7 +10010,7 @@
           <a:bodyPr wrap="square" lIns="0" tIns="0" rIns="0" bIns="0" rtlCol="0" anchor="ctr"/>
           <a:lstStyle/>
           <a:p>
-            <a:pPr algn="ctr" indent="0" marL="0">
+            <a:pPr marL="0" indent="0" algn="ctr">
               <a:buNone/>
             </a:pPr>
             <a:r>
@@ -9413,7 +10049,7 @@
           <a:bodyPr wrap="square" lIns="0" tIns="0" rIns="0" bIns="0" rtlCol="0" anchor="ctr"/>
           <a:lstStyle/>
           <a:p>
-            <a:pPr indent="0" marL="0">
+            <a:pPr marL="0" indent="0">
               <a:buNone/>
             </a:pPr>
             <a:r>
@@ -9449,7 +10085,7 @@
           <a:bodyPr wrap="square" lIns="0" tIns="0" rIns="0" bIns="0" rtlCol="0" anchor="t"/>
           <a:lstStyle/>
           <a:p>
-            <a:pPr indent="0" marL="0">
+            <a:pPr marL="0" indent="0">
               <a:buNone/>
             </a:pPr>
             <a:r>
@@ -9485,7 +10121,7 @@
           <a:bodyPr wrap="square" lIns="0" tIns="0" rIns="0" bIns="0" rtlCol="0" anchor="t"/>
           <a:lstStyle/>
           <a:p>
-            <a:pPr indent="0" marL="0">
+            <a:pPr marL="0" indent="0">
               <a:buNone/>
             </a:pPr>
             <a:r>
@@ -9519,6 +10155,13 @@
           </a:solidFill>
           <a:ln/>
         </p:spPr>
+        <p:txBody>
+          <a:bodyPr/>
+          <a:lstStyle/>
+          <a:p>
+            <a:endParaRPr lang="es-PE"/>
+          </a:p>
+        </p:txBody>
       </p:sp>
       <p:sp>
         <p:nvSpPr>
@@ -9539,6 +10182,13 @@
           </a:solidFill>
           <a:ln/>
         </p:spPr>
+        <p:txBody>
+          <a:bodyPr/>
+          <a:lstStyle/>
+          <a:p>
+            <a:endParaRPr lang="es-PE"/>
+          </a:p>
+        </p:txBody>
       </p:sp>
       <p:sp>
         <p:nvSpPr>
@@ -9561,7 +10211,7 @@
           <a:bodyPr wrap="square" lIns="0" tIns="0" rIns="0" bIns="0" rtlCol="0" anchor="ctr"/>
           <a:lstStyle/>
           <a:p>
-            <a:pPr algn="ctr" indent="0" marL="0">
+            <a:pPr marL="0" indent="0" algn="ctr">
               <a:buNone/>
             </a:pPr>
             <a:r>
@@ -9600,7 +10250,7 @@
           <a:bodyPr wrap="square" lIns="0" tIns="0" rIns="0" bIns="0" rtlCol="0" anchor="ctr"/>
           <a:lstStyle/>
           <a:p>
-            <a:pPr indent="0" marL="0">
+            <a:pPr marL="0" indent="0">
               <a:buNone/>
             </a:pPr>
             <a:r>
@@ -9636,7 +10286,7 @@
           <a:bodyPr wrap="square" lIns="0" tIns="0" rIns="0" bIns="0" rtlCol="0" anchor="t"/>
           <a:lstStyle/>
           <a:p>
-            <a:pPr indent="0" marL="0">
+            <a:pPr marL="0" indent="0">
               <a:buNone/>
             </a:pPr>
             <a:r>
@@ -9672,7 +10322,7 @@
           <a:bodyPr wrap="square" lIns="0" tIns="0" rIns="0" bIns="0" rtlCol="0" anchor="t"/>
           <a:lstStyle/>
           <a:p>
-            <a:pPr indent="0" marL="0">
+            <a:pPr marL="0" indent="0">
               <a:buNone/>
             </a:pPr>
             <a:r>
@@ -9706,6 +10356,13 @@
           </a:solidFill>
           <a:ln/>
         </p:spPr>
+        <p:txBody>
+          <a:bodyPr/>
+          <a:lstStyle/>
+          <a:p>
+            <a:endParaRPr lang="es-PE"/>
+          </a:p>
+        </p:txBody>
       </p:sp>
       <p:sp>
         <p:nvSpPr>
@@ -9726,6 +10383,13 @@
           </a:solidFill>
           <a:ln/>
         </p:spPr>
+        <p:txBody>
+          <a:bodyPr/>
+          <a:lstStyle/>
+          <a:p>
+            <a:endParaRPr lang="es-PE"/>
+          </a:p>
+        </p:txBody>
       </p:sp>
       <p:sp>
         <p:nvSpPr>
@@ -9748,7 +10412,7 @@
           <a:bodyPr wrap="square" lIns="0" tIns="0" rIns="0" bIns="0" rtlCol="0" anchor="ctr"/>
           <a:lstStyle/>
           <a:p>
-            <a:pPr algn="ctr" indent="0" marL="0">
+            <a:pPr marL="0" indent="0" algn="ctr">
               <a:buNone/>
             </a:pPr>
             <a:r>
@@ -9787,7 +10451,7 @@
           <a:bodyPr wrap="square" lIns="0" tIns="0" rIns="0" bIns="0" rtlCol="0" anchor="ctr"/>
           <a:lstStyle/>
           <a:p>
-            <a:pPr indent="0" marL="0">
+            <a:pPr marL="0" indent="0">
               <a:buNone/>
             </a:pPr>
             <a:r>
@@ -9823,7 +10487,7 @@
           <a:bodyPr wrap="square" lIns="0" tIns="0" rIns="0" bIns="0" rtlCol="0" anchor="t"/>
           <a:lstStyle/>
           <a:p>
-            <a:pPr indent="0" marL="0">
+            <a:pPr marL="0" indent="0">
               <a:buNone/>
             </a:pPr>
             <a:r>
@@ -9859,7 +10523,7 @@
           <a:bodyPr wrap="square" lIns="0" tIns="0" rIns="0" bIns="0" rtlCol="0" anchor="t"/>
           <a:lstStyle/>
           <a:p>
-            <a:pPr indent="0" marL="0">
+            <a:pPr marL="0" indent="0">
               <a:buNone/>
             </a:pPr>
             <a:r>
@@ -9893,6 +10557,13 @@
           </a:solidFill>
           <a:ln/>
         </p:spPr>
+        <p:txBody>
+          <a:bodyPr/>
+          <a:lstStyle/>
+          <a:p>
+            <a:endParaRPr lang="es-PE"/>
+          </a:p>
+        </p:txBody>
       </p:sp>
       <p:sp>
         <p:nvSpPr>
@@ -9913,6 +10584,13 @@
           </a:solidFill>
           <a:ln/>
         </p:spPr>
+        <p:txBody>
+          <a:bodyPr/>
+          <a:lstStyle/>
+          <a:p>
+            <a:endParaRPr lang="es-PE"/>
+          </a:p>
+        </p:txBody>
       </p:sp>
       <p:sp>
         <p:nvSpPr>
@@ -9935,7 +10613,7 @@
           <a:bodyPr wrap="square" lIns="0" tIns="0" rIns="0" bIns="0" rtlCol="0" anchor="ctr"/>
           <a:lstStyle/>
           <a:p>
-            <a:pPr algn="ctr" indent="0" marL="0">
+            <a:pPr marL="0" indent="0" algn="ctr">
               <a:buNone/>
             </a:pPr>
             <a:r>
@@ -9974,7 +10652,7 @@
           <a:bodyPr wrap="square" lIns="0" tIns="0" rIns="0" bIns="0" rtlCol="0" anchor="ctr"/>
           <a:lstStyle/>
           <a:p>
-            <a:pPr indent="0" marL="0">
+            <a:pPr marL="0" indent="0">
               <a:buNone/>
             </a:pPr>
             <a:r>
@@ -10010,7 +10688,7 @@
           <a:bodyPr wrap="square" lIns="0" tIns="0" rIns="0" bIns="0" rtlCol="0" anchor="t"/>
           <a:lstStyle/>
           <a:p>
-            <a:pPr indent="0" marL="0">
+            <a:pPr marL="0" indent="0">
               <a:buNone/>
             </a:pPr>
             <a:r>
@@ -10046,7 +10724,7 @@
           <a:bodyPr wrap="square" lIns="0" tIns="0" rIns="0" bIns="0" rtlCol="0" anchor="t"/>
           <a:lstStyle/>
           <a:p>
-            <a:pPr indent="0" marL="0">
+            <a:pPr marL="0" indent="0">
               <a:buNone/>
             </a:pPr>
             <a:r>
@@ -10080,6 +10758,13 @@
           </a:solidFill>
           <a:ln/>
         </p:spPr>
+        <p:txBody>
+          <a:bodyPr/>
+          <a:lstStyle/>
+          <a:p>
+            <a:endParaRPr lang="es-PE"/>
+          </a:p>
+        </p:txBody>
       </p:sp>
       <p:sp>
         <p:nvSpPr>
@@ -10100,6 +10785,13 @@
           </a:solidFill>
           <a:ln/>
         </p:spPr>
+        <p:txBody>
+          <a:bodyPr/>
+          <a:lstStyle/>
+          <a:p>
+            <a:endParaRPr lang="es-PE"/>
+          </a:p>
+        </p:txBody>
       </p:sp>
       <p:sp>
         <p:nvSpPr>
@@ -10122,7 +10814,7 @@
           <a:bodyPr wrap="square" lIns="0" tIns="0" rIns="0" bIns="0" rtlCol="0" anchor="ctr"/>
           <a:lstStyle/>
           <a:p>
-            <a:pPr algn="ctr" indent="0" marL="0">
+            <a:pPr marL="0" indent="0" algn="ctr">
               <a:buNone/>
             </a:pPr>
             <a:r>
@@ -10161,7 +10853,7 @@
           <a:bodyPr wrap="square" lIns="0" tIns="0" rIns="0" bIns="0" rtlCol="0" anchor="ctr"/>
           <a:lstStyle/>
           <a:p>
-            <a:pPr indent="0" marL="0">
+            <a:pPr marL="0" indent="0">
               <a:buNone/>
             </a:pPr>
             <a:r>
@@ -10197,7 +10889,7 @@
           <a:bodyPr wrap="square" lIns="0" tIns="0" rIns="0" bIns="0" rtlCol="0" anchor="t"/>
           <a:lstStyle/>
           <a:p>
-            <a:pPr indent="0" marL="0">
+            <a:pPr marL="0" indent="0">
               <a:buNone/>
             </a:pPr>
             <a:r>
@@ -10233,7 +10925,7 @@
           <a:bodyPr wrap="square" lIns="0" tIns="0" rIns="0" bIns="0" rtlCol="0" anchor="t"/>
           <a:lstStyle/>
           <a:p>
-            <a:pPr indent="0" marL="0">
+            <a:pPr marL="0" indent="0">
               <a:buNone/>
             </a:pPr>
             <a:r>
@@ -10250,7 +10942,7 @@
       </p:sp>
       <p:sp>
         <p:nvSpPr>
-          <p:cNvPr id="25" name="Slide Number Placeholder 0"/>
+          <p:cNvPr id="39" name="Slide Number Placeholder 0"/>
           <p:cNvSpPr>
             <a:spLocks noGrp="1"/>
           </p:cNvSpPr>
@@ -10268,7 +10960,7 @@
           </a:prstGeom>
           <a:extLst>
             <a:ext uri="{C572A759-6A51-4108-AA02-DFA0A04FC94B}">
-              <ma14:wrappingTextBoxFlag xmlns:ma14="http://schemas.microsoft.com/office/mac/drawingml/2011/main" val="0"/>
+              <ma14:wrappingTextBoxFlag xmlns:ma14="http://schemas.microsoft.com/office/mac/drawingml/2011/main" xmlns="" val="0"/>
             </a:ext>
           </a:extLst>
         </p:spPr>
@@ -10286,7 +10978,7 @@
           <a:p>
             <a:pPr algn="r"/>
             <a:fld id="{F7021451-1387-4CA6-816F-3879F97B5CBC}" type="slidenum">
-              <a:rPr b="0" lang="en-US"/>
+              <a:rPr lang="en-US" b="0"/>
               <a:t>6</a:t>
             </a:fld>
             <a:endParaRPr lang="en-US"/>
@@ -10321,9 +11013,11 @@
       <p:sp>
         <p:nvSpPr>
           <p:cNvPr id="2" name="Text 0"/>
-          <p:cNvSpPr/>
+          <p:cNvSpPr>
+            <a:spLocks noGrp="1"/>
+          </p:cNvSpPr>
           <p:nvPr>
-            <p:ph idx="100" type="title" hasCustomPrompt="1"/>
+            <p:ph type="title" idx="100" hasCustomPrompt="1"/>
           </p:nvPr>
         </p:nvSpPr>
         <p:spPr>
@@ -10341,7 +11035,7 @@
           <a:bodyPr wrap="square" lIns="0" tIns="0" rIns="0" bIns="0" rtlCol="0" anchor="ctr"/>
           <a:lstStyle/>
           <a:p>
-            <a:pPr algn="l" indent="0" marL="0">
+            <a:pPr marL="0" indent="0" algn="l">
               <a:buNone/>
             </a:pPr>
             <a:r>
@@ -10375,6 +11069,13 @@
           </a:solidFill>
           <a:ln/>
         </p:spPr>
+        <p:txBody>
+          <a:bodyPr/>
+          <a:lstStyle/>
+          <a:p>
+            <a:endParaRPr lang="es-PE"/>
+          </a:p>
+        </p:txBody>
       </p:sp>
       <p:sp>
         <p:nvSpPr>
@@ -10397,7 +11098,7 @@
           <a:bodyPr wrap="square" lIns="0" tIns="0" rIns="0" bIns="0" rtlCol="0" anchor="ctr"/>
           <a:lstStyle/>
           <a:p>
-            <a:pPr algn="ctr" indent="0" marL="0">
+            <a:pPr marL="0" indent="0" algn="ctr">
               <a:buNone/>
             </a:pPr>
             <a:r>
@@ -10436,7 +11137,7 @@
           <a:bodyPr wrap="square" lIns="0" tIns="0" rIns="0" bIns="0" rtlCol="0" anchor="ctr"/>
           <a:lstStyle/>
           <a:p>
-            <a:pPr indent="0" marL="0">
+            <a:pPr marL="0" indent="0">
               <a:buNone/>
             </a:pPr>
             <a:r>
@@ -10472,7 +11173,7 @@
           <a:bodyPr wrap="square" lIns="0" tIns="0" rIns="0" bIns="0" rtlCol="0" anchor="t"/>
           <a:lstStyle/>
           <a:p>
-            <a:pPr indent="0" marL="0">
+            <a:pPr marL="0" indent="0">
               <a:buNone/>
             </a:pPr>
             <a:r>
@@ -10489,361 +11190,7 @@
       </p:sp>
       <p:pic>
         <p:nvPicPr>
-          <p:cNvPr id="7" name="captura-p1_agregar" descr="Formulario para agregar un departamento con el mapa de ubicación">    </p:cNvPr>
-          <p:cNvPicPr>
-            <a:picLocks noChangeAspect="1"/>
-          </p:cNvPicPr>
-          <p:nvPr/>
-        </p:nvPicPr>
-        <p:blipFill>
-          <a:blip r:embed="rId1"/>
-          <a:stretch>
-            <a:fillRect/>
-          </a:stretch>
-        </p:blipFill>
-        <p:spPr>
-          <a:xfrm>
-            <a:off x="548640" y="2743200"/>
-            <a:ext cx="3520440" cy="2640330"/>
-          </a:xfrm>
-          <a:prstGeom prst="rect">
-            <a:avLst/>
-          </a:prstGeom>
-        </p:spPr>
-      </p:pic>
-      <p:sp>
-        <p:nvSpPr>
-          <p:cNvPr id="8" name="borde-154"/>
-          <p:cNvSpPr/>
-          <p:nvPr/>
-        </p:nvSpPr>
-        <p:spPr>
-          <a:xfrm>
-            <a:off x="548640" y="2743200"/>
-            <a:ext cx="3520440" cy="2640330"/>
-          </a:xfrm>
-          <a:prstGeom prst="rect">
-            <a:avLst/>
-          </a:prstGeom>
-          <a:ln w="9525">
-            <a:solidFill>
-              <a:schemeClr val="accent6"/>
-            </a:solidFill>
-            <a:prstDash val="solid"/>
-          </a:ln>
-        </p:spPr>
-      </p:sp>
-      <p:sp>
-        <p:nvSpPr>
-          <p:cNvPr id="9" name="caja-155"/>
-          <p:cNvSpPr/>
-          <p:nvPr/>
-        </p:nvSpPr>
-        <p:spPr>
-          <a:xfrm>
-            <a:off x="4343400" y="1508760"/>
-            <a:ext cx="384048" cy="384048"/>
-          </a:xfrm>
-          <a:prstGeom prst="rect">
-            <a:avLst/>
-          </a:prstGeom>
-          <a:solidFill>
-            <a:schemeClr val="accent1"/>
-          </a:solidFill>
-          <a:ln/>
-        </p:spPr>
-      </p:sp>
-      <p:sp>
-        <p:nvSpPr>
-          <p:cNvPr id="10" name="texto-156"/>
-          <p:cNvSpPr txBox="1"/>
-          <p:nvPr/>
-        </p:nvSpPr>
-        <p:spPr>
-          <a:xfrm>
-            <a:off x="4343400" y="1508760"/>
-            <a:ext cx="384048" cy="384048"/>
-          </a:xfrm>
-          <a:prstGeom prst="rect">
-            <a:avLst/>
-          </a:prstGeom>
-          <a:noFill/>
-          <a:ln/>
-        </p:spPr>
-        <p:txBody>
-          <a:bodyPr wrap="square" lIns="0" tIns="0" rIns="0" bIns="0" rtlCol="0" anchor="ctr"/>
-          <a:lstStyle/>
-          <a:p>
-            <a:pPr algn="ctr" indent="0" marL="0">
-              <a:buNone/>
-            </a:pPr>
-            <a:r>
-              <a:rPr lang="en-US" sz="1400" dirty="0">
-                <a:solidFill>
-                  <a:schemeClr val="tx1"/>
-                </a:solidFill>
-                <a:latin typeface="Arial Black" pitchFamily="34" charset="0"/>
-                <a:ea typeface="Arial Black" pitchFamily="34" charset="-122"/>
-                <a:cs typeface="Arial Black" pitchFamily="34" charset="-120"/>
-              </a:rPr>
-              <a:t>2</a:t>
-            </a:r>
-            <a:endParaRPr lang="en-US" sz="1400" dirty="0"/>
-          </a:p>
-        </p:txBody>
-      </p:sp>
-      <p:sp>
-        <p:nvSpPr>
-          <p:cNvPr id="11" name="texto-157"/>
-          <p:cNvSpPr txBox="1"/>
-          <p:nvPr/>
-        </p:nvSpPr>
-        <p:spPr>
-          <a:xfrm>
-            <a:off x="4892040" y="1508760"/>
-            <a:ext cx="2971800" cy="384048"/>
-          </a:xfrm>
-          <a:prstGeom prst="rect">
-            <a:avLst/>
-          </a:prstGeom>
-          <a:noFill/>
-          <a:ln/>
-        </p:spPr>
-        <p:txBody>
-          <a:bodyPr wrap="square" lIns="0" tIns="0" rIns="0" bIns="0" rtlCol="0" anchor="ctr"/>
-          <a:lstStyle/>
-          <a:p>
-            <a:pPr indent="0" marL="0">
-              <a:buNone/>
-            </a:pPr>
-            <a:r>
-              <a:rPr lang="en-US" sz="1800" b="1" dirty="0">
-                <a:solidFill>
-                  <a:schemeClr val="tx1"/>
-                </a:solidFill>
-              </a:rPr>
-              <a:t>Recibe el análisis</a:t>
-            </a:r>
-            <a:endParaRPr lang="en-US" sz="1800" dirty="0"/>
-          </a:p>
-        </p:txBody>
-      </p:sp>
-      <p:sp>
-        <p:nvSpPr>
-          <p:cNvPr id="12" name="texto-158"/>
-          <p:cNvSpPr txBox="1"/>
-          <p:nvPr/>
-        </p:nvSpPr>
-        <p:spPr>
-          <a:xfrm>
-            <a:off x="4343400" y="2011680"/>
-            <a:ext cx="3520440" cy="640080"/>
-          </a:xfrm>
-          <a:prstGeom prst="rect">
-            <a:avLst/>
-          </a:prstGeom>
-          <a:noFill/>
-          <a:ln/>
-        </p:spPr>
-        <p:txBody>
-          <a:bodyPr wrap="square" lIns="0" tIns="0" rIns="0" bIns="0" rtlCol="0" anchor="t"/>
-          <a:lstStyle/>
-          <a:p>
-            <a:pPr indent="0" marL="0">
-              <a:buNone/>
-            </a:pPr>
-            <a:r>
-              <a:rPr lang="en-US" sz="1400" dirty="0">
-                <a:solidFill>
-                  <a:schemeClr val="tx1"/>
-                </a:solidFill>
-              </a:rPr>
-              <a:t>Precio esperado S/ 3,656, rango y tres precios de publicación.</a:t>
-            </a:r>
-            <a:endParaRPr lang="en-US" sz="1400" dirty="0"/>
-          </a:p>
-        </p:txBody>
-      </p:sp>
-      <p:pic>
-        <p:nvPicPr>
-          <p:cNvPr id="13" name="captura-p2_analisis" descr="Resumen del análisis: precio esperado, rango y precios de publicación">    </p:cNvPr>
-          <p:cNvPicPr>
-            <a:picLocks noChangeAspect="1"/>
-          </p:cNvPicPr>
-          <p:nvPr/>
-        </p:nvPicPr>
-        <p:blipFill>
-          <a:blip r:embed="rId2"/>
-          <a:stretch>
-            <a:fillRect/>
-          </a:stretch>
-        </p:blipFill>
-        <p:spPr>
-          <a:xfrm>
-            <a:off x="4343400" y="2743200"/>
-            <a:ext cx="3520440" cy="2640330"/>
-          </a:xfrm>
-          <a:prstGeom prst="rect">
-            <a:avLst/>
-          </a:prstGeom>
-        </p:spPr>
-      </p:pic>
-      <p:sp>
-        <p:nvSpPr>
-          <p:cNvPr id="14" name="borde-159"/>
-          <p:cNvSpPr/>
-          <p:nvPr/>
-        </p:nvSpPr>
-        <p:spPr>
-          <a:xfrm>
-            <a:off x="4343400" y="2743200"/>
-            <a:ext cx="3520440" cy="2640330"/>
-          </a:xfrm>
-          <a:prstGeom prst="rect">
-            <a:avLst/>
-          </a:prstGeom>
-          <a:ln w="9525">
-            <a:solidFill>
-              <a:schemeClr val="accent6"/>
-            </a:solidFill>
-            <a:prstDash val="solid"/>
-          </a:ln>
-        </p:spPr>
-      </p:sp>
-      <p:sp>
-        <p:nvSpPr>
-          <p:cNvPr id="15" name="caja-160"/>
-          <p:cNvSpPr/>
-          <p:nvPr/>
-        </p:nvSpPr>
-        <p:spPr>
-          <a:xfrm>
-            <a:off x="8138160" y="1508760"/>
-            <a:ext cx="384048" cy="384048"/>
-          </a:xfrm>
-          <a:prstGeom prst="rect">
-            <a:avLst/>
-          </a:prstGeom>
-          <a:solidFill>
-            <a:schemeClr val="accent1"/>
-          </a:solidFill>
-          <a:ln/>
-        </p:spPr>
-      </p:sp>
-      <p:sp>
-        <p:nvSpPr>
-          <p:cNvPr id="16" name="texto-161"/>
-          <p:cNvSpPr txBox="1"/>
-          <p:nvPr/>
-        </p:nvSpPr>
-        <p:spPr>
-          <a:xfrm>
-            <a:off x="8138160" y="1508760"/>
-            <a:ext cx="384048" cy="384048"/>
-          </a:xfrm>
-          <a:prstGeom prst="rect">
-            <a:avLst/>
-          </a:prstGeom>
-          <a:noFill/>
-          <a:ln/>
-        </p:spPr>
-        <p:txBody>
-          <a:bodyPr wrap="square" lIns="0" tIns="0" rIns="0" bIns="0" rtlCol="0" anchor="ctr"/>
-          <a:lstStyle/>
-          <a:p>
-            <a:pPr algn="ctr" indent="0" marL="0">
-              <a:buNone/>
-            </a:pPr>
-            <a:r>
-              <a:rPr lang="en-US" sz="1400" dirty="0">
-                <a:solidFill>
-                  <a:schemeClr val="tx1"/>
-                </a:solidFill>
-                <a:latin typeface="Arial Black" pitchFamily="34" charset="0"/>
-                <a:ea typeface="Arial Black" pitchFamily="34" charset="-122"/>
-                <a:cs typeface="Arial Black" pitchFamily="34" charset="-120"/>
-              </a:rPr>
-              <a:t>3</a:t>
-            </a:r>
-            <a:endParaRPr lang="en-US" sz="1400" dirty="0"/>
-          </a:p>
-        </p:txBody>
-      </p:sp>
-      <p:sp>
-        <p:nvSpPr>
-          <p:cNvPr id="17" name="texto-162"/>
-          <p:cNvSpPr txBox="1"/>
-          <p:nvPr/>
-        </p:nvSpPr>
-        <p:spPr>
-          <a:xfrm>
-            <a:off x="8686800" y="1508760"/>
-            <a:ext cx="2971800" cy="384048"/>
-          </a:xfrm>
-          <a:prstGeom prst="rect">
-            <a:avLst/>
-          </a:prstGeom>
-          <a:noFill/>
-          <a:ln/>
-        </p:spPr>
-        <p:txBody>
-          <a:bodyPr wrap="square" lIns="0" tIns="0" rIns="0" bIns="0" rtlCol="0" anchor="ctr"/>
-          <a:lstStyle/>
-          <a:p>
-            <a:pPr indent="0" marL="0">
-              <a:buNone/>
-            </a:pPr>
-            <a:r>
-              <a:rPr lang="en-US" sz="1800" b="1" dirty="0">
-                <a:solidFill>
-                  <a:schemeClr val="tx1"/>
-                </a:solidFill>
-              </a:rPr>
-              <a:t>Lo publica</a:t>
-            </a:r>
-            <a:endParaRPr lang="en-US" sz="1800" dirty="0"/>
-          </a:p>
-        </p:txBody>
-      </p:sp>
-      <p:sp>
-        <p:nvSpPr>
-          <p:cNvPr id="18" name="texto-163"/>
-          <p:cNvSpPr txBox="1"/>
-          <p:nvPr/>
-        </p:nvSpPr>
-        <p:spPr>
-          <a:xfrm>
-            <a:off x="8138160" y="2011680"/>
-            <a:ext cx="3520440" cy="640080"/>
-          </a:xfrm>
-          <a:prstGeom prst="rect">
-            <a:avLst/>
-          </a:prstGeom>
-          <a:noFill/>
-          <a:ln/>
-        </p:spPr>
-        <p:txBody>
-          <a:bodyPr wrap="square" lIns="0" tIns="0" rIns="0" bIns="0" rtlCol="0" anchor="t"/>
-          <a:lstStyle/>
-          <a:p>
-            <a:pPr indent="0" marL="0">
-              <a:buNone/>
-            </a:pPr>
-            <a:r>
-              <a:rPr lang="en-US" sz="1400" dirty="0">
-                <a:solidFill>
-                  <a:schemeClr val="tx1"/>
-                </a:solidFill>
-              </a:rPr>
-              <a:t>Elige renta superior, S/ 3,840; ya aparece en la búsqueda.</a:t>
-            </a:r>
-            <a:endParaRPr lang="en-US" sz="1400" dirty="0"/>
-          </a:p>
-        </p:txBody>
-      </p:sp>
-      <p:pic>
-        <p:nvPicPr>
-          <p:cNvPr id="19" name="captura-p3_publicado" descr="Ficha pública del departamento publicado">    </p:cNvPr>
+          <p:cNvPr id="7" name="captura-p1_agregar" descr="Formulario para agregar un departamento con el mapa de ubicación"/>
           <p:cNvPicPr>
             <a:picLocks noChangeAspect="1"/>
           </p:cNvPicPr>
@@ -10857,7 +11204,7 @@
         </p:blipFill>
         <p:spPr>
           <a:xfrm>
-            <a:off x="8138160" y="2743200"/>
+            <a:off x="548640" y="2743200"/>
             <a:ext cx="3520440" cy="2640330"/>
           </a:xfrm>
           <a:prstGeom prst="rect">
@@ -10867,13 +11214,13 @@
       </p:pic>
       <p:sp>
         <p:nvSpPr>
-          <p:cNvPr id="20" name="borde-164"/>
+          <p:cNvPr id="8" name="borde-154"/>
           <p:cNvSpPr/>
           <p:nvPr/>
         </p:nvSpPr>
         <p:spPr>
           <a:xfrm>
-            <a:off x="8138160" y="2743200"/>
+            <a:off x="548640" y="2743200"/>
             <a:ext cx="3520440" cy="2640330"/>
           </a:xfrm>
           <a:prstGeom prst="rect">
@@ -10886,6 +11233,395 @@
             <a:prstDash val="solid"/>
           </a:ln>
         </p:spPr>
+        <p:txBody>
+          <a:bodyPr/>
+          <a:lstStyle/>
+          <a:p>
+            <a:endParaRPr lang="es-PE"/>
+          </a:p>
+        </p:txBody>
+      </p:sp>
+      <p:sp>
+        <p:nvSpPr>
+          <p:cNvPr id="9" name="caja-155"/>
+          <p:cNvSpPr/>
+          <p:nvPr/>
+        </p:nvSpPr>
+        <p:spPr>
+          <a:xfrm>
+            <a:off x="4343400" y="1508760"/>
+            <a:ext cx="384048" cy="384048"/>
+          </a:xfrm>
+          <a:prstGeom prst="rect">
+            <a:avLst/>
+          </a:prstGeom>
+          <a:solidFill>
+            <a:schemeClr val="accent1"/>
+          </a:solidFill>
+          <a:ln/>
+        </p:spPr>
+        <p:txBody>
+          <a:bodyPr/>
+          <a:lstStyle/>
+          <a:p>
+            <a:endParaRPr lang="es-PE"/>
+          </a:p>
+        </p:txBody>
+      </p:sp>
+      <p:sp>
+        <p:nvSpPr>
+          <p:cNvPr id="10" name="texto-156"/>
+          <p:cNvSpPr txBox="1"/>
+          <p:nvPr/>
+        </p:nvSpPr>
+        <p:spPr>
+          <a:xfrm>
+            <a:off x="4343400" y="1508760"/>
+            <a:ext cx="384048" cy="384048"/>
+          </a:xfrm>
+          <a:prstGeom prst="rect">
+            <a:avLst/>
+          </a:prstGeom>
+          <a:noFill/>
+          <a:ln/>
+        </p:spPr>
+        <p:txBody>
+          <a:bodyPr wrap="square" lIns="0" tIns="0" rIns="0" bIns="0" rtlCol="0" anchor="ctr"/>
+          <a:lstStyle/>
+          <a:p>
+            <a:pPr marL="0" indent="0" algn="ctr">
+              <a:buNone/>
+            </a:pPr>
+            <a:r>
+              <a:rPr lang="en-US" sz="1400" dirty="0">
+                <a:solidFill>
+                  <a:schemeClr val="tx1"/>
+                </a:solidFill>
+                <a:latin typeface="Arial Black" pitchFamily="34" charset="0"/>
+                <a:ea typeface="Arial Black" pitchFamily="34" charset="-122"/>
+                <a:cs typeface="Arial Black" pitchFamily="34" charset="-120"/>
+              </a:rPr>
+              <a:t>2</a:t>
+            </a:r>
+            <a:endParaRPr lang="en-US" sz="1400" dirty="0"/>
+          </a:p>
+        </p:txBody>
+      </p:sp>
+      <p:sp>
+        <p:nvSpPr>
+          <p:cNvPr id="11" name="texto-157"/>
+          <p:cNvSpPr txBox="1"/>
+          <p:nvPr/>
+        </p:nvSpPr>
+        <p:spPr>
+          <a:xfrm>
+            <a:off x="4892040" y="1508760"/>
+            <a:ext cx="2971800" cy="384048"/>
+          </a:xfrm>
+          <a:prstGeom prst="rect">
+            <a:avLst/>
+          </a:prstGeom>
+          <a:noFill/>
+          <a:ln/>
+        </p:spPr>
+        <p:txBody>
+          <a:bodyPr wrap="square" lIns="0" tIns="0" rIns="0" bIns="0" rtlCol="0" anchor="ctr"/>
+          <a:lstStyle/>
+          <a:p>
+            <a:pPr marL="0" indent="0">
+              <a:buNone/>
+            </a:pPr>
+            <a:r>
+              <a:rPr lang="en-US" sz="1800" b="1" dirty="0">
+                <a:solidFill>
+                  <a:schemeClr val="tx1"/>
+                </a:solidFill>
+              </a:rPr>
+              <a:t>Recibe el análisis</a:t>
+            </a:r>
+            <a:endParaRPr lang="en-US" sz="1800" dirty="0"/>
+          </a:p>
+        </p:txBody>
+      </p:sp>
+      <p:sp>
+        <p:nvSpPr>
+          <p:cNvPr id="12" name="texto-158"/>
+          <p:cNvSpPr txBox="1"/>
+          <p:nvPr/>
+        </p:nvSpPr>
+        <p:spPr>
+          <a:xfrm>
+            <a:off x="4343400" y="2011680"/>
+            <a:ext cx="3520440" cy="640080"/>
+          </a:xfrm>
+          <a:prstGeom prst="rect">
+            <a:avLst/>
+          </a:prstGeom>
+          <a:noFill/>
+          <a:ln/>
+        </p:spPr>
+        <p:txBody>
+          <a:bodyPr wrap="square" lIns="0" tIns="0" rIns="0" bIns="0" rtlCol="0" anchor="t"/>
+          <a:lstStyle/>
+          <a:p>
+            <a:pPr marL="0" indent="0">
+              <a:buNone/>
+            </a:pPr>
+            <a:r>
+              <a:rPr lang="en-US" sz="1400" dirty="0">
+                <a:solidFill>
+                  <a:schemeClr val="tx1"/>
+                </a:solidFill>
+              </a:rPr>
+              <a:t>Precio esperado S/ 3,656, rango y tres precios de publicación.</a:t>
+            </a:r>
+            <a:endParaRPr lang="en-US" sz="1400" dirty="0"/>
+          </a:p>
+        </p:txBody>
+      </p:sp>
+      <p:pic>
+        <p:nvPicPr>
+          <p:cNvPr id="13" name="captura-p2_analisis" descr="Resumen del análisis: precio esperado, rango y precios de publicación"/>
+          <p:cNvPicPr>
+            <a:picLocks noChangeAspect="1"/>
+          </p:cNvPicPr>
+          <p:nvPr/>
+        </p:nvPicPr>
+        <p:blipFill>
+          <a:blip r:embed="rId4"/>
+          <a:stretch>
+            <a:fillRect/>
+          </a:stretch>
+        </p:blipFill>
+        <p:spPr>
+          <a:xfrm>
+            <a:off x="4343400" y="2743200"/>
+            <a:ext cx="3520440" cy="2640330"/>
+          </a:xfrm>
+          <a:prstGeom prst="rect">
+            <a:avLst/>
+          </a:prstGeom>
+        </p:spPr>
+      </p:pic>
+      <p:sp>
+        <p:nvSpPr>
+          <p:cNvPr id="14" name="borde-159"/>
+          <p:cNvSpPr/>
+          <p:nvPr/>
+        </p:nvSpPr>
+        <p:spPr>
+          <a:xfrm>
+            <a:off x="4343400" y="2743200"/>
+            <a:ext cx="3520440" cy="2640330"/>
+          </a:xfrm>
+          <a:prstGeom prst="rect">
+            <a:avLst/>
+          </a:prstGeom>
+          <a:ln w="9525">
+            <a:solidFill>
+              <a:schemeClr val="accent6"/>
+            </a:solidFill>
+            <a:prstDash val="solid"/>
+          </a:ln>
+        </p:spPr>
+        <p:txBody>
+          <a:bodyPr/>
+          <a:lstStyle/>
+          <a:p>
+            <a:endParaRPr lang="es-PE"/>
+          </a:p>
+        </p:txBody>
+      </p:sp>
+      <p:sp>
+        <p:nvSpPr>
+          <p:cNvPr id="15" name="caja-160"/>
+          <p:cNvSpPr/>
+          <p:nvPr/>
+        </p:nvSpPr>
+        <p:spPr>
+          <a:xfrm>
+            <a:off x="8138160" y="1508760"/>
+            <a:ext cx="384048" cy="384048"/>
+          </a:xfrm>
+          <a:prstGeom prst="rect">
+            <a:avLst/>
+          </a:prstGeom>
+          <a:solidFill>
+            <a:schemeClr val="accent1"/>
+          </a:solidFill>
+          <a:ln/>
+        </p:spPr>
+        <p:txBody>
+          <a:bodyPr/>
+          <a:lstStyle/>
+          <a:p>
+            <a:endParaRPr lang="es-PE"/>
+          </a:p>
+        </p:txBody>
+      </p:sp>
+      <p:sp>
+        <p:nvSpPr>
+          <p:cNvPr id="16" name="texto-161"/>
+          <p:cNvSpPr txBox="1"/>
+          <p:nvPr/>
+        </p:nvSpPr>
+        <p:spPr>
+          <a:xfrm>
+            <a:off x="8138160" y="1508760"/>
+            <a:ext cx="384048" cy="384048"/>
+          </a:xfrm>
+          <a:prstGeom prst="rect">
+            <a:avLst/>
+          </a:prstGeom>
+          <a:noFill/>
+          <a:ln/>
+        </p:spPr>
+        <p:txBody>
+          <a:bodyPr wrap="square" lIns="0" tIns="0" rIns="0" bIns="0" rtlCol="0" anchor="ctr"/>
+          <a:lstStyle/>
+          <a:p>
+            <a:pPr marL="0" indent="0" algn="ctr">
+              <a:buNone/>
+            </a:pPr>
+            <a:r>
+              <a:rPr lang="en-US" sz="1400" dirty="0">
+                <a:solidFill>
+                  <a:schemeClr val="tx1"/>
+                </a:solidFill>
+                <a:latin typeface="Arial Black" pitchFamily="34" charset="0"/>
+                <a:ea typeface="Arial Black" pitchFamily="34" charset="-122"/>
+                <a:cs typeface="Arial Black" pitchFamily="34" charset="-120"/>
+              </a:rPr>
+              <a:t>3</a:t>
+            </a:r>
+            <a:endParaRPr lang="en-US" sz="1400" dirty="0"/>
+          </a:p>
+        </p:txBody>
+      </p:sp>
+      <p:sp>
+        <p:nvSpPr>
+          <p:cNvPr id="17" name="texto-162"/>
+          <p:cNvSpPr txBox="1"/>
+          <p:nvPr/>
+        </p:nvSpPr>
+        <p:spPr>
+          <a:xfrm>
+            <a:off x="8686800" y="1508760"/>
+            <a:ext cx="2971800" cy="384048"/>
+          </a:xfrm>
+          <a:prstGeom prst="rect">
+            <a:avLst/>
+          </a:prstGeom>
+          <a:noFill/>
+          <a:ln/>
+        </p:spPr>
+        <p:txBody>
+          <a:bodyPr wrap="square" lIns="0" tIns="0" rIns="0" bIns="0" rtlCol="0" anchor="ctr"/>
+          <a:lstStyle/>
+          <a:p>
+            <a:pPr marL="0" indent="0">
+              <a:buNone/>
+            </a:pPr>
+            <a:r>
+              <a:rPr lang="en-US" sz="1800" b="1" dirty="0">
+                <a:solidFill>
+                  <a:schemeClr val="tx1"/>
+                </a:solidFill>
+              </a:rPr>
+              <a:t>Lo publica</a:t>
+            </a:r>
+            <a:endParaRPr lang="en-US" sz="1800" dirty="0"/>
+          </a:p>
+        </p:txBody>
+      </p:sp>
+      <p:sp>
+        <p:nvSpPr>
+          <p:cNvPr id="18" name="texto-163"/>
+          <p:cNvSpPr txBox="1"/>
+          <p:nvPr/>
+        </p:nvSpPr>
+        <p:spPr>
+          <a:xfrm>
+            <a:off x="8138160" y="2011680"/>
+            <a:ext cx="3520440" cy="640080"/>
+          </a:xfrm>
+          <a:prstGeom prst="rect">
+            <a:avLst/>
+          </a:prstGeom>
+          <a:noFill/>
+          <a:ln/>
+        </p:spPr>
+        <p:txBody>
+          <a:bodyPr wrap="square" lIns="0" tIns="0" rIns="0" bIns="0" rtlCol="0" anchor="t"/>
+          <a:lstStyle/>
+          <a:p>
+            <a:pPr marL="0" indent="0">
+              <a:buNone/>
+            </a:pPr>
+            <a:r>
+              <a:rPr lang="en-US" sz="1400" dirty="0">
+                <a:solidFill>
+                  <a:schemeClr val="tx1"/>
+                </a:solidFill>
+              </a:rPr>
+              <a:t>Elige renta superior, S/ 3,840; ya aparece en la búsqueda.</a:t>
+            </a:r>
+            <a:endParaRPr lang="en-US" sz="1400" dirty="0"/>
+          </a:p>
+        </p:txBody>
+      </p:sp>
+      <p:pic>
+        <p:nvPicPr>
+          <p:cNvPr id="19" name="captura-p3_publicado" descr="Ficha pública del departamento publicado"/>
+          <p:cNvPicPr>
+            <a:picLocks noChangeAspect="1"/>
+          </p:cNvPicPr>
+          <p:nvPr/>
+        </p:nvPicPr>
+        <p:blipFill>
+          <a:blip r:embed="rId5"/>
+          <a:stretch>
+            <a:fillRect/>
+          </a:stretch>
+        </p:blipFill>
+        <p:spPr>
+          <a:xfrm>
+            <a:off x="8138160" y="2743200"/>
+            <a:ext cx="3520440" cy="2640330"/>
+          </a:xfrm>
+          <a:prstGeom prst="rect">
+            <a:avLst/>
+          </a:prstGeom>
+        </p:spPr>
+      </p:pic>
+      <p:sp>
+        <p:nvSpPr>
+          <p:cNvPr id="20" name="borde-164"/>
+          <p:cNvSpPr/>
+          <p:nvPr/>
+        </p:nvSpPr>
+        <p:spPr>
+          <a:xfrm>
+            <a:off x="8138160" y="2743200"/>
+            <a:ext cx="3520440" cy="2640330"/>
+          </a:xfrm>
+          <a:prstGeom prst="rect">
+            <a:avLst/>
+          </a:prstGeom>
+          <a:ln w="9525">
+            <a:solidFill>
+              <a:schemeClr val="accent6"/>
+            </a:solidFill>
+            <a:prstDash val="solid"/>
+          </a:ln>
+        </p:spPr>
+        <p:txBody>
+          <a:bodyPr/>
+          <a:lstStyle/>
+          <a:p>
+            <a:endParaRPr lang="es-PE"/>
+          </a:p>
+        </p:txBody>
       </p:sp>
       <p:sp>
         <p:nvSpPr>
@@ -10908,7 +11644,7 @@
           <a:bodyPr wrap="square" lIns="0" tIns="0" rIns="0" bIns="0" rtlCol="0" anchor="ctr"/>
           <a:lstStyle/>
           <a:p>
-            <a:pPr indent="0" marL="0">
+            <a:pPr marL="0" indent="0">
               <a:buNone/>
             </a:pPr>
             <a:r>
@@ -10943,7 +11679,7 @@
           </a:prstGeom>
           <a:extLst>
             <a:ext uri="{C572A759-6A51-4108-AA02-DFA0A04FC94B}">
-              <ma14:wrappingTextBoxFlag xmlns:ma14="http://schemas.microsoft.com/office/mac/drawingml/2011/main" val="0"/>
+              <ma14:wrappingTextBoxFlag xmlns:ma14="http://schemas.microsoft.com/office/mac/drawingml/2011/main" xmlns="" val="0"/>
             </a:ext>
           </a:extLst>
         </p:spPr>
@@ -10961,7 +11697,7 @@
           <a:p>
             <a:pPr algn="r"/>
             <a:fld id="{F7021451-1387-4CA6-816F-3879F97B5CBC}" type="slidenum">
-              <a:rPr b="0" lang="en-US"/>
+              <a:rPr lang="en-US" b="0"/>
               <a:t>7</a:t>
             </a:fld>
             <a:endParaRPr lang="en-US"/>
@@ -10996,9 +11732,11 @@
       <p:sp>
         <p:nvSpPr>
           <p:cNvPr id="2" name="Text 0"/>
-          <p:cNvSpPr/>
+          <p:cNvSpPr>
+            <a:spLocks noGrp="1"/>
+          </p:cNvSpPr>
           <p:nvPr>
-            <p:ph idx="100" type="title" hasCustomPrompt="1"/>
+            <p:ph type="title" idx="100" hasCustomPrompt="1"/>
           </p:nvPr>
         </p:nvSpPr>
         <p:spPr>
@@ -11016,7 +11754,7 @@
           <a:bodyPr wrap="square" lIns="0" tIns="0" rIns="0" bIns="0" rtlCol="0" anchor="ctr"/>
           <a:lstStyle/>
           <a:p>
-            <a:pPr algn="l" indent="0" marL="0">
+            <a:pPr marL="0" indent="0" algn="l">
               <a:buNone/>
             </a:pPr>
             <a:r>
@@ -11050,6 +11788,13 @@
           </a:solidFill>
           <a:ln/>
         </p:spPr>
+        <p:txBody>
+          <a:bodyPr/>
+          <a:lstStyle/>
+          <a:p>
+            <a:endParaRPr lang="es-PE"/>
+          </a:p>
+        </p:txBody>
       </p:sp>
       <p:sp>
         <p:nvSpPr>
@@ -11072,7 +11817,7 @@
           <a:bodyPr wrap="square" lIns="0" tIns="0" rIns="0" bIns="0" rtlCol="0" anchor="ctr"/>
           <a:lstStyle/>
           <a:p>
-            <a:pPr algn="ctr" indent="0" marL="0">
+            <a:pPr marL="0" indent="0" algn="ctr">
               <a:buNone/>
             </a:pPr>
             <a:r>
@@ -11111,7 +11856,7 @@
           <a:bodyPr wrap="square" lIns="0" tIns="0" rIns="0" bIns="0" rtlCol="0" anchor="ctr"/>
           <a:lstStyle/>
           <a:p>
-            <a:pPr indent="0" marL="0">
+            <a:pPr marL="0" indent="0">
               <a:buNone/>
             </a:pPr>
             <a:r>
@@ -11147,7 +11892,7 @@
           <a:bodyPr wrap="square" lIns="0" tIns="0" rIns="0" bIns="0" rtlCol="0" anchor="t"/>
           <a:lstStyle/>
           <a:p>
-            <a:pPr indent="0" marL="0">
+            <a:pPr marL="0" indent="0">
               <a:buNone/>
             </a:pPr>
             <a:r>
@@ -11164,361 +11909,7 @@
       </p:sp>
       <p:pic>
         <p:nvPicPr>
-          <p:cNvPr id="7" name="captura-i1_buscar" descr="Búsqueda con los conteos por valoración del precio">    </p:cNvPr>
-          <p:cNvPicPr>
-            <a:picLocks noChangeAspect="1"/>
-          </p:cNvPicPr>
-          <p:nvPr/>
-        </p:nvPicPr>
-        <p:blipFill>
-          <a:blip r:embed="rId1"/>
-          <a:stretch>
-            <a:fillRect/>
-          </a:stretch>
-        </p:blipFill>
-        <p:spPr>
-          <a:xfrm>
-            <a:off x="548640" y="2743200"/>
-            <a:ext cx="3520440" cy="2640330"/>
-          </a:xfrm>
-          <a:prstGeom prst="rect">
-            <a:avLst/>
-          </a:prstGeom>
-        </p:spPr>
-      </p:pic>
-      <p:sp>
-        <p:nvSpPr>
-          <p:cNvPr id="8" name="borde-170"/>
-          <p:cNvSpPr/>
-          <p:nvPr/>
-        </p:nvSpPr>
-        <p:spPr>
-          <a:xfrm>
-            <a:off x="548640" y="2743200"/>
-            <a:ext cx="3520440" cy="2640330"/>
-          </a:xfrm>
-          <a:prstGeom prst="rect">
-            <a:avLst/>
-          </a:prstGeom>
-          <a:ln w="9525">
-            <a:solidFill>
-              <a:schemeClr val="accent6"/>
-            </a:solidFill>
-            <a:prstDash val="solid"/>
-          </a:ln>
-        </p:spPr>
-      </p:sp>
-      <p:sp>
-        <p:nvSpPr>
-          <p:cNvPr id="9" name="caja-171"/>
-          <p:cNvSpPr/>
-          <p:nvPr/>
-        </p:nvSpPr>
-        <p:spPr>
-          <a:xfrm>
-            <a:off x="4343400" y="1508760"/>
-            <a:ext cx="384048" cy="384048"/>
-          </a:xfrm>
-          <a:prstGeom prst="rect">
-            <a:avLst/>
-          </a:prstGeom>
-          <a:solidFill>
-            <a:schemeClr val="accent1"/>
-          </a:solidFill>
-          <a:ln/>
-        </p:spPr>
-      </p:sp>
-      <p:sp>
-        <p:nvSpPr>
-          <p:cNvPr id="10" name="texto-172"/>
-          <p:cNvSpPr txBox="1"/>
-          <p:nvPr/>
-        </p:nvSpPr>
-        <p:spPr>
-          <a:xfrm>
-            <a:off x="4343400" y="1508760"/>
-            <a:ext cx="384048" cy="384048"/>
-          </a:xfrm>
-          <a:prstGeom prst="rect">
-            <a:avLst/>
-          </a:prstGeom>
-          <a:noFill/>
-          <a:ln/>
-        </p:spPr>
-        <p:txBody>
-          <a:bodyPr wrap="square" lIns="0" tIns="0" rIns="0" bIns="0" rtlCol="0" anchor="ctr"/>
-          <a:lstStyle/>
-          <a:p>
-            <a:pPr algn="ctr" indent="0" marL="0">
-              <a:buNone/>
-            </a:pPr>
-            <a:r>
-              <a:rPr lang="en-US" sz="1400" dirty="0">
-                <a:solidFill>
-                  <a:schemeClr val="tx1"/>
-                </a:solidFill>
-                <a:latin typeface="Arial Black" pitchFamily="34" charset="0"/>
-                <a:ea typeface="Arial Black" pitchFamily="34" charset="-122"/>
-                <a:cs typeface="Arial Black" pitchFamily="34" charset="-120"/>
-              </a:rPr>
-              <a:t>2</a:t>
-            </a:r>
-            <a:endParaRPr lang="en-US" sz="1400" dirty="0"/>
-          </a:p>
-        </p:txBody>
-      </p:sp>
-      <p:sp>
-        <p:nvSpPr>
-          <p:cNvPr id="11" name="texto-173"/>
-          <p:cNvSpPr txBox="1"/>
-          <p:nvPr/>
-        </p:nvSpPr>
-        <p:spPr>
-          <a:xfrm>
-            <a:off x="4892040" y="1508760"/>
-            <a:ext cx="2971800" cy="384048"/>
-          </a:xfrm>
-          <a:prstGeom prst="rect">
-            <a:avLst/>
-          </a:prstGeom>
-          <a:noFill/>
-          <a:ln/>
-        </p:spPr>
-        <p:txBody>
-          <a:bodyPr wrap="square" lIns="0" tIns="0" rIns="0" bIns="0" rtlCol="0" anchor="ctr"/>
-          <a:lstStyle/>
-          <a:p>
-            <a:pPr indent="0" marL="0">
-              <a:buNone/>
-            </a:pPr>
-            <a:r>
-              <a:rPr lang="en-US" sz="1800" b="1" dirty="0">
-                <a:solidFill>
-                  <a:schemeClr val="tx1"/>
-                </a:solidFill>
-              </a:rPr>
-              <a:t>Abre la ficha</a:t>
-            </a:r>
-            <a:endParaRPr lang="en-US" sz="1800" dirty="0"/>
-          </a:p>
-        </p:txBody>
-      </p:sp>
-      <p:sp>
-        <p:nvSpPr>
-          <p:cNvPr id="12" name="texto-174"/>
-          <p:cNvSpPr txBox="1"/>
-          <p:nvPr/>
-        </p:nvSpPr>
-        <p:spPr>
-          <a:xfrm>
-            <a:off x="4343400" y="2011680"/>
-            <a:ext cx="3520440" cy="640080"/>
-          </a:xfrm>
-          <a:prstGeom prst="rect">
-            <a:avLst/>
-          </a:prstGeom>
-          <a:noFill/>
-          <a:ln/>
-        </p:spPr>
-        <p:txBody>
-          <a:bodyPr wrap="square" lIns="0" tIns="0" rIns="0" bIns="0" rtlCol="0" anchor="t"/>
-          <a:lstStyle/>
-          <a:p>
-            <a:pPr indent="0" marL="0">
-              <a:buNone/>
-            </a:pPr>
-            <a:r>
-              <a:rPr lang="en-US" sz="1400" dirty="0">
-                <a:solidFill>
-                  <a:schemeClr val="tx1"/>
-                </a:solidFill>
-              </a:rPr>
-              <a:t>Pide S/ 1,200 y el modelo estima S/ 1,586: 24.3 % por debajo.</a:t>
-            </a:r>
-            <a:endParaRPr lang="en-US" sz="1400" dirty="0"/>
-          </a:p>
-        </p:txBody>
-      </p:sp>
-      <p:pic>
-        <p:nvPicPr>
-          <p:cNvPr id="13" name="captura-i2_ficha" descr="Ficha de un anuncio de Lince frente al precio estimado">    </p:cNvPr>
-          <p:cNvPicPr>
-            <a:picLocks noChangeAspect="1"/>
-          </p:cNvPicPr>
-          <p:nvPr/>
-        </p:nvPicPr>
-        <p:blipFill>
-          <a:blip r:embed="rId2"/>
-          <a:stretch>
-            <a:fillRect/>
-          </a:stretch>
-        </p:blipFill>
-        <p:spPr>
-          <a:xfrm>
-            <a:off x="4343400" y="2743200"/>
-            <a:ext cx="3520440" cy="2640330"/>
-          </a:xfrm>
-          <a:prstGeom prst="rect">
-            <a:avLst/>
-          </a:prstGeom>
-        </p:spPr>
-      </p:pic>
-      <p:sp>
-        <p:nvSpPr>
-          <p:cNvPr id="14" name="borde-175"/>
-          <p:cNvSpPr/>
-          <p:nvPr/>
-        </p:nvSpPr>
-        <p:spPr>
-          <a:xfrm>
-            <a:off x="4343400" y="2743200"/>
-            <a:ext cx="3520440" cy="2640330"/>
-          </a:xfrm>
-          <a:prstGeom prst="rect">
-            <a:avLst/>
-          </a:prstGeom>
-          <a:ln w="9525">
-            <a:solidFill>
-              <a:schemeClr val="accent6"/>
-            </a:solidFill>
-            <a:prstDash val="solid"/>
-          </a:ln>
-        </p:spPr>
-      </p:sp>
-      <p:sp>
-        <p:nvSpPr>
-          <p:cNvPr id="15" name="caja-176"/>
-          <p:cNvSpPr/>
-          <p:nvPr/>
-        </p:nvSpPr>
-        <p:spPr>
-          <a:xfrm>
-            <a:off x="8138160" y="1508760"/>
-            <a:ext cx="384048" cy="384048"/>
-          </a:xfrm>
-          <a:prstGeom prst="rect">
-            <a:avLst/>
-          </a:prstGeom>
-          <a:solidFill>
-            <a:schemeClr val="accent1"/>
-          </a:solidFill>
-          <a:ln/>
-        </p:spPr>
-      </p:sp>
-      <p:sp>
-        <p:nvSpPr>
-          <p:cNvPr id="16" name="texto-177"/>
-          <p:cNvSpPr txBox="1"/>
-          <p:nvPr/>
-        </p:nvSpPr>
-        <p:spPr>
-          <a:xfrm>
-            <a:off x="8138160" y="1508760"/>
-            <a:ext cx="384048" cy="384048"/>
-          </a:xfrm>
-          <a:prstGeom prst="rect">
-            <a:avLst/>
-          </a:prstGeom>
-          <a:noFill/>
-          <a:ln/>
-        </p:spPr>
-        <p:txBody>
-          <a:bodyPr wrap="square" lIns="0" tIns="0" rIns="0" bIns="0" rtlCol="0" anchor="ctr"/>
-          <a:lstStyle/>
-          <a:p>
-            <a:pPr algn="ctr" indent="0" marL="0">
-              <a:buNone/>
-            </a:pPr>
-            <a:r>
-              <a:rPr lang="en-US" sz="1400" dirty="0">
-                <a:solidFill>
-                  <a:schemeClr val="tx1"/>
-                </a:solidFill>
-                <a:latin typeface="Arial Black" pitchFamily="34" charset="0"/>
-                <a:ea typeface="Arial Black" pitchFamily="34" charset="-122"/>
-                <a:cs typeface="Arial Black" pitchFamily="34" charset="-120"/>
-              </a:rPr>
-              <a:t>3</a:t>
-            </a:r>
-            <a:endParaRPr lang="en-US" sz="1400" dirty="0"/>
-          </a:p>
-        </p:txBody>
-      </p:sp>
-      <p:sp>
-        <p:nvSpPr>
-          <p:cNvPr id="17" name="texto-178"/>
-          <p:cNvSpPr txBox="1"/>
-          <p:nvPr/>
-        </p:nvSpPr>
-        <p:spPr>
-          <a:xfrm>
-            <a:off x="8686800" y="1508760"/>
-            <a:ext cx="2971800" cy="384048"/>
-          </a:xfrm>
-          <a:prstGeom prst="rect">
-            <a:avLst/>
-          </a:prstGeom>
-          <a:noFill/>
-          <a:ln/>
-        </p:spPr>
-        <p:txBody>
-          <a:bodyPr wrap="square" lIns="0" tIns="0" rIns="0" bIns="0" rtlCol="0" anchor="ctr"/>
-          <a:lstStyle/>
-          <a:p>
-            <a:pPr indent="0" marL="0">
-              <a:buNone/>
-            </a:pPr>
-            <a:r>
-              <a:rPr lang="en-US" sz="1800" b="1" dirty="0">
-                <a:solidFill>
-                  <a:schemeClr val="tx1"/>
-                </a:solidFill>
-              </a:rPr>
-              <a:t>Escribe al propietario</a:t>
-            </a:r>
-            <a:endParaRPr lang="en-US" sz="1800" dirty="0"/>
-          </a:p>
-        </p:txBody>
-      </p:sp>
-      <p:sp>
-        <p:nvSpPr>
-          <p:cNvPr id="18" name="texto-179"/>
-          <p:cNvSpPr txBox="1"/>
-          <p:nvPr/>
-        </p:nvSpPr>
-        <p:spPr>
-          <a:xfrm>
-            <a:off x="8138160" y="2011680"/>
-            <a:ext cx="3520440" cy="640080"/>
-          </a:xfrm>
-          <a:prstGeom prst="rect">
-            <a:avLst/>
-          </a:prstGeom>
-          <a:noFill/>
-          <a:ln/>
-        </p:spPr>
-        <p:txBody>
-          <a:bodyPr wrap="square" lIns="0" tIns="0" rIns="0" bIns="0" rtlCol="0" anchor="t"/>
-          <a:lstStyle/>
-          <a:p>
-            <a:pPr indent="0" marL="0">
-              <a:buNone/>
-            </a:pPr>
-            <a:r>
-              <a:rPr lang="en-US" sz="1400" dirty="0">
-                <a:solidFill>
-                  <a:schemeClr val="tx1"/>
-                </a:solidFill>
-              </a:rPr>
-              <a:t>El mensaje le llega a su pestaña Interesados.</a:t>
-            </a:r>
-            <a:endParaRPr lang="en-US" sz="1400" dirty="0"/>
-          </a:p>
-        </p:txBody>
-      </p:sp>
-      <p:pic>
-        <p:nvPicPr>
-          <p:cNvPr id="19" name="captura-i3_mensaje" descr="Formulario Me interesa de la ficha publicada">    </p:cNvPr>
+          <p:cNvPr id="7" name="captura-i1_buscar" descr="Búsqueda con los conteos por valoración del precio"/>
           <p:cNvPicPr>
             <a:picLocks noChangeAspect="1"/>
           </p:cNvPicPr>
@@ -11532,7 +11923,7 @@
         </p:blipFill>
         <p:spPr>
           <a:xfrm>
-            <a:off x="8138160" y="2743200"/>
+            <a:off x="548640" y="2743200"/>
             <a:ext cx="3520440" cy="2640330"/>
           </a:xfrm>
           <a:prstGeom prst="rect">
@@ -11542,13 +11933,13 @@
       </p:pic>
       <p:sp>
         <p:nvSpPr>
-          <p:cNvPr id="20" name="borde-180"/>
+          <p:cNvPr id="8" name="borde-170"/>
           <p:cNvSpPr/>
           <p:nvPr/>
         </p:nvSpPr>
         <p:spPr>
           <a:xfrm>
-            <a:off x="8138160" y="2743200"/>
+            <a:off x="548640" y="2743200"/>
             <a:ext cx="3520440" cy="2640330"/>
           </a:xfrm>
           <a:prstGeom prst="rect">
@@ -11561,6 +11952,395 @@
             <a:prstDash val="solid"/>
           </a:ln>
         </p:spPr>
+        <p:txBody>
+          <a:bodyPr/>
+          <a:lstStyle/>
+          <a:p>
+            <a:endParaRPr lang="es-PE"/>
+          </a:p>
+        </p:txBody>
+      </p:sp>
+      <p:sp>
+        <p:nvSpPr>
+          <p:cNvPr id="9" name="caja-171"/>
+          <p:cNvSpPr/>
+          <p:nvPr/>
+        </p:nvSpPr>
+        <p:spPr>
+          <a:xfrm>
+            <a:off x="4343400" y="1508760"/>
+            <a:ext cx="384048" cy="384048"/>
+          </a:xfrm>
+          <a:prstGeom prst="rect">
+            <a:avLst/>
+          </a:prstGeom>
+          <a:solidFill>
+            <a:schemeClr val="accent1"/>
+          </a:solidFill>
+          <a:ln/>
+        </p:spPr>
+        <p:txBody>
+          <a:bodyPr/>
+          <a:lstStyle/>
+          <a:p>
+            <a:endParaRPr lang="es-PE"/>
+          </a:p>
+        </p:txBody>
+      </p:sp>
+      <p:sp>
+        <p:nvSpPr>
+          <p:cNvPr id="10" name="texto-172"/>
+          <p:cNvSpPr txBox="1"/>
+          <p:nvPr/>
+        </p:nvSpPr>
+        <p:spPr>
+          <a:xfrm>
+            <a:off x="4343400" y="1508760"/>
+            <a:ext cx="384048" cy="384048"/>
+          </a:xfrm>
+          <a:prstGeom prst="rect">
+            <a:avLst/>
+          </a:prstGeom>
+          <a:noFill/>
+          <a:ln/>
+        </p:spPr>
+        <p:txBody>
+          <a:bodyPr wrap="square" lIns="0" tIns="0" rIns="0" bIns="0" rtlCol="0" anchor="ctr"/>
+          <a:lstStyle/>
+          <a:p>
+            <a:pPr marL="0" indent="0" algn="ctr">
+              <a:buNone/>
+            </a:pPr>
+            <a:r>
+              <a:rPr lang="en-US" sz="1400" dirty="0">
+                <a:solidFill>
+                  <a:schemeClr val="tx1"/>
+                </a:solidFill>
+                <a:latin typeface="Arial Black" pitchFamily="34" charset="0"/>
+                <a:ea typeface="Arial Black" pitchFamily="34" charset="-122"/>
+                <a:cs typeface="Arial Black" pitchFamily="34" charset="-120"/>
+              </a:rPr>
+              <a:t>2</a:t>
+            </a:r>
+            <a:endParaRPr lang="en-US" sz="1400" dirty="0"/>
+          </a:p>
+        </p:txBody>
+      </p:sp>
+      <p:sp>
+        <p:nvSpPr>
+          <p:cNvPr id="11" name="texto-173"/>
+          <p:cNvSpPr txBox="1"/>
+          <p:nvPr/>
+        </p:nvSpPr>
+        <p:spPr>
+          <a:xfrm>
+            <a:off x="4892040" y="1508760"/>
+            <a:ext cx="2971800" cy="384048"/>
+          </a:xfrm>
+          <a:prstGeom prst="rect">
+            <a:avLst/>
+          </a:prstGeom>
+          <a:noFill/>
+          <a:ln/>
+        </p:spPr>
+        <p:txBody>
+          <a:bodyPr wrap="square" lIns="0" tIns="0" rIns="0" bIns="0" rtlCol="0" anchor="ctr"/>
+          <a:lstStyle/>
+          <a:p>
+            <a:pPr marL="0" indent="0">
+              <a:buNone/>
+            </a:pPr>
+            <a:r>
+              <a:rPr lang="en-US" sz="1800" b="1" dirty="0">
+                <a:solidFill>
+                  <a:schemeClr val="tx1"/>
+                </a:solidFill>
+              </a:rPr>
+              <a:t>Abre la ficha</a:t>
+            </a:r>
+            <a:endParaRPr lang="en-US" sz="1800" dirty="0"/>
+          </a:p>
+        </p:txBody>
+      </p:sp>
+      <p:sp>
+        <p:nvSpPr>
+          <p:cNvPr id="12" name="texto-174"/>
+          <p:cNvSpPr txBox="1"/>
+          <p:nvPr/>
+        </p:nvSpPr>
+        <p:spPr>
+          <a:xfrm>
+            <a:off x="4343400" y="2011680"/>
+            <a:ext cx="3520440" cy="640080"/>
+          </a:xfrm>
+          <a:prstGeom prst="rect">
+            <a:avLst/>
+          </a:prstGeom>
+          <a:noFill/>
+          <a:ln/>
+        </p:spPr>
+        <p:txBody>
+          <a:bodyPr wrap="square" lIns="0" tIns="0" rIns="0" bIns="0" rtlCol="0" anchor="t"/>
+          <a:lstStyle/>
+          <a:p>
+            <a:pPr marL="0" indent="0">
+              <a:buNone/>
+            </a:pPr>
+            <a:r>
+              <a:rPr lang="en-US" sz="1400" dirty="0">
+                <a:solidFill>
+                  <a:schemeClr val="tx1"/>
+                </a:solidFill>
+              </a:rPr>
+              <a:t>Pide S/ 1,200 y el modelo estima S/ 1,586: 24.3 % por debajo.</a:t>
+            </a:r>
+            <a:endParaRPr lang="en-US" sz="1400" dirty="0"/>
+          </a:p>
+        </p:txBody>
+      </p:sp>
+      <p:pic>
+        <p:nvPicPr>
+          <p:cNvPr id="13" name="captura-i2_ficha" descr="Ficha de un anuncio de Lince frente al precio estimado"/>
+          <p:cNvPicPr>
+            <a:picLocks noChangeAspect="1"/>
+          </p:cNvPicPr>
+          <p:nvPr/>
+        </p:nvPicPr>
+        <p:blipFill>
+          <a:blip r:embed="rId4"/>
+          <a:stretch>
+            <a:fillRect/>
+          </a:stretch>
+        </p:blipFill>
+        <p:spPr>
+          <a:xfrm>
+            <a:off x="4343400" y="2743200"/>
+            <a:ext cx="3520440" cy="2640330"/>
+          </a:xfrm>
+          <a:prstGeom prst="rect">
+            <a:avLst/>
+          </a:prstGeom>
+        </p:spPr>
+      </p:pic>
+      <p:sp>
+        <p:nvSpPr>
+          <p:cNvPr id="14" name="borde-175"/>
+          <p:cNvSpPr/>
+          <p:nvPr/>
+        </p:nvSpPr>
+        <p:spPr>
+          <a:xfrm>
+            <a:off x="4343400" y="2743200"/>
+            <a:ext cx="3520440" cy="2640330"/>
+          </a:xfrm>
+          <a:prstGeom prst="rect">
+            <a:avLst/>
+          </a:prstGeom>
+          <a:ln w="9525">
+            <a:solidFill>
+              <a:schemeClr val="accent6"/>
+            </a:solidFill>
+            <a:prstDash val="solid"/>
+          </a:ln>
+        </p:spPr>
+        <p:txBody>
+          <a:bodyPr/>
+          <a:lstStyle/>
+          <a:p>
+            <a:endParaRPr lang="es-PE"/>
+          </a:p>
+        </p:txBody>
+      </p:sp>
+      <p:sp>
+        <p:nvSpPr>
+          <p:cNvPr id="15" name="caja-176"/>
+          <p:cNvSpPr/>
+          <p:nvPr/>
+        </p:nvSpPr>
+        <p:spPr>
+          <a:xfrm>
+            <a:off x="8138160" y="1508760"/>
+            <a:ext cx="384048" cy="384048"/>
+          </a:xfrm>
+          <a:prstGeom prst="rect">
+            <a:avLst/>
+          </a:prstGeom>
+          <a:solidFill>
+            <a:schemeClr val="accent1"/>
+          </a:solidFill>
+          <a:ln/>
+        </p:spPr>
+        <p:txBody>
+          <a:bodyPr/>
+          <a:lstStyle/>
+          <a:p>
+            <a:endParaRPr lang="es-PE"/>
+          </a:p>
+        </p:txBody>
+      </p:sp>
+      <p:sp>
+        <p:nvSpPr>
+          <p:cNvPr id="16" name="texto-177"/>
+          <p:cNvSpPr txBox="1"/>
+          <p:nvPr/>
+        </p:nvSpPr>
+        <p:spPr>
+          <a:xfrm>
+            <a:off x="8138160" y="1508760"/>
+            <a:ext cx="384048" cy="384048"/>
+          </a:xfrm>
+          <a:prstGeom prst="rect">
+            <a:avLst/>
+          </a:prstGeom>
+          <a:noFill/>
+          <a:ln/>
+        </p:spPr>
+        <p:txBody>
+          <a:bodyPr wrap="square" lIns="0" tIns="0" rIns="0" bIns="0" rtlCol="0" anchor="ctr"/>
+          <a:lstStyle/>
+          <a:p>
+            <a:pPr marL="0" indent="0" algn="ctr">
+              <a:buNone/>
+            </a:pPr>
+            <a:r>
+              <a:rPr lang="en-US" sz="1400" dirty="0">
+                <a:solidFill>
+                  <a:schemeClr val="tx1"/>
+                </a:solidFill>
+                <a:latin typeface="Arial Black" pitchFamily="34" charset="0"/>
+                <a:ea typeface="Arial Black" pitchFamily="34" charset="-122"/>
+                <a:cs typeface="Arial Black" pitchFamily="34" charset="-120"/>
+              </a:rPr>
+              <a:t>3</a:t>
+            </a:r>
+            <a:endParaRPr lang="en-US" sz="1400" dirty="0"/>
+          </a:p>
+        </p:txBody>
+      </p:sp>
+      <p:sp>
+        <p:nvSpPr>
+          <p:cNvPr id="17" name="texto-178"/>
+          <p:cNvSpPr txBox="1"/>
+          <p:nvPr/>
+        </p:nvSpPr>
+        <p:spPr>
+          <a:xfrm>
+            <a:off x="8686800" y="1508760"/>
+            <a:ext cx="2971800" cy="384048"/>
+          </a:xfrm>
+          <a:prstGeom prst="rect">
+            <a:avLst/>
+          </a:prstGeom>
+          <a:noFill/>
+          <a:ln/>
+        </p:spPr>
+        <p:txBody>
+          <a:bodyPr wrap="square" lIns="0" tIns="0" rIns="0" bIns="0" rtlCol="0" anchor="ctr"/>
+          <a:lstStyle/>
+          <a:p>
+            <a:pPr marL="0" indent="0">
+              <a:buNone/>
+            </a:pPr>
+            <a:r>
+              <a:rPr lang="en-US" sz="1800" b="1" dirty="0">
+                <a:solidFill>
+                  <a:schemeClr val="tx1"/>
+                </a:solidFill>
+              </a:rPr>
+              <a:t>Escribe al propietario</a:t>
+            </a:r>
+            <a:endParaRPr lang="en-US" sz="1800" dirty="0"/>
+          </a:p>
+        </p:txBody>
+      </p:sp>
+      <p:sp>
+        <p:nvSpPr>
+          <p:cNvPr id="18" name="texto-179"/>
+          <p:cNvSpPr txBox="1"/>
+          <p:nvPr/>
+        </p:nvSpPr>
+        <p:spPr>
+          <a:xfrm>
+            <a:off x="8138160" y="2011680"/>
+            <a:ext cx="3520440" cy="640080"/>
+          </a:xfrm>
+          <a:prstGeom prst="rect">
+            <a:avLst/>
+          </a:prstGeom>
+          <a:noFill/>
+          <a:ln/>
+        </p:spPr>
+        <p:txBody>
+          <a:bodyPr wrap="square" lIns="0" tIns="0" rIns="0" bIns="0" rtlCol="0" anchor="t"/>
+          <a:lstStyle/>
+          <a:p>
+            <a:pPr marL="0" indent="0">
+              <a:buNone/>
+            </a:pPr>
+            <a:r>
+              <a:rPr lang="en-US" sz="1400" dirty="0">
+                <a:solidFill>
+                  <a:schemeClr val="tx1"/>
+                </a:solidFill>
+              </a:rPr>
+              <a:t>El mensaje le llega a su pestaña Interesados.</a:t>
+            </a:r>
+            <a:endParaRPr lang="en-US" sz="1400" dirty="0"/>
+          </a:p>
+        </p:txBody>
+      </p:sp>
+      <p:pic>
+        <p:nvPicPr>
+          <p:cNvPr id="19" name="captura-i3_mensaje" descr="Formulario Me interesa de la ficha publicada"/>
+          <p:cNvPicPr>
+            <a:picLocks noChangeAspect="1"/>
+          </p:cNvPicPr>
+          <p:nvPr/>
+        </p:nvPicPr>
+        <p:blipFill>
+          <a:blip r:embed="rId5"/>
+          <a:stretch>
+            <a:fillRect/>
+          </a:stretch>
+        </p:blipFill>
+        <p:spPr>
+          <a:xfrm>
+            <a:off x="8138160" y="2743200"/>
+            <a:ext cx="3520440" cy="2640330"/>
+          </a:xfrm>
+          <a:prstGeom prst="rect">
+            <a:avLst/>
+          </a:prstGeom>
+        </p:spPr>
+      </p:pic>
+      <p:sp>
+        <p:nvSpPr>
+          <p:cNvPr id="20" name="borde-180"/>
+          <p:cNvSpPr/>
+          <p:nvPr/>
+        </p:nvSpPr>
+        <p:spPr>
+          <a:xfrm>
+            <a:off x="8138160" y="2743200"/>
+            <a:ext cx="3520440" cy="2640330"/>
+          </a:xfrm>
+          <a:prstGeom prst="rect">
+            <a:avLst/>
+          </a:prstGeom>
+          <a:ln w="9525">
+            <a:solidFill>
+              <a:schemeClr val="accent6"/>
+            </a:solidFill>
+            <a:prstDash val="solid"/>
+          </a:ln>
+        </p:spPr>
+        <p:txBody>
+          <a:bodyPr/>
+          <a:lstStyle/>
+          <a:p>
+            <a:endParaRPr lang="es-PE"/>
+          </a:p>
+        </p:txBody>
       </p:sp>
       <p:sp>
         <p:nvSpPr>
@@ -11583,7 +12363,7 @@
           <a:bodyPr wrap="square" lIns="0" tIns="0" rIns="0" bIns="0" rtlCol="0" anchor="ctr"/>
           <a:lstStyle/>
           <a:p>
-            <a:pPr indent="0" marL="0">
+            <a:pPr marL="0" indent="0">
               <a:buNone/>
             </a:pPr>
             <a:r>
@@ -11618,7 +12398,7 @@
           </a:prstGeom>
           <a:extLst>
             <a:ext uri="{C572A759-6A51-4108-AA02-DFA0A04FC94B}">
-              <ma14:wrappingTextBoxFlag xmlns:ma14="http://schemas.microsoft.com/office/mac/drawingml/2011/main" val="0"/>
+              <ma14:wrappingTextBoxFlag xmlns:ma14="http://schemas.microsoft.com/office/mac/drawingml/2011/main" xmlns="" val="0"/>
             </a:ext>
           </a:extLst>
         </p:spPr>
@@ -11636,7 +12416,7 @@
           <a:p>
             <a:pPr algn="r"/>
             <a:fld id="{F7021451-1387-4CA6-816F-3879F97B5CBC}" type="slidenum">
-              <a:rPr b="0" lang="en-US"/>
+              <a:rPr lang="en-US" b="0"/>
               <a:t>8</a:t>
             </a:fld>
             <a:endParaRPr lang="en-US"/>
@@ -11671,9 +12451,11 @@
       <p:sp>
         <p:nvSpPr>
           <p:cNvPr id="2" name="Text 0"/>
-          <p:cNvSpPr/>
+          <p:cNvSpPr>
+            <a:spLocks noGrp="1"/>
+          </p:cNvSpPr>
           <p:nvPr>
-            <p:ph idx="100" type="title" hasCustomPrompt="1"/>
+            <p:ph type="title" idx="100" hasCustomPrompt="1"/>
           </p:nvPr>
         </p:nvSpPr>
         <p:spPr>
@@ -11691,7 +12473,7 @@
           <a:bodyPr wrap="square" lIns="0" tIns="0" rIns="0" bIns="0" rtlCol="0" anchor="ctr"/>
           <a:lstStyle/>
           <a:p>
-            <a:pPr algn="l" indent="0" marL="0">
+            <a:pPr marL="0" indent="0" algn="l">
               <a:buNone/>
             </a:pPr>
             <a:r>
@@ -11708,7 +12490,7 @@
       </p:sp>
       <p:graphicFrame>
         <p:nvGraphicFramePr>
-          <p:cNvPr id="3" name="grafico-mae" descr=""/>
+          <p:cNvPr id="3" name="grafico-mae"/>
           <p:cNvGraphicFramePr/>
           <p:nvPr/>
         </p:nvGraphicFramePr>
@@ -11716,9 +12498,9 @@
           <a:off x="548640" y="1417320"/>
           <a:ext cx="6949440" cy="4663440"/>
         </p:xfrm>
-        <a:graphic xmlns:a="http://schemas.openxmlformats.org/drawingml/2006/main">
+        <a:graphic>
           <a:graphicData uri="http://schemas.openxmlformats.org/drawingml/2006/chart">
-            <c:chart xmlns:c="http://schemas.openxmlformats.org/drawingml/2006/chart" r:id="rId1"/>
+            <c:chart xmlns:c="http://schemas.openxmlformats.org/drawingml/2006/chart" xmlns:r="http://schemas.openxmlformats.org/officeDocument/2006/relationships" r:id="rId3"/>
           </a:graphicData>
         </a:graphic>
       </p:graphicFrame>
@@ -11743,7 +12525,7 @@
           <a:bodyPr wrap="square" lIns="0" tIns="0" rIns="0" bIns="0" rtlCol="0" anchor="ctr"/>
           <a:lstStyle/>
           <a:p>
-            <a:pPr indent="0" marL="0">
+            <a:pPr marL="0" indent="0">
               <a:buNone/>
             </a:pPr>
             <a:r>
@@ -11782,7 +12564,7 @@
           <a:bodyPr wrap="square" lIns="0" tIns="0" rIns="0" bIns="0" rtlCol="0" anchor="t"/>
           <a:lstStyle/>
           <a:p>
-            <a:pPr indent="0" marL="0">
+            <a:pPr marL="0" indent="0">
               <a:buNone/>
             </a:pPr>
             <a:r>
@@ -11818,7 +12600,7 @@
           <a:bodyPr wrap="square" lIns="0" tIns="0" rIns="0" bIns="0" rtlCol="0" anchor="ctr"/>
           <a:lstStyle/>
           <a:p>
-            <a:pPr indent="0" marL="0">
+            <a:pPr marL="0" indent="0">
               <a:buNone/>
             </a:pPr>
             <a:r>
@@ -11857,7 +12639,7 @@
           <a:bodyPr wrap="square" lIns="0" tIns="0" rIns="0" bIns="0" rtlCol="0" anchor="t"/>
           <a:lstStyle/>
           <a:p>
-            <a:pPr indent="0" marL="0">
+            <a:pPr marL="0" indent="0">
               <a:buNone/>
             </a:pPr>
             <a:r>
@@ -11893,7 +12675,7 @@
           <a:bodyPr wrap="square" lIns="0" tIns="0" rIns="0" bIns="0" rtlCol="0" anchor="ctr"/>
           <a:lstStyle/>
           <a:p>
-            <a:pPr indent="0" marL="0">
+            <a:pPr marL="0" indent="0">
               <a:buNone/>
             </a:pPr>
             <a:r>
@@ -11932,7 +12714,7 @@
           <a:bodyPr wrap="square" lIns="0" tIns="0" rIns="0" bIns="0" rtlCol="0" anchor="t"/>
           <a:lstStyle/>
           <a:p>
-            <a:pPr indent="0" marL="0">
+            <a:pPr marL="0" indent="0">
               <a:buNone/>
             </a:pPr>
             <a:r>
@@ -11967,7 +12749,7 @@
           </a:prstGeom>
           <a:extLst>
             <a:ext uri="{C572A759-6A51-4108-AA02-DFA0A04FC94B}">
-              <ma14:wrappingTextBoxFlag xmlns:ma14="http://schemas.microsoft.com/office/mac/drawingml/2011/main" val="0"/>
+              <ma14:wrappingTextBoxFlag xmlns:ma14="http://schemas.microsoft.com/office/mac/drawingml/2011/main" xmlns="" val="0"/>
             </a:ext>
           </a:extLst>
         </p:spPr>
@@ -11985,7 +12767,7 @@
           <a:p>
             <a:pPr algn="r"/>
             <a:fld id="{F7021451-1387-4CA6-816F-3879F97B5CBC}" type="slidenum">
-              <a:rPr b="0" lang="en-US"/>
+              <a:rPr lang="en-US" b="0"/>
               <a:t>9</a:t>
             </a:fld>
             <a:endParaRPr lang="en-US"/>
@@ -12293,4 +13075,319 @@
     </a:ext>
   </a:extLst>
 </a:theme>
+</file>
+
+<file path=ppt/theme/theme2.xml><?xml version="1.0" encoding="utf-8"?>
+<a:theme xmlns:a="http://schemas.openxmlformats.org/drawingml/2006/main" name="Tema de Office">
+  <a:themeElements>
+    <a:clrScheme name="Office">
+      <a:dk1>
+        <a:sysClr val="windowText" lastClr="000000"/>
+      </a:dk1>
+      <a:lt1>
+        <a:sysClr val="window" lastClr="FFFFFF"/>
+      </a:lt1>
+      <a:dk2>
+        <a:srgbClr val="0E2841"/>
+      </a:dk2>
+      <a:lt2>
+        <a:srgbClr val="E8E8E8"/>
+      </a:lt2>
+      <a:accent1>
+        <a:srgbClr val="156082"/>
+      </a:accent1>
+      <a:accent2>
+        <a:srgbClr val="E97132"/>
+      </a:accent2>
+      <a:accent3>
+        <a:srgbClr val="196B24"/>
+      </a:accent3>
+      <a:accent4>
+        <a:srgbClr val="0F9ED5"/>
+      </a:accent4>
+      <a:accent5>
+        <a:srgbClr val="A02B93"/>
+      </a:accent5>
+      <a:accent6>
+        <a:srgbClr val="4EA72E"/>
+      </a:accent6>
+      <a:hlink>
+        <a:srgbClr val="467886"/>
+      </a:hlink>
+      <a:folHlink>
+        <a:srgbClr val="96607D"/>
+      </a:folHlink>
+    </a:clrScheme>
+    <a:fontScheme name="Office">
+      <a:majorFont>
+        <a:latin typeface="Aptos Display" panose="02110004020202020204"/>
+        <a:ea typeface=""/>
+        <a:cs typeface=""/>
+        <a:font script="Jpan" typeface="游ゴシック Light"/>
+        <a:font script="Hang" typeface="맑은 고딕"/>
+        <a:font script="Hans" typeface="等线 Light"/>
+        <a:font script="Hant" typeface="新細明體"/>
+        <a:font script="Arab" typeface="Times New Roman"/>
+        <a:font script="Hebr" typeface="Times New Roman"/>
+        <a:font script="Thai" typeface="Angsana New"/>
+        <a:font script="Ethi" typeface="Nyala"/>
+        <a:font script="Beng" typeface="Vrinda"/>
+        <a:font script="Gujr" typeface="Shruti"/>
+        <a:font script="Khmr" typeface="MoolBoran"/>
+        <a:font script="Knda" typeface="Tunga"/>
+        <a:font script="Guru" typeface="Raavi"/>
+        <a:font script="Cans" typeface="Euphemia"/>
+        <a:font script="Cher" typeface="Plantagenet Cherokee"/>
+        <a:font script="Yiii" typeface="Microsoft Yi Baiti"/>
+        <a:font script="Tibt" typeface="Microsoft Himalaya"/>
+        <a:font script="Thaa" typeface="MV Boli"/>
+        <a:font script="Deva" typeface="Mangal"/>
+        <a:font script="Telu" typeface="Gautami"/>
+        <a:font script="Taml" typeface="Latha"/>
+        <a:font script="Syrc" typeface="Estrangelo Edessa"/>
+        <a:font script="Orya" typeface="Kalinga"/>
+        <a:font script="Mlym" typeface="Kartika"/>
+        <a:font script="Laoo" typeface="DokChampa"/>
+        <a:font script="Sinh" typeface="Iskoola Pota"/>
+        <a:font script="Mong" typeface="Mongolian Baiti"/>
+        <a:font script="Viet" typeface="Times New Roman"/>
+        <a:font script="Uigh" typeface="Microsoft Uighur"/>
+        <a:font script="Geor" typeface="Sylfaen"/>
+        <a:font script="Armn" typeface="Arial"/>
+        <a:font script="Bugi" typeface="Leelawadee UI"/>
+        <a:font script="Bopo" typeface="Microsoft JhengHei"/>
+        <a:font script="Java" typeface="Javanese Text"/>
+        <a:font script="Lisu" typeface="Segoe UI"/>
+        <a:font script="Mymr" typeface="Myanmar Text"/>
+        <a:font script="Nkoo" typeface="Ebrima"/>
+        <a:font script="Olck" typeface="Nirmala UI"/>
+        <a:font script="Osma" typeface="Ebrima"/>
+        <a:font script="Phag" typeface="Phagspa"/>
+        <a:font script="Syrn" typeface="Estrangelo Edessa"/>
+        <a:font script="Syrj" typeface="Estrangelo Edessa"/>
+        <a:font script="Syre" typeface="Estrangelo Edessa"/>
+        <a:font script="Sora" typeface="Nirmala UI"/>
+        <a:font script="Tale" typeface="Microsoft Tai Le"/>
+        <a:font script="Talu" typeface="Microsoft New Tai Lue"/>
+        <a:font script="Tfng" typeface="Ebrima"/>
+      </a:majorFont>
+      <a:minorFont>
+        <a:latin typeface="Aptos" panose="02110004020202020204"/>
+        <a:ea typeface=""/>
+        <a:cs typeface=""/>
+        <a:font script="Jpan" typeface="游ゴシック"/>
+        <a:font script="Hang" typeface="맑은 고딕"/>
+        <a:font script="Hans" typeface="等线"/>
+        <a:font script="Hant" typeface="新細明體"/>
+        <a:font script="Arab" typeface="Arial"/>
+        <a:font script="Hebr" typeface="Arial"/>
+        <a:font script="Thai" typeface="Cordia New"/>
+        <a:font script="Ethi" typeface="Nyala"/>
+        <a:font script="Beng" typeface="Vrinda"/>
+        <a:font script="Gujr" typeface="Shruti"/>
+        <a:font script="Khmr" typeface="DaunPenh"/>
+        <a:font script="Knda" typeface="Tunga"/>
+        <a:font script="Guru" typeface="Raavi"/>
+        <a:font script="Cans" typeface="Euphemia"/>
+        <a:font script="Cher" typeface="Plantagenet Cherokee"/>
+        <a:font script="Yiii" typeface="Microsoft Yi Baiti"/>
+        <a:font script="Tibt" typeface="Microsoft Himalaya"/>
+        <a:font script="Thaa" typeface="MV Boli"/>
+        <a:font script="Deva" typeface="Mangal"/>
+        <a:font script="Telu" typeface="Gautami"/>
+        <a:font script="Taml" typeface="Latha"/>
+        <a:font script="Syrc" typeface="Estrangelo Edessa"/>
+        <a:font script="Orya" typeface="Kalinga"/>
+        <a:font script="Mlym" typeface="Kartika"/>
+        <a:font script="Laoo" typeface="DokChampa"/>
+        <a:font script="Sinh" typeface="Iskoola Pota"/>
+        <a:font script="Mong" typeface="Mongolian Baiti"/>
+        <a:font script="Viet" typeface="Arial"/>
+        <a:font script="Uigh" typeface="Microsoft Uighur"/>
+        <a:font script="Geor" typeface="Sylfaen"/>
+        <a:font script="Armn" typeface="Arial"/>
+        <a:font script="Bugi" typeface="Leelawadee UI"/>
+        <a:font script="Bopo" typeface="Microsoft JhengHei"/>
+        <a:font script="Java" typeface="Javanese Text"/>
+        <a:font script="Lisu" typeface="Segoe UI"/>
+        <a:font script="Mymr" typeface="Myanmar Text"/>
+        <a:font script="Nkoo" typeface="Ebrima"/>
+        <a:font script="Olck" typeface="Nirmala UI"/>
+        <a:font script="Osma" typeface="Ebrima"/>
+        <a:font script="Phag" typeface="Phagspa"/>
+        <a:font script="Syrn" typeface="Estrangelo Edessa"/>
+        <a:font script="Syrj" typeface="Estrangelo Edessa"/>
+        <a:font script="Syre" typeface="Estrangelo Edessa"/>
+        <a:font script="Sora" typeface="Nirmala UI"/>
+        <a:font script="Tale" typeface="Microsoft Tai Le"/>
+        <a:font script="Talu" typeface="Microsoft New Tai Lue"/>
+        <a:font script="Tfng" typeface="Ebrima"/>
+      </a:minorFont>
+    </a:fontScheme>
+    <a:fmtScheme name="Office">
+      <a:fillStyleLst>
+        <a:solidFill>
+          <a:schemeClr val="phClr"/>
+        </a:solidFill>
+        <a:gradFill rotWithShape="1">
+          <a:gsLst>
+            <a:gs pos="0">
+              <a:schemeClr val="phClr">
+                <a:lumMod val="110000"/>
+                <a:satMod val="105000"/>
+                <a:tint val="67000"/>
+              </a:schemeClr>
+            </a:gs>
+            <a:gs pos="50000">
+              <a:schemeClr val="phClr">
+                <a:lumMod val="105000"/>
+                <a:satMod val="103000"/>
+                <a:tint val="73000"/>
+              </a:schemeClr>
+            </a:gs>
+            <a:gs pos="100000">
+              <a:schemeClr val="phClr">
+                <a:lumMod val="105000"/>
+                <a:satMod val="109000"/>
+                <a:tint val="81000"/>
+              </a:schemeClr>
+            </a:gs>
+          </a:gsLst>
+          <a:lin ang="5400000" scaled="0"/>
+        </a:gradFill>
+        <a:gradFill rotWithShape="1">
+          <a:gsLst>
+            <a:gs pos="0">
+              <a:schemeClr val="phClr">
+                <a:satMod val="103000"/>
+                <a:lumMod val="102000"/>
+                <a:tint val="94000"/>
+              </a:schemeClr>
+            </a:gs>
+            <a:gs pos="50000">
+              <a:schemeClr val="phClr">
+                <a:satMod val="110000"/>
+                <a:lumMod val="100000"/>
+                <a:shade val="100000"/>
+              </a:schemeClr>
+            </a:gs>
+            <a:gs pos="100000">
+              <a:schemeClr val="phClr">
+                <a:lumMod val="99000"/>
+                <a:satMod val="120000"/>
+                <a:shade val="78000"/>
+              </a:schemeClr>
+            </a:gs>
+          </a:gsLst>
+          <a:lin ang="5400000" scaled="0"/>
+        </a:gradFill>
+      </a:fillStyleLst>
+      <a:lnStyleLst>
+        <a:ln w="12700" cap="flat" cmpd="sng" algn="ctr">
+          <a:solidFill>
+            <a:schemeClr val="phClr"/>
+          </a:solidFill>
+          <a:prstDash val="solid"/>
+          <a:miter lim="800000"/>
+        </a:ln>
+        <a:ln w="19050" cap="flat" cmpd="sng" algn="ctr">
+          <a:solidFill>
+            <a:schemeClr val="phClr"/>
+          </a:solidFill>
+          <a:prstDash val="solid"/>
+          <a:miter lim="800000"/>
+        </a:ln>
+        <a:ln w="25400" cap="flat" cmpd="sng" algn="ctr">
+          <a:solidFill>
+            <a:schemeClr val="phClr"/>
+          </a:solidFill>
+          <a:prstDash val="solid"/>
+          <a:miter lim="800000"/>
+        </a:ln>
+      </a:lnStyleLst>
+      <a:effectStyleLst>
+        <a:effectStyle>
+          <a:effectLst/>
+        </a:effectStyle>
+        <a:effectStyle>
+          <a:effectLst/>
+        </a:effectStyle>
+        <a:effectStyle>
+          <a:effectLst>
+            <a:outerShdw blurRad="57150" dist="19050" dir="5400000" algn="ctr" rotWithShape="0">
+              <a:srgbClr val="000000">
+                <a:alpha val="63000"/>
+              </a:srgbClr>
+            </a:outerShdw>
+          </a:effectLst>
+        </a:effectStyle>
+      </a:effectStyleLst>
+      <a:bgFillStyleLst>
+        <a:solidFill>
+          <a:schemeClr val="phClr"/>
+        </a:solidFill>
+        <a:solidFill>
+          <a:schemeClr val="phClr">
+            <a:tint val="95000"/>
+            <a:satMod val="170000"/>
+          </a:schemeClr>
+        </a:solidFill>
+        <a:gradFill rotWithShape="1">
+          <a:gsLst>
+            <a:gs pos="0">
+              <a:schemeClr val="phClr">
+                <a:tint val="93000"/>
+                <a:satMod val="150000"/>
+                <a:shade val="98000"/>
+                <a:lumMod val="102000"/>
+              </a:schemeClr>
+            </a:gs>
+            <a:gs pos="50000">
+              <a:schemeClr val="phClr">
+                <a:tint val="98000"/>
+                <a:satMod val="130000"/>
+                <a:shade val="90000"/>
+                <a:lumMod val="103000"/>
+              </a:schemeClr>
+            </a:gs>
+            <a:gs pos="100000">
+              <a:schemeClr val="phClr">
+                <a:shade val="63000"/>
+                <a:satMod val="120000"/>
+              </a:schemeClr>
+            </a:gs>
+          </a:gsLst>
+          <a:lin ang="5400000" scaled="0"/>
+        </a:gradFill>
+      </a:bgFillStyleLst>
+    </a:fmtScheme>
+  </a:themeElements>
+  <a:objectDefaults>
+    <a:lnDef>
+      <a:spPr/>
+      <a:bodyPr/>
+      <a:lstStyle/>
+      <a:style>
+        <a:lnRef idx="2">
+          <a:schemeClr val="accent1"/>
+        </a:lnRef>
+        <a:fillRef idx="0">
+          <a:schemeClr val="accent1"/>
+        </a:fillRef>
+        <a:effectRef idx="1">
+          <a:schemeClr val="accent1"/>
+        </a:effectRef>
+        <a:fontRef idx="minor">
+          <a:schemeClr val="tx1"/>
+        </a:fontRef>
+      </a:style>
+    </a:lnDef>
+  </a:objectDefaults>
+  <a:extraClrSchemeLst/>
+  <a:extLst>
+    <a:ext uri="{05A4C25C-085E-4340-85A3-A5531E510DB2}">
+      <thm15:themeFamily xmlns:thm15="http://schemas.microsoft.com/office/thememl/2012/main" name="Office Theme" id="{2E142A2C-CD16-42D6-873A-C26D2A0506FA}" vid="{1BDDFF52-6CD6-40A5-AB3C-68EB2F1E4D0A}"/>
+    </a:ext>
+  </a:extLst>
+</a:theme>
 </file>